--- a/presentations/optical-fiber-presentation.pptx
+++ b/presentations/optical-fiber-presentation.pptx
@@ -7194,8 +7194,8 @@
         </p:nvSpPr>
         <p:spPr>
           <a:xfrm>
-            <a:off x="640080" y="1463040"/>
-            <a:ext cx="10972800" cy="5120640"/>
+            <a:off x="548640" y="1417320"/>
+            <a:ext cx="5577840" cy="5120640"/>
           </a:xfrm>
           <a:prstGeom prst="rect">
             <a:avLst/>
@@ -7214,7 +7214,7 @@
               </a:spcAft>
             </a:pPr>
             <a:r>
-              <a:rPr sz="2000" b="0">
+              <a:rPr sz="1800" b="0">
                 <a:solidFill>
                   <a:srgbClr val="444444"/>
                 </a:solidFill>
@@ -7230,7 +7230,7 @@
               </a:spcAft>
             </a:pPr>
             <a:r>
-              <a:rPr sz="2000" b="0">
+              <a:rPr sz="1800" b="0">
                 <a:solidFill>
                   <a:srgbClr val="444444"/>
                 </a:solidFill>
@@ -7246,13 +7246,29 @@
               </a:spcAft>
             </a:pPr>
             <a:r>
+              <a:rPr sz="1600" b="0">
+                <a:solidFill>
+                  <a:srgbClr val="444444"/>
+                </a:solidFill>
+                <a:latin typeface="Meiryo"/>
+              </a:rPr>
+              <a:t>  – たとえ：プールの底から水面を見ると底が鏡のように映る</a:t>
+            </a:r>
+          </a:p>
+          <a:p>
+            <a:pPr>
+              <a:spcAft>
+                <a:spcPts val="600"/>
+              </a:spcAft>
+            </a:pPr>
+            <a:r>
               <a:rPr sz="1800" b="0">
                 <a:solidFill>
                   <a:srgbClr val="444444"/>
                 </a:solidFill>
                 <a:latin typeface="Meiryo"/>
               </a:rPr>
-              <a:t>  – たとえ：プールの底から水面を見ると底が鏡のように映る</a:t>
+              <a:t>• 中心(コア)を外側(クラッド)で包む構造</a:t>
             </a:r>
           </a:p>
           <a:p>
@@ -7262,29 +7278,483 @@
               </a:spcAft>
             </a:pPr>
             <a:r>
-              <a:rPr sz="2000" b="0">
+              <a:rPr sz="1800" b="0">
                 <a:solidFill>
                   <a:srgbClr val="444444"/>
                 </a:solidFill>
                 <a:latin typeface="Meiryo"/>
               </a:rPr>
-              <a:t>• ファイバーは「光が通る中心」を「跳ね返す外側」で包む</a:t>
-            </a:r>
-          </a:p>
-          <a:p>
-            <a:pPr>
-              <a:spcAft>
-                <a:spcPts val="600"/>
-              </a:spcAft>
-            </a:pPr>
-            <a:r>
-              <a:rPr sz="2000" b="0">
+              <a:t>• ジグザグに反射しながら進み曲げても漏れにくい</a:t>
+            </a:r>
+          </a:p>
+        </p:txBody>
+      </p:sp>
+      <p:sp>
+        <p:nvSpPr>
+          <p:cNvPr id="4" name="Rounded Rectangle 3"/>
+          <p:cNvSpPr/>
+          <p:nvPr/>
+        </p:nvSpPr>
+        <p:spPr>
+          <a:xfrm>
+            <a:off x="6400800" y="2103120"/>
+            <a:ext cx="5212080" cy="2103120"/>
+          </a:xfrm>
+          <a:prstGeom prst="roundRect">
+            <a:avLst/>
+          </a:prstGeom>
+          <a:solidFill>
+            <a:srgbClr val="CFE0F2"/>
+          </a:solidFill>
+          <a:ln w="15875">
+            <a:solidFill>
+              <a:srgbClr val="1F3A5F"/>
+            </a:solidFill>
+          </a:ln>
+          <a:effectLst/>
+        </p:spPr>
+        <p:style>
+          <a:lnRef idx="1">
+            <a:schemeClr val="accent1"/>
+          </a:lnRef>
+          <a:fillRef idx="3">
+            <a:schemeClr val="accent1"/>
+          </a:fillRef>
+          <a:effectRef idx="2">
+            <a:schemeClr val="accent1"/>
+          </a:effectRef>
+          <a:fontRef idx="minor">
+            <a:schemeClr val="lt1"/>
+          </a:fontRef>
+        </p:style>
+        <p:txBody>
+          <a:bodyPr rtlCol="0" anchor="ctr"/>
+          <a:lstStyle/>
+          <a:p>
+            <a:pPr algn="ctr"/>
+          </a:p>
+        </p:txBody>
+      </p:sp>
+      <p:sp>
+        <p:nvSpPr>
+          <p:cNvPr id="5" name="Rectangle 4"/>
+          <p:cNvSpPr/>
+          <p:nvPr/>
+        </p:nvSpPr>
+        <p:spPr>
+          <a:xfrm>
+            <a:off x="6400800" y="2670962"/>
+            <a:ext cx="5212080" cy="967435"/>
+          </a:xfrm>
+          <a:prstGeom prst="rect">
+            <a:avLst/>
+          </a:prstGeom>
+          <a:solidFill>
+            <a:srgbClr val="FFF3C4"/>
+          </a:solidFill>
+          <a:ln w="9525">
+            <a:solidFill>
+              <a:srgbClr val="D8B840"/>
+            </a:solidFill>
+          </a:ln>
+          <a:effectLst/>
+        </p:spPr>
+        <p:style>
+          <a:lnRef idx="1">
+            <a:schemeClr val="accent1"/>
+          </a:lnRef>
+          <a:fillRef idx="3">
+            <a:schemeClr val="accent1"/>
+          </a:fillRef>
+          <a:effectRef idx="2">
+            <a:schemeClr val="accent1"/>
+          </a:effectRef>
+          <a:fontRef idx="minor">
+            <a:schemeClr val="lt1"/>
+          </a:fontRef>
+        </p:style>
+        <p:txBody>
+          <a:bodyPr rtlCol="0" anchor="ctr"/>
+          <a:lstStyle/>
+          <a:p>
+            <a:pPr algn="ctr"/>
+          </a:p>
+        </p:txBody>
+      </p:sp>
+      <p:cxnSp>
+        <p:nvCxnSpPr>
+          <p:cNvPr id="6" name="Connector 5"/>
+          <p:cNvCxnSpPr/>
+          <p:nvPr/>
+        </p:nvCxnSpPr>
+        <p:spPr>
+          <a:xfrm flipV="1">
+            <a:off x="6400800" y="2670962"/>
+            <a:ext cx="1303020" cy="483717"/>
+          </a:xfrm>
+          <a:prstGeom prst="line">
+            <a:avLst/>
+          </a:prstGeom>
+          <a:ln w="31750">
+            <a:solidFill>
+              <a:srgbClr val="D12E2E"/>
+            </a:solidFill>
+          </a:ln>
+        </p:spPr>
+        <p:style>
+          <a:lnRef idx="2">
+            <a:schemeClr val="accent1"/>
+          </a:lnRef>
+          <a:fillRef idx="0">
+            <a:schemeClr val="accent1"/>
+          </a:fillRef>
+          <a:effectRef idx="1">
+            <a:schemeClr val="accent1"/>
+          </a:effectRef>
+          <a:fontRef idx="minor">
+            <a:schemeClr val="tx1"/>
+          </a:fontRef>
+        </p:style>
+      </p:cxnSp>
+      <p:cxnSp>
+        <p:nvCxnSpPr>
+          <p:cNvPr id="7" name="Connector 6"/>
+          <p:cNvCxnSpPr/>
+          <p:nvPr/>
+        </p:nvCxnSpPr>
+        <p:spPr>
+          <a:xfrm>
+            <a:off x="7703820" y="2670962"/>
+            <a:ext cx="1303020" cy="967435"/>
+          </a:xfrm>
+          <a:prstGeom prst="line">
+            <a:avLst/>
+          </a:prstGeom>
+          <a:ln w="31750">
+            <a:solidFill>
+              <a:srgbClr val="D12E2E"/>
+            </a:solidFill>
+          </a:ln>
+        </p:spPr>
+        <p:style>
+          <a:lnRef idx="2">
+            <a:schemeClr val="accent1"/>
+          </a:lnRef>
+          <a:fillRef idx="0">
+            <a:schemeClr val="accent1"/>
+          </a:fillRef>
+          <a:effectRef idx="1">
+            <a:schemeClr val="accent1"/>
+          </a:effectRef>
+          <a:fontRef idx="minor">
+            <a:schemeClr val="tx1"/>
+          </a:fontRef>
+        </p:style>
+      </p:cxnSp>
+      <p:cxnSp>
+        <p:nvCxnSpPr>
+          <p:cNvPr id="8" name="Connector 7"/>
+          <p:cNvCxnSpPr/>
+          <p:nvPr/>
+        </p:nvCxnSpPr>
+        <p:spPr>
+          <a:xfrm flipV="1">
+            <a:off x="9006840" y="2670962"/>
+            <a:ext cx="1303020" cy="967435"/>
+          </a:xfrm>
+          <a:prstGeom prst="line">
+            <a:avLst/>
+          </a:prstGeom>
+          <a:ln w="31750">
+            <a:solidFill>
+              <a:srgbClr val="D12E2E"/>
+            </a:solidFill>
+          </a:ln>
+        </p:spPr>
+        <p:style>
+          <a:lnRef idx="2">
+            <a:schemeClr val="accent1"/>
+          </a:lnRef>
+          <a:fillRef idx="0">
+            <a:schemeClr val="accent1"/>
+          </a:fillRef>
+          <a:effectRef idx="1">
+            <a:schemeClr val="accent1"/>
+          </a:effectRef>
+          <a:fontRef idx="minor">
+            <a:schemeClr val="tx1"/>
+          </a:fontRef>
+        </p:style>
+      </p:cxnSp>
+      <p:cxnSp>
+        <p:nvCxnSpPr>
+          <p:cNvPr id="9" name="Connector 8"/>
+          <p:cNvCxnSpPr/>
+          <p:nvPr/>
+        </p:nvCxnSpPr>
+        <p:spPr>
+          <a:xfrm>
+            <a:off x="10309860" y="2670962"/>
+            <a:ext cx="1303020" cy="483717"/>
+          </a:xfrm>
+          <a:prstGeom prst="line">
+            <a:avLst/>
+          </a:prstGeom>
+          <a:ln w="31750">
+            <a:solidFill>
+              <a:srgbClr val="D12E2E"/>
+            </a:solidFill>
+            <a:tailEnd type="triangle" w="med" len="med"/>
+          </a:ln>
+        </p:spPr>
+        <p:style>
+          <a:lnRef idx="2">
+            <a:schemeClr val="accent1"/>
+          </a:lnRef>
+          <a:fillRef idx="0">
+            <a:schemeClr val="accent1"/>
+          </a:fillRef>
+          <a:effectRef idx="1">
+            <a:schemeClr val="accent1"/>
+          </a:effectRef>
+          <a:fontRef idx="minor">
+            <a:schemeClr val="tx1"/>
+          </a:fontRef>
+        </p:style>
+      </p:cxnSp>
+      <p:sp>
+        <p:nvSpPr>
+          <p:cNvPr id="10" name="Oval 9"/>
+          <p:cNvSpPr/>
+          <p:nvPr/>
+        </p:nvSpPr>
+        <p:spPr>
+          <a:xfrm>
+            <a:off x="7662672" y="2629814"/>
+            <a:ext cx="82296" cy="82296"/>
+          </a:xfrm>
+          <a:prstGeom prst="ellipse">
+            <a:avLst/>
+          </a:prstGeom>
+          <a:solidFill>
+            <a:srgbClr val="D12E2E"/>
+          </a:solidFill>
+          <a:ln>
+            <a:noFill/>
+          </a:ln>
+          <a:effectLst/>
+        </p:spPr>
+        <p:style>
+          <a:lnRef idx="1">
+            <a:schemeClr val="accent1"/>
+          </a:lnRef>
+          <a:fillRef idx="3">
+            <a:schemeClr val="accent1"/>
+          </a:fillRef>
+          <a:effectRef idx="2">
+            <a:schemeClr val="accent1"/>
+          </a:effectRef>
+          <a:fontRef idx="minor">
+            <a:schemeClr val="lt1"/>
+          </a:fontRef>
+        </p:style>
+        <p:txBody>
+          <a:bodyPr rtlCol="0" anchor="ctr"/>
+          <a:lstStyle/>
+          <a:p>
+            <a:pPr algn="ctr"/>
+          </a:p>
+        </p:txBody>
+      </p:sp>
+      <p:sp>
+        <p:nvSpPr>
+          <p:cNvPr id="11" name="Oval 10"/>
+          <p:cNvSpPr/>
+          <p:nvPr/>
+        </p:nvSpPr>
+        <p:spPr>
+          <a:xfrm>
+            <a:off x="8965692" y="3597249"/>
+            <a:ext cx="82296" cy="82296"/>
+          </a:xfrm>
+          <a:prstGeom prst="ellipse">
+            <a:avLst/>
+          </a:prstGeom>
+          <a:solidFill>
+            <a:srgbClr val="D12E2E"/>
+          </a:solidFill>
+          <a:ln>
+            <a:noFill/>
+          </a:ln>
+          <a:effectLst/>
+        </p:spPr>
+        <p:style>
+          <a:lnRef idx="1">
+            <a:schemeClr val="accent1"/>
+          </a:lnRef>
+          <a:fillRef idx="3">
+            <a:schemeClr val="accent1"/>
+          </a:fillRef>
+          <a:effectRef idx="2">
+            <a:schemeClr val="accent1"/>
+          </a:effectRef>
+          <a:fontRef idx="minor">
+            <a:schemeClr val="lt1"/>
+          </a:fontRef>
+        </p:style>
+        <p:txBody>
+          <a:bodyPr rtlCol="0" anchor="ctr"/>
+          <a:lstStyle/>
+          <a:p>
+            <a:pPr algn="ctr"/>
+          </a:p>
+        </p:txBody>
+      </p:sp>
+      <p:sp>
+        <p:nvSpPr>
+          <p:cNvPr id="12" name="Oval 11"/>
+          <p:cNvSpPr/>
+          <p:nvPr/>
+        </p:nvSpPr>
+        <p:spPr>
+          <a:xfrm>
+            <a:off x="10268712" y="2629814"/>
+            <a:ext cx="82296" cy="82296"/>
+          </a:xfrm>
+          <a:prstGeom prst="ellipse">
+            <a:avLst/>
+          </a:prstGeom>
+          <a:solidFill>
+            <a:srgbClr val="D12E2E"/>
+          </a:solidFill>
+          <a:ln>
+            <a:noFill/>
+          </a:ln>
+          <a:effectLst/>
+        </p:spPr>
+        <p:style>
+          <a:lnRef idx="1">
+            <a:schemeClr val="accent1"/>
+          </a:lnRef>
+          <a:fillRef idx="3">
+            <a:schemeClr val="accent1"/>
+          </a:fillRef>
+          <a:effectRef idx="2">
+            <a:schemeClr val="accent1"/>
+          </a:effectRef>
+          <a:fontRef idx="minor">
+            <a:schemeClr val="lt1"/>
+          </a:fontRef>
+        </p:style>
+        <p:txBody>
+          <a:bodyPr rtlCol="0" anchor="ctr"/>
+          <a:lstStyle/>
+          <a:p>
+            <a:pPr algn="ctr"/>
+          </a:p>
+        </p:txBody>
+      </p:sp>
+      <p:sp>
+        <p:nvSpPr>
+          <p:cNvPr id="13" name="TextBox 12"/>
+          <p:cNvSpPr txBox="1"/>
+          <p:nvPr/>
+        </p:nvSpPr>
+        <p:spPr>
+          <a:xfrm>
+            <a:off x="6510528" y="2130551"/>
+            <a:ext cx="4992624" cy="274320"/>
+          </a:xfrm>
+          <a:prstGeom prst="rect">
+            <a:avLst/>
+          </a:prstGeom>
+          <a:noFill/>
+        </p:spPr>
+        <p:txBody>
+          <a:bodyPr wrap="square" tIns="0" bIns="0">
+            <a:spAutoFit/>
+          </a:bodyPr>
+          <a:lstStyle/>
+          <a:p>
+            <a:pPr algn="l"/>
+            <a:r>
+              <a:rPr sz="1100" b="1">
                 <a:solidFill>
-                  <a:srgbClr val="444444"/>
+                  <a:srgbClr val="1F3A5F"/>
                 </a:solidFill>
                 <a:latin typeface="Meiryo"/>
               </a:rPr>
-              <a:t>• 光はジグザグに反射しながら進み、曲げても漏れにくい</a:t>
+              <a:t>クラッド（跳ね返す壁）</a:t>
+            </a:r>
+          </a:p>
+        </p:txBody>
+      </p:sp>
+      <p:sp>
+        <p:nvSpPr>
+          <p:cNvPr id="14" name="TextBox 13"/>
+          <p:cNvSpPr txBox="1"/>
+          <p:nvPr/>
+        </p:nvSpPr>
+        <p:spPr>
+          <a:xfrm>
+            <a:off x="6510528" y="3656685"/>
+            <a:ext cx="4992624" cy="274320"/>
+          </a:xfrm>
+          <a:prstGeom prst="rect">
+            <a:avLst/>
+          </a:prstGeom>
+          <a:noFill/>
+        </p:spPr>
+        <p:txBody>
+          <a:bodyPr wrap="square" tIns="0" bIns="0">
+            <a:spAutoFit/>
+          </a:bodyPr>
+          <a:lstStyle/>
+          <a:p>
+            <a:pPr algn="ctr"/>
+            <a:r>
+              <a:rPr sz="1100" b="1">
+                <a:solidFill>
+                  <a:srgbClr val="B89010"/>
+                </a:solidFill>
+                <a:latin typeface="Meiryo"/>
+              </a:rPr>
+              <a:t>コア（光の通り道）</a:t>
+            </a:r>
+          </a:p>
+        </p:txBody>
+      </p:sp>
+      <p:sp>
+        <p:nvSpPr>
+          <p:cNvPr id="15" name="TextBox 14"/>
+          <p:cNvSpPr txBox="1"/>
+          <p:nvPr/>
+        </p:nvSpPr>
+        <p:spPr>
+          <a:xfrm>
+            <a:off x="6400800" y="4480560"/>
+            <a:ext cx="5212080" cy="365760"/>
+          </a:xfrm>
+          <a:prstGeom prst="rect">
+            <a:avLst/>
+          </a:prstGeom>
+          <a:noFill/>
+        </p:spPr>
+        <p:txBody>
+          <a:bodyPr wrap="square" tIns="0" bIns="0">
+            <a:spAutoFit/>
+          </a:bodyPr>
+          <a:lstStyle/>
+          <a:p>
+            <a:pPr algn="ctr"/>
+            <a:r>
+              <a:rPr sz="1300" b="1">
+                <a:solidFill>
+                  <a:srgbClr val="1F3A5F"/>
+                </a:solidFill>
+                <a:latin typeface="Meiryo"/>
+              </a:rPr>
+              <a:t>▲ 光が全反射しながら進むようす</a:t>
             </a:r>
           </a:p>
         </p:txBody>
@@ -7376,8 +7846,8 @@
           <p:nvPr/>
         </p:nvGraphicFramePr>
         <p:xfrm>
-          <a:off x="548640" y="1325880"/>
-          <a:ext cx="11064240" cy="2743200"/>
+          <a:off x="457200" y="1417320"/>
+          <a:ext cx="6583680" cy="2743200"/>
         </p:xfrm>
         <a:graphic>
           <a:graphicData uri="http://schemas.openxmlformats.org/drawingml/2006/table">
@@ -7386,9 +7856,9 @@
                 <a:tableStyleId>{5C22544A-7EE6-4342-B048-85BDC9FD1C3A}</a:tableStyleId>
               </a:tblPr>
               <a:tblGrid>
-                <a:gridCol w="2743200"/>
-                <a:gridCol w="4663440"/>
-                <a:gridCol w="3657600"/>
+                <a:gridCol w="1554480"/>
+                <a:gridCol w="3017520"/>
+                <a:gridCol w="2011680"/>
               </a:tblGrid>
               <a:tr h="685800">
                 <a:tc>
@@ -7398,7 +7868,7 @@
                     <a:p>
                       <a:pPr algn="ctr"/>
                       <a:r>
-                        <a:rPr sz="1600" b="1">
+                        <a:rPr sz="1400" b="1">
                           <a:solidFill>
                             <a:srgbClr val="FFFFFF"/>
                           </a:solidFill>
@@ -7421,7 +7891,7 @@
                     <a:p>
                       <a:pPr algn="ctr"/>
                       <a:r>
-                        <a:rPr sz="1600" b="1">
+                        <a:rPr sz="1400" b="1">
                           <a:solidFill>
                             <a:srgbClr val="FFFFFF"/>
                           </a:solidFill>
@@ -7444,7 +7914,7 @@
                     <a:p>
                       <a:pPr algn="ctr"/>
                       <a:r>
-                        <a:rPr sz="1600" b="1">
+                        <a:rPr sz="1400" b="1">
                           <a:solidFill>
                             <a:srgbClr val="FFFFFF"/>
                           </a:solidFill>
@@ -7468,7 +7938,7 @@
                     <a:lstStyle/>
                     <a:p>
                       <a:r>
-                        <a:rPr sz="1600" b="1">
+                        <a:rPr sz="1400" b="1">
                           <a:solidFill>
                             <a:srgbClr val="1F3A5F"/>
                           </a:solidFill>
@@ -7490,7 +7960,7 @@
                     <a:lstStyle/>
                     <a:p>
                       <a:r>
-                        <a:rPr sz="1600" b="0">
+                        <a:rPr sz="1400" b="0">
                           <a:solidFill>
                             <a:srgbClr val="444444"/>
                           </a:solidFill>
@@ -7512,13 +7982,13 @@
                     <a:lstStyle/>
                     <a:p>
                       <a:r>
-                        <a:rPr sz="1600" b="0">
+                        <a:rPr sz="1400" b="0">
                           <a:solidFill>
                             <a:srgbClr val="444444"/>
                           </a:solidFill>
                           <a:latin typeface="Meiryo"/>
                         </a:rPr>
-                        <a:t>ストロー内の水の通り道</a:t>
+                        <a:t>水の通り道</a:t>
                       </a:r>
                     </a:p>
                   </a:txBody>
@@ -7536,7 +8006,7 @@
                     <a:lstStyle/>
                     <a:p>
                       <a:r>
-                        <a:rPr sz="1600" b="1">
+                        <a:rPr sz="1400" b="1">
                           <a:solidFill>
                             <a:srgbClr val="1F3A5F"/>
                           </a:solidFill>
@@ -7558,13 +8028,13 @@
                     <a:lstStyle/>
                     <a:p>
                       <a:r>
-                        <a:rPr sz="1600" b="0">
+                        <a:rPr sz="1400" b="0">
                           <a:solidFill>
                             <a:srgbClr val="444444"/>
                           </a:solidFill>
                           <a:latin typeface="Meiryo"/>
                         </a:rPr>
-                        <a:t>光を逃がさず跳ね返す（屈折率 低）</a:t>
+                        <a:t>跳ね返す（屈折率 低）</a:t>
                       </a:r>
                     </a:p>
                   </a:txBody>
@@ -7580,13 +8050,13 @@
                     <a:lstStyle/>
                     <a:p>
                       <a:r>
-                        <a:rPr sz="1600" b="0">
+                        <a:rPr sz="1400" b="0">
                           <a:solidFill>
                             <a:srgbClr val="444444"/>
                           </a:solidFill>
                           <a:latin typeface="Meiryo"/>
                         </a:rPr>
-                        <a:t>通り道を囲む鏡の壁</a:t>
+                        <a:t>鏡の壁</a:t>
                       </a:r>
                     </a:p>
                   </a:txBody>
@@ -7604,13 +8074,13 @@
                     <a:lstStyle/>
                     <a:p>
                       <a:r>
-                        <a:rPr sz="1600" b="1">
+                        <a:rPr sz="1400" b="1">
                           <a:solidFill>
                             <a:srgbClr val="1F3A5F"/>
                           </a:solidFill>
                           <a:latin typeface="Meiryo"/>
                         </a:rPr>
-                        <a:t>被覆/ジャケット</a:t>
+                        <a:t>被覆</a:t>
                       </a:r>
                     </a:p>
                   </a:txBody>
@@ -7626,7 +8096,7 @@
                     <a:lstStyle/>
                     <a:p>
                       <a:r>
-                        <a:rPr sz="1600" b="0">
+                        <a:rPr sz="1400" b="0">
                           <a:solidFill>
                             <a:srgbClr val="444444"/>
                           </a:solidFill>
@@ -7648,13 +8118,13 @@
                     <a:lstStyle/>
                     <a:p>
                       <a:r>
-                        <a:rPr sz="1600" b="0">
+                        <a:rPr sz="1400" b="0">
                           <a:solidFill>
                             <a:srgbClr val="444444"/>
                           </a:solidFill>
                           <a:latin typeface="Meiryo"/>
                         </a:rPr>
-                        <a:t>ケーブルの服・よろい</a:t>
+                        <a:t>服・よろい</a:t>
                       </a:r>
                     </a:p>
                   </a:txBody>
@@ -7677,8 +8147,8 @@
         </p:nvSpPr>
         <p:spPr>
           <a:xfrm>
-            <a:off x="640080" y="4663440"/>
-            <a:ext cx="10972800" cy="5120640"/>
+            <a:off x="457200" y="4526280"/>
+            <a:ext cx="6583680" cy="5120640"/>
           </a:xfrm>
           <a:prstGeom prst="rect">
             <a:avLst/>
@@ -7697,13 +8167,429 @@
               </a:spcAft>
             </a:pPr>
             <a:r>
-              <a:rPr sz="1800" b="0">
+              <a:rPr sz="1600" b="0">
                 <a:solidFill>
                   <a:srgbClr val="444444"/>
                 </a:solidFill>
                 <a:latin typeface="Meiryo"/>
               </a:rPr>
               <a:t>• ポイント：コア＞クラッドの屈折率差が全反射を生む</a:t>
+            </a:r>
+          </a:p>
+        </p:txBody>
+      </p:sp>
+      <p:sp>
+        <p:nvSpPr>
+          <p:cNvPr id="5" name="TextBox 4"/>
+          <p:cNvSpPr txBox="1"/>
+          <p:nvPr/>
+        </p:nvSpPr>
+        <p:spPr>
+          <a:xfrm>
+            <a:off x="7315200" y="1371600"/>
+            <a:ext cx="4206240" cy="365760"/>
+          </a:xfrm>
+          <a:prstGeom prst="rect">
+            <a:avLst/>
+          </a:prstGeom>
+          <a:noFill/>
+        </p:spPr>
+        <p:txBody>
+          <a:bodyPr wrap="square" tIns="0" bIns="0">
+            <a:spAutoFit/>
+          </a:bodyPr>
+          <a:lstStyle/>
+          <a:p>
+            <a:pPr algn="ctr"/>
+            <a:r>
+              <a:rPr sz="1500" b="1">
+                <a:solidFill>
+                  <a:srgbClr val="1F3A5F"/>
+                </a:solidFill>
+                <a:latin typeface="Meiryo"/>
+              </a:rPr>
+              <a:t>断面図（輪切り）</a:t>
+            </a:r>
+          </a:p>
+        </p:txBody>
+      </p:sp>
+      <p:sp>
+        <p:nvSpPr>
+          <p:cNvPr id="6" name="Oval 5"/>
+          <p:cNvSpPr/>
+          <p:nvPr/>
+        </p:nvSpPr>
+        <p:spPr>
+          <a:xfrm>
+            <a:off x="8229600" y="1874519"/>
+            <a:ext cx="2377440" cy="2377440"/>
+          </a:xfrm>
+          <a:prstGeom prst="ellipse">
+            <a:avLst/>
+          </a:prstGeom>
+          <a:solidFill>
+            <a:srgbClr val="DDE3EA"/>
+          </a:solidFill>
+          <a:ln w="15875">
+            <a:solidFill>
+              <a:srgbClr val="1F3A5F"/>
+            </a:solidFill>
+          </a:ln>
+          <a:effectLst/>
+        </p:spPr>
+        <p:style>
+          <a:lnRef idx="1">
+            <a:schemeClr val="accent1"/>
+          </a:lnRef>
+          <a:fillRef idx="3">
+            <a:schemeClr val="accent1"/>
+          </a:fillRef>
+          <a:effectRef idx="2">
+            <a:schemeClr val="accent1"/>
+          </a:effectRef>
+          <a:fontRef idx="minor">
+            <a:schemeClr val="lt1"/>
+          </a:fontRef>
+        </p:style>
+        <p:txBody>
+          <a:bodyPr rtlCol="0" anchor="ctr"/>
+          <a:lstStyle/>
+          <a:p>
+            <a:pPr algn="ctr"/>
+          </a:p>
+        </p:txBody>
+      </p:sp>
+      <p:sp>
+        <p:nvSpPr>
+          <p:cNvPr id="7" name="Oval 6"/>
+          <p:cNvSpPr/>
+          <p:nvPr/>
+        </p:nvSpPr>
+        <p:spPr>
+          <a:xfrm>
+            <a:off x="8562441" y="2207361"/>
+            <a:ext cx="1711756" cy="1711756"/>
+          </a:xfrm>
+          <a:prstGeom prst="ellipse">
+            <a:avLst/>
+          </a:prstGeom>
+          <a:solidFill>
+            <a:srgbClr val="BFD6EE"/>
+          </a:solidFill>
+          <a:ln w="15875">
+            <a:solidFill>
+              <a:srgbClr val="2E6DB4"/>
+            </a:solidFill>
+          </a:ln>
+          <a:effectLst/>
+        </p:spPr>
+        <p:style>
+          <a:lnRef idx="1">
+            <a:schemeClr val="accent1"/>
+          </a:lnRef>
+          <a:fillRef idx="3">
+            <a:schemeClr val="accent1"/>
+          </a:fillRef>
+          <a:effectRef idx="2">
+            <a:schemeClr val="accent1"/>
+          </a:effectRef>
+          <a:fontRef idx="minor">
+            <a:schemeClr val="lt1"/>
+          </a:fontRef>
+        </p:style>
+        <p:txBody>
+          <a:bodyPr rtlCol="0" anchor="ctr"/>
+          <a:lstStyle/>
+          <a:p>
+            <a:pPr algn="ctr"/>
+          </a:p>
+        </p:txBody>
+      </p:sp>
+      <p:sp>
+        <p:nvSpPr>
+          <p:cNvPr id="8" name="Oval 7"/>
+          <p:cNvSpPr/>
+          <p:nvPr/>
+        </p:nvSpPr>
+        <p:spPr>
+          <a:xfrm>
+            <a:off x="9014155" y="2659075"/>
+            <a:ext cx="808329" cy="808329"/>
+          </a:xfrm>
+          <a:prstGeom prst="ellipse">
+            <a:avLst/>
+          </a:prstGeom>
+          <a:solidFill>
+            <a:srgbClr val="FFEC99"/>
+          </a:solidFill>
+          <a:ln w="15875">
+            <a:solidFill>
+              <a:srgbClr val="D8B840"/>
+            </a:solidFill>
+          </a:ln>
+          <a:effectLst/>
+        </p:spPr>
+        <p:style>
+          <a:lnRef idx="1">
+            <a:schemeClr val="accent1"/>
+          </a:lnRef>
+          <a:fillRef idx="3">
+            <a:schemeClr val="accent1"/>
+          </a:fillRef>
+          <a:effectRef idx="2">
+            <a:schemeClr val="accent1"/>
+          </a:effectRef>
+          <a:fontRef idx="minor">
+            <a:schemeClr val="lt1"/>
+          </a:fontRef>
+        </p:style>
+        <p:txBody>
+          <a:bodyPr rtlCol="0" anchor="ctr"/>
+          <a:lstStyle/>
+          <a:p>
+            <a:pPr algn="ctr"/>
+          </a:p>
+        </p:txBody>
+      </p:sp>
+      <p:sp>
+        <p:nvSpPr>
+          <p:cNvPr id="9" name="Rectangle 8"/>
+          <p:cNvSpPr/>
+          <p:nvPr/>
+        </p:nvSpPr>
+        <p:spPr>
+          <a:xfrm>
+            <a:off x="7818120" y="4572000"/>
+            <a:ext cx="219456" cy="219456"/>
+          </a:xfrm>
+          <a:prstGeom prst="rect">
+            <a:avLst/>
+          </a:prstGeom>
+          <a:solidFill>
+            <a:srgbClr val="FFEC99"/>
+          </a:solidFill>
+          <a:ln w="6350">
+            <a:solidFill>
+              <a:srgbClr val="1F3A5F"/>
+            </a:solidFill>
+          </a:ln>
+          <a:effectLst/>
+        </p:spPr>
+        <p:style>
+          <a:lnRef idx="1">
+            <a:schemeClr val="accent1"/>
+          </a:lnRef>
+          <a:fillRef idx="3">
+            <a:schemeClr val="accent1"/>
+          </a:fillRef>
+          <a:effectRef idx="2">
+            <a:schemeClr val="accent1"/>
+          </a:effectRef>
+          <a:fontRef idx="minor">
+            <a:schemeClr val="lt1"/>
+          </a:fontRef>
+        </p:style>
+        <p:txBody>
+          <a:bodyPr rtlCol="0" anchor="ctr"/>
+          <a:lstStyle/>
+          <a:p>
+            <a:pPr algn="ctr"/>
+          </a:p>
+        </p:txBody>
+      </p:sp>
+      <p:sp>
+        <p:nvSpPr>
+          <p:cNvPr id="10" name="TextBox 9"/>
+          <p:cNvSpPr txBox="1"/>
+          <p:nvPr/>
+        </p:nvSpPr>
+        <p:spPr>
+          <a:xfrm>
+            <a:off x="8147304" y="4553712"/>
+            <a:ext cx="3840480" cy="274320"/>
+          </a:xfrm>
+          <a:prstGeom prst="rect">
+            <a:avLst/>
+          </a:prstGeom>
+          <a:noFill/>
+        </p:spPr>
+        <p:txBody>
+          <a:bodyPr wrap="square" tIns="0" bIns="0">
+            <a:spAutoFit/>
+          </a:bodyPr>
+          <a:lstStyle/>
+          <a:p>
+            <a:pPr algn="l"/>
+            <a:r>
+              <a:rPr sz="1200" b="0">
+                <a:solidFill>
+                  <a:srgbClr val="444444"/>
+                </a:solidFill>
+                <a:latin typeface="Meiryo"/>
+              </a:rPr>
+              <a:t>コア（光が通る芯）</a:t>
+            </a:r>
+          </a:p>
+        </p:txBody>
+      </p:sp>
+      <p:sp>
+        <p:nvSpPr>
+          <p:cNvPr id="11" name="Rectangle 10"/>
+          <p:cNvSpPr/>
+          <p:nvPr/>
+        </p:nvSpPr>
+        <p:spPr>
+          <a:xfrm>
+            <a:off x="7818120" y="4992624"/>
+            <a:ext cx="219456" cy="219456"/>
+          </a:xfrm>
+          <a:prstGeom prst="rect">
+            <a:avLst/>
+          </a:prstGeom>
+          <a:solidFill>
+            <a:srgbClr val="BFD6EE"/>
+          </a:solidFill>
+          <a:ln w="6350">
+            <a:solidFill>
+              <a:srgbClr val="1F3A5F"/>
+            </a:solidFill>
+          </a:ln>
+          <a:effectLst/>
+        </p:spPr>
+        <p:style>
+          <a:lnRef idx="1">
+            <a:schemeClr val="accent1"/>
+          </a:lnRef>
+          <a:fillRef idx="3">
+            <a:schemeClr val="accent1"/>
+          </a:fillRef>
+          <a:effectRef idx="2">
+            <a:schemeClr val="accent1"/>
+          </a:effectRef>
+          <a:fontRef idx="minor">
+            <a:schemeClr val="lt1"/>
+          </a:fontRef>
+        </p:style>
+        <p:txBody>
+          <a:bodyPr rtlCol="0" anchor="ctr"/>
+          <a:lstStyle/>
+          <a:p>
+            <a:pPr algn="ctr"/>
+          </a:p>
+        </p:txBody>
+      </p:sp>
+      <p:sp>
+        <p:nvSpPr>
+          <p:cNvPr id="12" name="TextBox 11"/>
+          <p:cNvSpPr txBox="1"/>
+          <p:nvPr/>
+        </p:nvSpPr>
+        <p:spPr>
+          <a:xfrm>
+            <a:off x="8147304" y="4974336"/>
+            <a:ext cx="3840480" cy="274320"/>
+          </a:xfrm>
+          <a:prstGeom prst="rect">
+            <a:avLst/>
+          </a:prstGeom>
+          <a:noFill/>
+        </p:spPr>
+        <p:txBody>
+          <a:bodyPr wrap="square" tIns="0" bIns="0">
+            <a:spAutoFit/>
+          </a:bodyPr>
+          <a:lstStyle/>
+          <a:p>
+            <a:pPr algn="l"/>
+            <a:r>
+              <a:rPr sz="1200" b="0">
+                <a:solidFill>
+                  <a:srgbClr val="444444"/>
+                </a:solidFill>
+                <a:latin typeface="Meiryo"/>
+              </a:rPr>
+              <a:t>クラッド（跳ね返す層）</a:t>
+            </a:r>
+          </a:p>
+        </p:txBody>
+      </p:sp>
+      <p:sp>
+        <p:nvSpPr>
+          <p:cNvPr id="13" name="Rectangle 12"/>
+          <p:cNvSpPr/>
+          <p:nvPr/>
+        </p:nvSpPr>
+        <p:spPr>
+          <a:xfrm>
+            <a:off x="7818120" y="5413248"/>
+            <a:ext cx="219456" cy="219456"/>
+          </a:xfrm>
+          <a:prstGeom prst="rect">
+            <a:avLst/>
+          </a:prstGeom>
+          <a:solidFill>
+            <a:srgbClr val="DDE3EA"/>
+          </a:solidFill>
+          <a:ln w="6350">
+            <a:solidFill>
+              <a:srgbClr val="1F3A5F"/>
+            </a:solidFill>
+          </a:ln>
+          <a:effectLst/>
+        </p:spPr>
+        <p:style>
+          <a:lnRef idx="1">
+            <a:schemeClr val="accent1"/>
+          </a:lnRef>
+          <a:fillRef idx="3">
+            <a:schemeClr val="accent1"/>
+          </a:fillRef>
+          <a:effectRef idx="2">
+            <a:schemeClr val="accent1"/>
+          </a:effectRef>
+          <a:fontRef idx="minor">
+            <a:schemeClr val="lt1"/>
+          </a:fontRef>
+        </p:style>
+        <p:txBody>
+          <a:bodyPr rtlCol="0" anchor="ctr"/>
+          <a:lstStyle/>
+          <a:p>
+            <a:pPr algn="ctr"/>
+          </a:p>
+        </p:txBody>
+      </p:sp>
+      <p:sp>
+        <p:nvSpPr>
+          <p:cNvPr id="14" name="TextBox 13"/>
+          <p:cNvSpPr txBox="1"/>
+          <p:nvPr/>
+        </p:nvSpPr>
+        <p:spPr>
+          <a:xfrm>
+            <a:off x="8147304" y="5394960"/>
+            <a:ext cx="3840480" cy="274320"/>
+          </a:xfrm>
+          <a:prstGeom prst="rect">
+            <a:avLst/>
+          </a:prstGeom>
+          <a:noFill/>
+        </p:spPr>
+        <p:txBody>
+          <a:bodyPr wrap="square" tIns="0" bIns="0">
+            <a:spAutoFit/>
+          </a:bodyPr>
+          <a:lstStyle/>
+          <a:p>
+            <a:pPr algn="l"/>
+            <a:r>
+              <a:rPr sz="1200" b="0">
+                <a:solidFill>
+                  <a:srgbClr val="444444"/>
+                </a:solidFill>
+                <a:latin typeface="Meiryo"/>
+              </a:rPr>
+              <a:t>被覆（保護の服）</a:t>
             </a:r>
           </a:p>
         </p:txBody>

--- a/presentations/optical-fiber-presentation.pptx
+++ b/presentations/optical-fiber-presentation.pptx
@@ -22,6 +22,11 @@
     <p:sldId id="270" r:id="rId21"/>
     <p:sldId id="271" r:id="rId22"/>
     <p:sldId id="272" r:id="rId23"/>
+    <p:sldId id="273" r:id="rId24"/>
+    <p:sldId id="274" r:id="rId25"/>
+    <p:sldId id="275" r:id="rId26"/>
+    <p:sldId id="276" r:id="rId27"/>
+    <p:sldId id="277" r:id="rId28"/>
   </p:sldIdLst>
   <p:sldSz cx="12191695" cy="6858000" type="screen4x3"/>
   <p:notesSz cx="6858000" cy="9144000"/>
@@ -5439,449 +5444,1420 @@
                 </a:solidFill>
                 <a:latin typeface="Meiryo"/>
               </a:rPr>
-              <a:t>成端箱とクロージャの違い</a:t>
-            </a:r>
-          </a:p>
-        </p:txBody>
-      </p:sp>
-      <p:graphicFrame>
-        <p:nvGraphicFramePr>
-          <p:cNvPr id="3" name="Table 2"/>
-          <p:cNvGraphicFramePr>
-            <a:graphicFrameLocks noGrp="1"/>
-          </p:cNvGraphicFramePr>
+              <a:t>ケーブルとコード（イメージ図）</a:t>
+            </a:r>
+          </a:p>
+        </p:txBody>
+      </p:sp>
+      <p:sp>
+        <p:nvSpPr>
+          <p:cNvPr id="3" name="TextBox 2"/>
+          <p:cNvSpPr txBox="1"/>
           <p:nvPr/>
-        </p:nvGraphicFramePr>
-        <p:xfrm>
-          <a:off x="548640" y="1325880"/>
-          <a:ext cx="11064240" cy="4389120"/>
-        </p:xfrm>
-        <a:graphic>
-          <a:graphicData uri="http://schemas.openxmlformats.org/drawingml/2006/table">
-            <a:tbl>
-              <a:tblPr firstRow="1" bandRow="1">
-                <a:tableStyleId>{5C22544A-7EE6-4342-B048-85BDC9FD1C3A}</a:tableStyleId>
-              </a:tblPr>
-              <a:tblGrid>
-                <a:gridCol w="2103120"/>
-                <a:gridCol w="4480560"/>
-                <a:gridCol w="4480560"/>
-              </a:tblGrid>
-              <a:tr h="731520">
-                <a:tc>
-                  <a:txBody>
-                    <a:bodyPr wrap="square"/>
-                    <a:lstStyle/>
-                    <a:p>
-                      <a:pPr algn="ctr"/>
-                      <a:r>
-                        <a:rPr sz="1500" b="1">
-                          <a:solidFill>
-                            <a:srgbClr val="FFFFFF"/>
-                          </a:solidFill>
-                          <a:latin typeface="Meiryo"/>
-                        </a:rPr>
-                        <a:t>観点</a:t>
-                      </a:r>
-                    </a:p>
-                  </a:txBody>
-                  <a:tcPr>
-                    <a:solidFill>
-                      <a:srgbClr val="1F3A5F"/>
-                    </a:solidFill>
-                  </a:tcPr>
-                </a:tc>
-                <a:tc>
-                  <a:txBody>
-                    <a:bodyPr wrap="square"/>
-                    <a:lstStyle/>
-                    <a:p>
-                      <a:pPr algn="ctr"/>
-                      <a:r>
-                        <a:rPr sz="1500" b="1">
-                          <a:solidFill>
-                            <a:srgbClr val="FFFFFF"/>
-                          </a:solidFill>
-                          <a:latin typeface="Meiryo"/>
-                        </a:rPr>
-                        <a:t>成端箱</a:t>
-                      </a:r>
-                    </a:p>
-                  </a:txBody>
-                  <a:tcPr>
-                    <a:solidFill>
-                      <a:srgbClr val="1F3A5F"/>
-                    </a:solidFill>
-                  </a:tcPr>
-                </a:tc>
-                <a:tc>
-                  <a:txBody>
-                    <a:bodyPr wrap="square"/>
-                    <a:lstStyle/>
-                    <a:p>
-                      <a:pPr algn="ctr"/>
-                      <a:r>
-                        <a:rPr sz="1500" b="1">
-                          <a:solidFill>
-                            <a:srgbClr val="FFFFFF"/>
-                          </a:solidFill>
-                          <a:latin typeface="Meiryo"/>
-                        </a:rPr>
-                        <a:t>クロージャ</a:t>
-                      </a:r>
-                    </a:p>
-                  </a:txBody>
-                  <a:tcPr>
-                    <a:solidFill>
-                      <a:srgbClr val="1F3A5F"/>
-                    </a:solidFill>
-                  </a:tcPr>
-                </a:tc>
-              </a:tr>
-              <a:tr h="731520">
-                <a:tc>
-                  <a:txBody>
-                    <a:bodyPr wrap="square"/>
-                    <a:lstStyle/>
-                    <a:p>
-                      <a:r>
-                        <a:rPr sz="1500" b="1">
-                          <a:solidFill>
-                            <a:srgbClr val="1F3A5F"/>
-                          </a:solidFill>
-                          <a:latin typeface="Meiryo"/>
-                        </a:rPr>
-                        <a:t>位置</a:t>
-                      </a:r>
-                    </a:p>
-                  </a:txBody>
-                  <a:tcPr>
-                    <a:solidFill>
-                      <a:srgbClr val="EDF3FA"/>
-                    </a:solidFill>
-                  </a:tcPr>
-                </a:tc>
-                <a:tc>
-                  <a:txBody>
-                    <a:bodyPr wrap="square"/>
-                    <a:lstStyle/>
-                    <a:p>
-                      <a:r>
-                        <a:rPr sz="1500" b="0">
-                          <a:solidFill>
-                            <a:srgbClr val="444444"/>
-                          </a:solidFill>
-                          <a:latin typeface="Meiryo"/>
-                        </a:rPr>
-                        <a:t>ケーブルの端末</a:t>
-                      </a:r>
-                    </a:p>
-                  </a:txBody>
-                  <a:tcPr>
-                    <a:solidFill>
-                      <a:srgbClr val="EDF3FA"/>
-                    </a:solidFill>
-                  </a:tcPr>
-                </a:tc>
-                <a:tc>
-                  <a:txBody>
-                    <a:bodyPr wrap="square"/>
-                    <a:lstStyle/>
-                    <a:p>
-                      <a:r>
-                        <a:rPr sz="1500" b="0">
-                          <a:solidFill>
-                            <a:srgbClr val="444444"/>
-                          </a:solidFill>
-                          <a:latin typeface="Meiryo"/>
-                        </a:rPr>
-                        <a:t>ケーブルの途中</a:t>
-                      </a:r>
-                    </a:p>
-                  </a:txBody>
-                  <a:tcPr>
-                    <a:solidFill>
-                      <a:srgbClr val="EDF3FA"/>
-                    </a:solidFill>
-                  </a:tcPr>
-                </a:tc>
-              </a:tr>
-              <a:tr h="731520">
-                <a:tc>
-                  <a:txBody>
-                    <a:bodyPr wrap="square"/>
-                    <a:lstStyle/>
-                    <a:p>
-                      <a:r>
-                        <a:rPr sz="1500" b="1">
-                          <a:solidFill>
-                            <a:srgbClr val="1F3A5F"/>
-                          </a:solidFill>
-                          <a:latin typeface="Meiryo"/>
-                        </a:rPr>
-                        <a:t>主目的</a:t>
-                      </a:r>
-                    </a:p>
-                  </a:txBody>
-                  <a:tcPr>
-                    <a:solidFill>
-                      <a:srgbClr val="FFFFFF"/>
-                    </a:solidFill>
-                  </a:tcPr>
-                </a:tc>
-                <a:tc>
-                  <a:txBody>
-                    <a:bodyPr wrap="square"/>
-                    <a:lstStyle/>
-                    <a:p>
-                      <a:r>
-                        <a:rPr sz="1500" b="0">
-                          <a:solidFill>
-                            <a:srgbClr val="444444"/>
-                          </a:solidFill>
-                          <a:latin typeface="Meiryo"/>
-                        </a:rPr>
-                        <a:t>心線をコネクタ化(成端)して機器へ</a:t>
-                      </a:r>
-                    </a:p>
-                  </a:txBody>
-                  <a:tcPr>
-                    <a:solidFill>
-                      <a:srgbClr val="FFFFFF"/>
-                    </a:solidFill>
-                  </a:tcPr>
-                </a:tc>
-                <a:tc>
-                  <a:txBody>
-                    <a:bodyPr wrap="square"/>
-                    <a:lstStyle/>
-                    <a:p>
-                      <a:r>
-                        <a:rPr sz="1500" b="0">
-                          <a:solidFill>
-                            <a:srgbClr val="444444"/>
-                          </a:solidFill>
-                          <a:latin typeface="Meiryo"/>
-                        </a:rPr>
-                        <a:t>接続・分岐点を保護・収納</a:t>
-                      </a:r>
-                    </a:p>
-                  </a:txBody>
-                  <a:tcPr>
-                    <a:solidFill>
-                      <a:srgbClr val="FFFFFF"/>
-                    </a:solidFill>
-                  </a:tcPr>
-                </a:tc>
-              </a:tr>
-              <a:tr h="731520">
-                <a:tc>
-                  <a:txBody>
-                    <a:bodyPr wrap="square"/>
-                    <a:lstStyle/>
-                    <a:p>
-                      <a:r>
-                        <a:rPr sz="1500" b="1">
-                          <a:solidFill>
-                            <a:srgbClr val="1F3A5F"/>
-                          </a:solidFill>
-                          <a:latin typeface="Meiryo"/>
-                        </a:rPr>
-                        <a:t>設置場所</a:t>
-                      </a:r>
-                    </a:p>
-                  </a:txBody>
-                  <a:tcPr>
-                    <a:solidFill>
-                      <a:srgbClr val="EDF3FA"/>
-                    </a:solidFill>
-                  </a:tcPr>
-                </a:tc>
-                <a:tc>
-                  <a:txBody>
-                    <a:bodyPr wrap="square"/>
-                    <a:lstStyle/>
-                    <a:p>
-                      <a:r>
-                        <a:rPr sz="1500" b="0">
-                          <a:solidFill>
-                            <a:srgbClr val="444444"/>
-                          </a:solidFill>
-                          <a:latin typeface="Meiryo"/>
-                        </a:rPr>
-                        <a:t>屋内が中心</a:t>
-                      </a:r>
-                    </a:p>
-                  </a:txBody>
-                  <a:tcPr>
-                    <a:solidFill>
-                      <a:srgbClr val="EDF3FA"/>
-                    </a:solidFill>
-                  </a:tcPr>
-                </a:tc>
-                <a:tc>
-                  <a:txBody>
-                    <a:bodyPr wrap="square"/>
-                    <a:lstStyle/>
-                    <a:p>
-                      <a:r>
-                        <a:rPr sz="1500" b="0">
-                          <a:solidFill>
-                            <a:srgbClr val="444444"/>
-                          </a:solidFill>
-                          <a:latin typeface="Meiryo"/>
-                        </a:rPr>
-                        <a:t>屋外(架空・地中)が中心</a:t>
-                      </a:r>
-                    </a:p>
-                  </a:txBody>
-                  <a:tcPr>
-                    <a:solidFill>
-                      <a:srgbClr val="EDF3FA"/>
-                    </a:solidFill>
-                  </a:tcPr>
-                </a:tc>
-              </a:tr>
-              <a:tr h="731520">
-                <a:tc>
-                  <a:txBody>
-                    <a:bodyPr wrap="square"/>
-                    <a:lstStyle/>
-                    <a:p>
-                      <a:r>
-                        <a:rPr sz="1500" b="1">
-                          <a:solidFill>
-                            <a:srgbClr val="1F3A5F"/>
-                          </a:solidFill>
-                          <a:latin typeface="Meiryo"/>
-                        </a:rPr>
-                        <a:t>防水</a:t>
-                      </a:r>
-                    </a:p>
-                  </a:txBody>
-                  <a:tcPr>
-                    <a:solidFill>
-                      <a:srgbClr val="FFFFFF"/>
-                    </a:solidFill>
-                  </a:tcPr>
-                </a:tc>
-                <a:tc>
-                  <a:txBody>
-                    <a:bodyPr wrap="square"/>
-                    <a:lstStyle/>
-                    <a:p>
-                      <a:r>
-                        <a:rPr sz="1500" b="0">
-                          <a:solidFill>
-                            <a:srgbClr val="444444"/>
-                          </a:solidFill>
-                          <a:latin typeface="Meiryo"/>
-                        </a:rPr>
-                        <a:t>屋内前提(屋外型もあり)</a:t>
-                      </a:r>
-                    </a:p>
-                  </a:txBody>
-                  <a:tcPr>
-                    <a:solidFill>
-                      <a:srgbClr val="FFFFFF"/>
-                    </a:solidFill>
-                  </a:tcPr>
-                </a:tc>
-                <a:tc>
-                  <a:txBody>
-                    <a:bodyPr wrap="square"/>
-                    <a:lstStyle/>
-                    <a:p>
-                      <a:r>
-                        <a:rPr sz="1500" b="0">
-                          <a:solidFill>
-                            <a:srgbClr val="444444"/>
-                          </a:solidFill>
-                          <a:latin typeface="Meiryo"/>
-                        </a:rPr>
-                        <a:t>防水・防塵が前提</a:t>
-                      </a:r>
-                    </a:p>
-                  </a:txBody>
-                  <a:tcPr>
-                    <a:solidFill>
-                      <a:srgbClr val="FFFFFF"/>
-                    </a:solidFill>
-                  </a:tcPr>
-                </a:tc>
-              </a:tr>
-              <a:tr h="731520">
-                <a:tc>
-                  <a:txBody>
-                    <a:bodyPr wrap="square"/>
-                    <a:lstStyle/>
-                    <a:p>
-                      <a:r>
-                        <a:rPr sz="1500" b="1">
-                          <a:solidFill>
-                            <a:srgbClr val="1F3A5F"/>
-                          </a:solidFill>
-                          <a:latin typeface="Meiryo"/>
-                        </a:rPr>
-                        <a:t>イメージ</a:t>
-                      </a:r>
-                    </a:p>
-                  </a:txBody>
-                  <a:tcPr>
-                    <a:solidFill>
-                      <a:srgbClr val="EDF3FA"/>
-                    </a:solidFill>
-                  </a:tcPr>
-                </a:tc>
-                <a:tc>
-                  <a:txBody>
-                    <a:bodyPr wrap="square"/>
-                    <a:lstStyle/>
-                    <a:p>
-                      <a:r>
-                        <a:rPr sz="1500" b="0">
-                          <a:solidFill>
-                            <a:srgbClr val="444444"/>
-                          </a:solidFill>
-                          <a:latin typeface="Meiryo"/>
-                        </a:rPr>
-                        <a:t>配線盤/パッチパネル</a:t>
-                      </a:r>
-                    </a:p>
-                  </a:txBody>
-                  <a:tcPr>
-                    <a:solidFill>
-                      <a:srgbClr val="EDF3FA"/>
-                    </a:solidFill>
-                  </a:tcPr>
-                </a:tc>
-                <a:tc>
-                  <a:txBody>
-                    <a:bodyPr wrap="square"/>
-                    <a:lstStyle/>
-                    <a:p>
-                      <a:r>
-                        <a:rPr sz="1500" b="0">
-                          <a:solidFill>
-                            <a:srgbClr val="444444"/>
-                          </a:solidFill>
-                          <a:latin typeface="Meiryo"/>
-                        </a:rPr>
-                        <a:t>電線途中の保護ボックス</a:t>
-                      </a:r>
-                    </a:p>
-                  </a:txBody>
-                  <a:tcPr>
-                    <a:solidFill>
-                      <a:srgbClr val="EDF3FA"/>
-                    </a:solidFill>
-                  </a:tcPr>
-                </a:tc>
-              </a:tr>
-            </a:tbl>
-          </a:graphicData>
-        </a:graphic>
-      </p:graphicFrame>
+        </p:nvSpPr>
+        <p:spPr>
+          <a:xfrm>
+            <a:off x="548640" y="1188720"/>
+            <a:ext cx="5303520" cy="365760"/>
+          </a:xfrm>
+          <a:prstGeom prst="rect">
+            <a:avLst/>
+          </a:prstGeom>
+          <a:noFill/>
+        </p:spPr>
+        <p:txBody>
+          <a:bodyPr wrap="square" tIns="0" bIns="0">
+            <a:spAutoFit/>
+          </a:bodyPr>
+          <a:lstStyle/>
+          <a:p>
+            <a:pPr algn="ctr"/>
+            <a:r>
+              <a:rPr sz="1700" b="1">
+                <a:solidFill>
+                  <a:srgbClr val="1F3A5F"/>
+                </a:solidFill>
+                <a:latin typeface="Meiryo"/>
+              </a:rPr>
+              <a:t>コード（細い・屋内・機器寄り）</a:t>
+            </a:r>
+          </a:p>
+        </p:txBody>
+      </p:sp>
+      <p:sp>
+        <p:nvSpPr>
+          <p:cNvPr id="4" name="Oval 3"/>
+          <p:cNvSpPr/>
+          <p:nvPr/>
+        </p:nvSpPr>
+        <p:spPr>
+          <a:xfrm>
+            <a:off x="2194560" y="1828800"/>
+            <a:ext cx="1828800" cy="1828800"/>
+          </a:xfrm>
+          <a:prstGeom prst="ellipse">
+            <a:avLst/>
+          </a:prstGeom>
+          <a:solidFill>
+            <a:srgbClr val="356AA8"/>
+          </a:solidFill>
+          <a:ln w="12700">
+            <a:solidFill>
+              <a:srgbClr val="1F3A5F"/>
+            </a:solidFill>
+          </a:ln>
+          <a:effectLst/>
+        </p:spPr>
+        <p:style>
+          <a:lnRef idx="1">
+            <a:schemeClr val="accent1"/>
+          </a:lnRef>
+          <a:fillRef idx="3">
+            <a:schemeClr val="accent1"/>
+          </a:fillRef>
+          <a:effectRef idx="2">
+            <a:schemeClr val="accent1"/>
+          </a:effectRef>
+          <a:fontRef idx="minor">
+            <a:schemeClr val="lt1"/>
+          </a:fontRef>
+        </p:style>
+        <p:txBody>
+          <a:bodyPr rtlCol="0" anchor="ctr"/>
+          <a:lstStyle/>
+          <a:p>
+            <a:pPr algn="ctr"/>
+          </a:p>
+        </p:txBody>
+      </p:sp>
+      <p:sp>
+        <p:nvSpPr>
+          <p:cNvPr id="5" name="Oval 4"/>
+          <p:cNvSpPr/>
+          <p:nvPr/>
+        </p:nvSpPr>
+        <p:spPr>
+          <a:xfrm>
+            <a:off x="2450591" y="2084832"/>
+            <a:ext cx="1316736" cy="1316736"/>
+          </a:xfrm>
+          <a:prstGeom prst="ellipse">
+            <a:avLst/>
+          </a:prstGeom>
+          <a:solidFill>
+            <a:srgbClr val="F2E2A8"/>
+          </a:solidFill>
+          <a:ln>
+            <a:noFill/>
+          </a:ln>
+          <a:effectLst/>
+        </p:spPr>
+        <p:style>
+          <a:lnRef idx="1">
+            <a:schemeClr val="accent1"/>
+          </a:lnRef>
+          <a:fillRef idx="3">
+            <a:schemeClr val="accent1"/>
+          </a:fillRef>
+          <a:effectRef idx="2">
+            <a:schemeClr val="accent1"/>
+          </a:effectRef>
+          <a:fontRef idx="minor">
+            <a:schemeClr val="lt1"/>
+          </a:fontRef>
+        </p:style>
+        <p:txBody>
+          <a:bodyPr rtlCol="0" anchor="ctr"/>
+          <a:lstStyle/>
+          <a:p>
+            <a:pPr algn="ctr"/>
+          </a:p>
+        </p:txBody>
+      </p:sp>
+      <p:sp>
+        <p:nvSpPr>
+          <p:cNvPr id="6" name="Oval 5"/>
+          <p:cNvSpPr/>
+          <p:nvPr/>
+        </p:nvSpPr>
+        <p:spPr>
+          <a:xfrm>
+            <a:off x="2852928" y="2487168"/>
+            <a:ext cx="512064" cy="512064"/>
+          </a:xfrm>
+          <a:prstGeom prst="ellipse">
+            <a:avLst/>
+          </a:prstGeom>
+          <a:solidFill>
+            <a:srgbClr val="FFD23C"/>
+          </a:solidFill>
+          <a:ln>
+            <a:solidFill>
+              <a:srgbClr val="D8B840"/>
+            </a:solidFill>
+          </a:ln>
+          <a:effectLst/>
+        </p:spPr>
+        <p:style>
+          <a:lnRef idx="1">
+            <a:schemeClr val="accent1"/>
+          </a:lnRef>
+          <a:fillRef idx="3">
+            <a:schemeClr val="accent1"/>
+          </a:fillRef>
+          <a:effectRef idx="2">
+            <a:schemeClr val="accent1"/>
+          </a:effectRef>
+          <a:fontRef idx="minor">
+            <a:schemeClr val="lt1"/>
+          </a:fontRef>
+        </p:style>
+        <p:txBody>
+          <a:bodyPr rtlCol="0" anchor="ctr"/>
+          <a:lstStyle/>
+          <a:p>
+            <a:pPr algn="ctr"/>
+          </a:p>
+        </p:txBody>
+      </p:sp>
+      <p:sp>
+        <p:nvSpPr>
+          <p:cNvPr id="7" name="Rectangle 6"/>
+          <p:cNvSpPr/>
+          <p:nvPr/>
+        </p:nvSpPr>
+        <p:spPr>
+          <a:xfrm>
+            <a:off x="1188720" y="4160520"/>
+            <a:ext cx="219456" cy="219456"/>
+          </a:xfrm>
+          <a:prstGeom prst="rect">
+            <a:avLst/>
+          </a:prstGeom>
+          <a:solidFill>
+            <a:srgbClr val="FFD23C"/>
+          </a:solidFill>
+          <a:ln w="6350">
+            <a:solidFill>
+              <a:srgbClr val="1F3A5F"/>
+            </a:solidFill>
+          </a:ln>
+          <a:effectLst/>
+        </p:spPr>
+        <p:style>
+          <a:lnRef idx="1">
+            <a:schemeClr val="accent1"/>
+          </a:lnRef>
+          <a:fillRef idx="3">
+            <a:schemeClr val="accent1"/>
+          </a:fillRef>
+          <a:effectRef idx="2">
+            <a:schemeClr val="accent1"/>
+          </a:effectRef>
+          <a:fontRef idx="minor">
+            <a:schemeClr val="lt1"/>
+          </a:fontRef>
+        </p:style>
+        <p:txBody>
+          <a:bodyPr rtlCol="0" anchor="ctr"/>
+          <a:lstStyle/>
+          <a:p>
+            <a:pPr algn="ctr"/>
+          </a:p>
+        </p:txBody>
+      </p:sp>
+      <p:sp>
+        <p:nvSpPr>
+          <p:cNvPr id="8" name="TextBox 7"/>
+          <p:cNvSpPr txBox="1"/>
+          <p:nvPr/>
+        </p:nvSpPr>
+        <p:spPr>
+          <a:xfrm>
+            <a:off x="1517904" y="4142232"/>
+            <a:ext cx="3840480" cy="274320"/>
+          </a:xfrm>
+          <a:prstGeom prst="rect">
+            <a:avLst/>
+          </a:prstGeom>
+          <a:noFill/>
+        </p:spPr>
+        <p:txBody>
+          <a:bodyPr wrap="square" tIns="0" bIns="0">
+            <a:spAutoFit/>
+          </a:bodyPr>
+          <a:lstStyle/>
+          <a:p>
+            <a:pPr algn="l"/>
+            <a:r>
+              <a:rPr sz="1200" b="0">
+                <a:solidFill>
+                  <a:srgbClr val="444444"/>
+                </a:solidFill>
+                <a:latin typeface="Meiryo"/>
+              </a:rPr>
+              <a:t>光ファイバ心線（1心）</a:t>
+            </a:r>
+          </a:p>
+        </p:txBody>
+      </p:sp>
+      <p:sp>
+        <p:nvSpPr>
+          <p:cNvPr id="9" name="Rectangle 8"/>
+          <p:cNvSpPr/>
+          <p:nvPr/>
+        </p:nvSpPr>
+        <p:spPr>
+          <a:xfrm>
+            <a:off x="1188720" y="4581144"/>
+            <a:ext cx="219456" cy="219456"/>
+          </a:xfrm>
+          <a:prstGeom prst="rect">
+            <a:avLst/>
+          </a:prstGeom>
+          <a:solidFill>
+            <a:srgbClr val="F2E2A8"/>
+          </a:solidFill>
+          <a:ln w="6350">
+            <a:solidFill>
+              <a:srgbClr val="1F3A5F"/>
+            </a:solidFill>
+          </a:ln>
+          <a:effectLst/>
+        </p:spPr>
+        <p:style>
+          <a:lnRef idx="1">
+            <a:schemeClr val="accent1"/>
+          </a:lnRef>
+          <a:fillRef idx="3">
+            <a:schemeClr val="accent1"/>
+          </a:fillRef>
+          <a:effectRef idx="2">
+            <a:schemeClr val="accent1"/>
+          </a:effectRef>
+          <a:fontRef idx="minor">
+            <a:schemeClr val="lt1"/>
+          </a:fontRef>
+        </p:style>
+        <p:txBody>
+          <a:bodyPr rtlCol="0" anchor="ctr"/>
+          <a:lstStyle/>
+          <a:p>
+            <a:pPr algn="ctr"/>
+          </a:p>
+        </p:txBody>
+      </p:sp>
+      <p:sp>
+        <p:nvSpPr>
+          <p:cNvPr id="10" name="TextBox 9"/>
+          <p:cNvSpPr txBox="1"/>
+          <p:nvPr/>
+        </p:nvSpPr>
+        <p:spPr>
+          <a:xfrm>
+            <a:off x="1517904" y="4562856"/>
+            <a:ext cx="3840480" cy="274320"/>
+          </a:xfrm>
+          <a:prstGeom prst="rect">
+            <a:avLst/>
+          </a:prstGeom>
+          <a:noFill/>
+        </p:spPr>
+        <p:txBody>
+          <a:bodyPr wrap="square" tIns="0" bIns="0">
+            <a:spAutoFit/>
+          </a:bodyPr>
+          <a:lstStyle/>
+          <a:p>
+            <a:pPr algn="l"/>
+            <a:r>
+              <a:rPr sz="1200" b="0">
+                <a:solidFill>
+                  <a:srgbClr val="444444"/>
+                </a:solidFill>
+                <a:latin typeface="Meiryo"/>
+              </a:rPr>
+              <a:t>アラミド繊維（抗張力）</a:t>
+            </a:r>
+          </a:p>
+        </p:txBody>
+      </p:sp>
+      <p:sp>
+        <p:nvSpPr>
+          <p:cNvPr id="11" name="Rectangle 10"/>
+          <p:cNvSpPr/>
+          <p:nvPr/>
+        </p:nvSpPr>
+        <p:spPr>
+          <a:xfrm>
+            <a:off x="1188720" y="5001768"/>
+            <a:ext cx="219456" cy="219456"/>
+          </a:xfrm>
+          <a:prstGeom prst="rect">
+            <a:avLst/>
+          </a:prstGeom>
+          <a:solidFill>
+            <a:srgbClr val="356AA8"/>
+          </a:solidFill>
+          <a:ln w="6350">
+            <a:solidFill>
+              <a:srgbClr val="1F3A5F"/>
+            </a:solidFill>
+          </a:ln>
+          <a:effectLst/>
+        </p:spPr>
+        <p:style>
+          <a:lnRef idx="1">
+            <a:schemeClr val="accent1"/>
+          </a:lnRef>
+          <a:fillRef idx="3">
+            <a:schemeClr val="accent1"/>
+          </a:fillRef>
+          <a:effectRef idx="2">
+            <a:schemeClr val="accent1"/>
+          </a:effectRef>
+          <a:fontRef idx="minor">
+            <a:schemeClr val="lt1"/>
+          </a:fontRef>
+        </p:style>
+        <p:txBody>
+          <a:bodyPr rtlCol="0" anchor="ctr"/>
+          <a:lstStyle/>
+          <a:p>
+            <a:pPr algn="ctr"/>
+          </a:p>
+        </p:txBody>
+      </p:sp>
+      <p:sp>
+        <p:nvSpPr>
+          <p:cNvPr id="12" name="TextBox 11"/>
+          <p:cNvSpPr txBox="1"/>
+          <p:nvPr/>
+        </p:nvSpPr>
+        <p:spPr>
+          <a:xfrm>
+            <a:off x="1517904" y="4983480"/>
+            <a:ext cx="3840480" cy="274320"/>
+          </a:xfrm>
+          <a:prstGeom prst="rect">
+            <a:avLst/>
+          </a:prstGeom>
+          <a:noFill/>
+        </p:spPr>
+        <p:txBody>
+          <a:bodyPr wrap="square" tIns="0" bIns="0">
+            <a:spAutoFit/>
+          </a:bodyPr>
+          <a:lstStyle/>
+          <a:p>
+            <a:pPr algn="l"/>
+            <a:r>
+              <a:rPr sz="1200" b="0">
+                <a:solidFill>
+                  <a:srgbClr val="444444"/>
+                </a:solidFill>
+                <a:latin typeface="Meiryo"/>
+              </a:rPr>
+              <a:t>外被（柔らかい）</a:t>
+            </a:r>
+          </a:p>
+        </p:txBody>
+      </p:sp>
+      <p:sp>
+        <p:nvSpPr>
+          <p:cNvPr id="13" name="TextBox 12"/>
+          <p:cNvSpPr txBox="1"/>
+          <p:nvPr/>
+        </p:nvSpPr>
+        <p:spPr>
+          <a:xfrm>
+            <a:off x="6309360" y="1188720"/>
+            <a:ext cx="5394960" cy="365760"/>
+          </a:xfrm>
+          <a:prstGeom prst="rect">
+            <a:avLst/>
+          </a:prstGeom>
+          <a:noFill/>
+        </p:spPr>
+        <p:txBody>
+          <a:bodyPr wrap="square" tIns="0" bIns="0">
+            <a:spAutoFit/>
+          </a:bodyPr>
+          <a:lstStyle/>
+          <a:p>
+            <a:pPr algn="ctr"/>
+            <a:r>
+              <a:rPr sz="1700" b="1">
+                <a:solidFill>
+                  <a:srgbClr val="1F3A5F"/>
+                </a:solidFill>
+                <a:latin typeface="Meiryo"/>
+              </a:rPr>
+              <a:t>ケーブル（太い・屋外・多心）</a:t>
+            </a:r>
+          </a:p>
+        </p:txBody>
+      </p:sp>
+      <p:sp>
+        <p:nvSpPr>
+          <p:cNvPr id="14" name="Oval 13"/>
+          <p:cNvSpPr/>
+          <p:nvPr/>
+        </p:nvSpPr>
+        <p:spPr>
+          <a:xfrm>
+            <a:off x="7772400" y="1600199"/>
+            <a:ext cx="2377440" cy="2377440"/>
+          </a:xfrm>
+          <a:prstGeom prst="ellipse">
+            <a:avLst/>
+          </a:prstGeom>
+          <a:solidFill>
+            <a:srgbClr val="223344"/>
+          </a:solidFill>
+          <a:ln w="12700">
+            <a:solidFill>
+              <a:srgbClr val="1F3A5F"/>
+            </a:solidFill>
+          </a:ln>
+          <a:effectLst/>
+        </p:spPr>
+        <p:style>
+          <a:lnRef idx="1">
+            <a:schemeClr val="accent1"/>
+          </a:lnRef>
+          <a:fillRef idx="3">
+            <a:schemeClr val="accent1"/>
+          </a:fillRef>
+          <a:effectRef idx="2">
+            <a:schemeClr val="accent1"/>
+          </a:effectRef>
+          <a:fontRef idx="minor">
+            <a:schemeClr val="lt1"/>
+          </a:fontRef>
+        </p:style>
+        <p:txBody>
+          <a:bodyPr rtlCol="0" anchor="ctr"/>
+          <a:lstStyle/>
+          <a:p>
+            <a:pPr algn="ctr"/>
+          </a:p>
+        </p:txBody>
+      </p:sp>
+      <p:sp>
+        <p:nvSpPr>
+          <p:cNvPr id="15" name="Oval 14"/>
+          <p:cNvSpPr/>
+          <p:nvPr/>
+        </p:nvSpPr>
+        <p:spPr>
+          <a:xfrm>
+            <a:off x="8010144" y="1837943"/>
+            <a:ext cx="1901952" cy="1901952"/>
+          </a:xfrm>
+          <a:prstGeom prst="ellipse">
+            <a:avLst/>
+          </a:prstGeom>
+          <a:solidFill>
+            <a:srgbClr val="CFE0F2"/>
+          </a:solidFill>
+          <a:ln>
+            <a:noFill/>
+          </a:ln>
+          <a:effectLst/>
+        </p:spPr>
+        <p:style>
+          <a:lnRef idx="1">
+            <a:schemeClr val="accent1"/>
+          </a:lnRef>
+          <a:fillRef idx="3">
+            <a:schemeClr val="accent1"/>
+          </a:fillRef>
+          <a:effectRef idx="2">
+            <a:schemeClr val="accent1"/>
+          </a:effectRef>
+          <a:fontRef idx="minor">
+            <a:schemeClr val="lt1"/>
+          </a:fontRef>
+        </p:style>
+        <p:txBody>
+          <a:bodyPr rtlCol="0" anchor="ctr"/>
+          <a:lstStyle/>
+          <a:p>
+            <a:pPr algn="ctr"/>
+          </a:p>
+        </p:txBody>
+      </p:sp>
+      <p:sp>
+        <p:nvSpPr>
+          <p:cNvPr id="16" name="Oval 15"/>
+          <p:cNvSpPr/>
+          <p:nvPr/>
+        </p:nvSpPr>
+        <p:spPr>
+          <a:xfrm>
+            <a:off x="8699601" y="2527401"/>
+            <a:ext cx="523036" cy="523036"/>
+          </a:xfrm>
+          <a:prstGeom prst="ellipse">
+            <a:avLst/>
+          </a:prstGeom>
+          <a:solidFill>
+            <a:srgbClr val="888F99"/>
+          </a:solidFill>
+          <a:ln>
+            <a:noFill/>
+          </a:ln>
+          <a:effectLst/>
+        </p:spPr>
+        <p:style>
+          <a:lnRef idx="1">
+            <a:schemeClr val="accent1"/>
+          </a:lnRef>
+          <a:fillRef idx="3">
+            <a:schemeClr val="accent1"/>
+          </a:fillRef>
+          <a:effectRef idx="2">
+            <a:schemeClr val="accent1"/>
+          </a:effectRef>
+          <a:fontRef idx="minor">
+            <a:schemeClr val="lt1"/>
+          </a:fontRef>
+        </p:style>
+        <p:txBody>
+          <a:bodyPr rtlCol="0" anchor="ctr"/>
+          <a:lstStyle/>
+          <a:p>
+            <a:pPr algn="ctr"/>
+          </a:p>
+        </p:txBody>
+      </p:sp>
+      <p:sp>
+        <p:nvSpPr>
+          <p:cNvPr id="17" name="Oval 16"/>
+          <p:cNvSpPr/>
+          <p:nvPr/>
+        </p:nvSpPr>
+        <p:spPr>
+          <a:xfrm>
+            <a:off x="8794699" y="1980590"/>
+            <a:ext cx="332841" cy="332841"/>
+          </a:xfrm>
+          <a:prstGeom prst="ellipse">
+            <a:avLst/>
+          </a:prstGeom>
+          <a:solidFill>
+            <a:srgbClr val="FFD23C"/>
+          </a:solidFill>
+          <a:ln w="6350">
+            <a:solidFill>
+              <a:srgbClr val="D8B840"/>
+            </a:solidFill>
+          </a:ln>
+          <a:effectLst/>
+        </p:spPr>
+        <p:style>
+          <a:lnRef idx="1">
+            <a:schemeClr val="accent1"/>
+          </a:lnRef>
+          <a:fillRef idx="3">
+            <a:schemeClr val="accent1"/>
+          </a:fillRef>
+          <a:effectRef idx="2">
+            <a:schemeClr val="accent1"/>
+          </a:effectRef>
+          <a:fontRef idx="minor">
+            <a:schemeClr val="lt1"/>
+          </a:fontRef>
+        </p:style>
+        <p:txBody>
+          <a:bodyPr rtlCol="0" anchor="ctr"/>
+          <a:lstStyle/>
+          <a:p>
+            <a:pPr algn="ctr"/>
+          </a:p>
+        </p:txBody>
+      </p:sp>
+      <p:sp>
+        <p:nvSpPr>
+          <p:cNvPr id="18" name="Oval 17"/>
+          <p:cNvSpPr/>
+          <p:nvPr/>
+        </p:nvSpPr>
+        <p:spPr>
+          <a:xfrm>
+            <a:off x="9350608" y="2301544"/>
+            <a:ext cx="332841" cy="332841"/>
+          </a:xfrm>
+          <a:prstGeom prst="ellipse">
+            <a:avLst/>
+          </a:prstGeom>
+          <a:solidFill>
+            <a:srgbClr val="FFD23C"/>
+          </a:solidFill>
+          <a:ln w="6350">
+            <a:solidFill>
+              <a:srgbClr val="D8B840"/>
+            </a:solidFill>
+          </a:ln>
+          <a:effectLst/>
+        </p:spPr>
+        <p:style>
+          <a:lnRef idx="1">
+            <a:schemeClr val="accent1"/>
+          </a:lnRef>
+          <a:fillRef idx="3">
+            <a:schemeClr val="accent1"/>
+          </a:fillRef>
+          <a:effectRef idx="2">
+            <a:schemeClr val="accent1"/>
+          </a:effectRef>
+          <a:fontRef idx="minor">
+            <a:schemeClr val="lt1"/>
+          </a:fontRef>
+        </p:style>
+        <p:txBody>
+          <a:bodyPr rtlCol="0" anchor="ctr"/>
+          <a:lstStyle/>
+          <a:p>
+            <a:pPr algn="ctr"/>
+          </a:p>
+        </p:txBody>
+      </p:sp>
+      <p:sp>
+        <p:nvSpPr>
+          <p:cNvPr id="19" name="Oval 18"/>
+          <p:cNvSpPr/>
+          <p:nvPr/>
+        </p:nvSpPr>
+        <p:spPr>
+          <a:xfrm>
+            <a:off x="9350608" y="2943453"/>
+            <a:ext cx="332841" cy="332841"/>
+          </a:xfrm>
+          <a:prstGeom prst="ellipse">
+            <a:avLst/>
+          </a:prstGeom>
+          <a:solidFill>
+            <a:srgbClr val="FFD23C"/>
+          </a:solidFill>
+          <a:ln w="6350">
+            <a:solidFill>
+              <a:srgbClr val="D8B840"/>
+            </a:solidFill>
+          </a:ln>
+          <a:effectLst/>
+        </p:spPr>
+        <p:style>
+          <a:lnRef idx="1">
+            <a:schemeClr val="accent1"/>
+          </a:lnRef>
+          <a:fillRef idx="3">
+            <a:schemeClr val="accent1"/>
+          </a:fillRef>
+          <a:effectRef idx="2">
+            <a:schemeClr val="accent1"/>
+          </a:effectRef>
+          <a:fontRef idx="minor">
+            <a:schemeClr val="lt1"/>
+          </a:fontRef>
+        </p:style>
+        <p:txBody>
+          <a:bodyPr rtlCol="0" anchor="ctr"/>
+          <a:lstStyle/>
+          <a:p>
+            <a:pPr algn="ctr"/>
+          </a:p>
+        </p:txBody>
+      </p:sp>
+      <p:sp>
+        <p:nvSpPr>
+          <p:cNvPr id="20" name="Oval 19"/>
+          <p:cNvSpPr/>
+          <p:nvPr/>
+        </p:nvSpPr>
+        <p:spPr>
+          <a:xfrm>
+            <a:off x="8794699" y="3264408"/>
+            <a:ext cx="332841" cy="332841"/>
+          </a:xfrm>
+          <a:prstGeom prst="ellipse">
+            <a:avLst/>
+          </a:prstGeom>
+          <a:solidFill>
+            <a:srgbClr val="FFD23C"/>
+          </a:solidFill>
+          <a:ln w="6350">
+            <a:solidFill>
+              <a:srgbClr val="D8B840"/>
+            </a:solidFill>
+          </a:ln>
+          <a:effectLst/>
+        </p:spPr>
+        <p:style>
+          <a:lnRef idx="1">
+            <a:schemeClr val="accent1"/>
+          </a:lnRef>
+          <a:fillRef idx="3">
+            <a:schemeClr val="accent1"/>
+          </a:fillRef>
+          <a:effectRef idx="2">
+            <a:schemeClr val="accent1"/>
+          </a:effectRef>
+          <a:fontRef idx="minor">
+            <a:schemeClr val="lt1"/>
+          </a:fontRef>
+        </p:style>
+        <p:txBody>
+          <a:bodyPr rtlCol="0" anchor="ctr"/>
+          <a:lstStyle/>
+          <a:p>
+            <a:pPr algn="ctr"/>
+          </a:p>
+        </p:txBody>
+      </p:sp>
+      <p:sp>
+        <p:nvSpPr>
+          <p:cNvPr id="21" name="Oval 20"/>
+          <p:cNvSpPr/>
+          <p:nvPr/>
+        </p:nvSpPr>
+        <p:spPr>
+          <a:xfrm>
+            <a:off x="8238789" y="2943453"/>
+            <a:ext cx="332841" cy="332841"/>
+          </a:xfrm>
+          <a:prstGeom prst="ellipse">
+            <a:avLst/>
+          </a:prstGeom>
+          <a:solidFill>
+            <a:srgbClr val="FFD23C"/>
+          </a:solidFill>
+          <a:ln w="6350">
+            <a:solidFill>
+              <a:srgbClr val="D8B840"/>
+            </a:solidFill>
+          </a:ln>
+          <a:effectLst/>
+        </p:spPr>
+        <p:style>
+          <a:lnRef idx="1">
+            <a:schemeClr val="accent1"/>
+          </a:lnRef>
+          <a:fillRef idx="3">
+            <a:schemeClr val="accent1"/>
+          </a:fillRef>
+          <a:effectRef idx="2">
+            <a:schemeClr val="accent1"/>
+          </a:effectRef>
+          <a:fontRef idx="minor">
+            <a:schemeClr val="lt1"/>
+          </a:fontRef>
+        </p:style>
+        <p:txBody>
+          <a:bodyPr rtlCol="0" anchor="ctr"/>
+          <a:lstStyle/>
+          <a:p>
+            <a:pPr algn="ctr"/>
+          </a:p>
+        </p:txBody>
+      </p:sp>
+      <p:sp>
+        <p:nvSpPr>
+          <p:cNvPr id="22" name="Oval 21"/>
+          <p:cNvSpPr/>
+          <p:nvPr/>
+        </p:nvSpPr>
+        <p:spPr>
+          <a:xfrm>
+            <a:off x="8238789" y="2301544"/>
+            <a:ext cx="332841" cy="332841"/>
+          </a:xfrm>
+          <a:prstGeom prst="ellipse">
+            <a:avLst/>
+          </a:prstGeom>
+          <a:solidFill>
+            <a:srgbClr val="FFD23C"/>
+          </a:solidFill>
+          <a:ln w="6350">
+            <a:solidFill>
+              <a:srgbClr val="D8B840"/>
+            </a:solidFill>
+          </a:ln>
+          <a:effectLst/>
+        </p:spPr>
+        <p:style>
+          <a:lnRef idx="1">
+            <a:schemeClr val="accent1"/>
+          </a:lnRef>
+          <a:fillRef idx="3">
+            <a:schemeClr val="accent1"/>
+          </a:fillRef>
+          <a:effectRef idx="2">
+            <a:schemeClr val="accent1"/>
+          </a:effectRef>
+          <a:fontRef idx="minor">
+            <a:schemeClr val="lt1"/>
+          </a:fontRef>
+        </p:style>
+        <p:txBody>
+          <a:bodyPr rtlCol="0" anchor="ctr"/>
+          <a:lstStyle/>
+          <a:p>
+            <a:pPr algn="ctr"/>
+          </a:p>
+        </p:txBody>
+      </p:sp>
+      <p:sp>
+        <p:nvSpPr>
+          <p:cNvPr id="23" name="Rectangle 22"/>
+          <p:cNvSpPr/>
+          <p:nvPr/>
+        </p:nvSpPr>
+        <p:spPr>
+          <a:xfrm>
+            <a:off x="6858000" y="4160520"/>
+            <a:ext cx="219456" cy="219456"/>
+          </a:xfrm>
+          <a:prstGeom prst="rect">
+            <a:avLst/>
+          </a:prstGeom>
+          <a:solidFill>
+            <a:srgbClr val="FFD23C"/>
+          </a:solidFill>
+          <a:ln w="6350">
+            <a:solidFill>
+              <a:srgbClr val="1F3A5F"/>
+            </a:solidFill>
+          </a:ln>
+          <a:effectLst/>
+        </p:spPr>
+        <p:style>
+          <a:lnRef idx="1">
+            <a:schemeClr val="accent1"/>
+          </a:lnRef>
+          <a:fillRef idx="3">
+            <a:schemeClr val="accent1"/>
+          </a:fillRef>
+          <a:effectRef idx="2">
+            <a:schemeClr val="accent1"/>
+          </a:effectRef>
+          <a:fontRef idx="minor">
+            <a:schemeClr val="lt1"/>
+          </a:fontRef>
+        </p:style>
+        <p:txBody>
+          <a:bodyPr rtlCol="0" anchor="ctr"/>
+          <a:lstStyle/>
+          <a:p>
+            <a:pPr algn="ctr"/>
+          </a:p>
+        </p:txBody>
+      </p:sp>
+      <p:sp>
+        <p:nvSpPr>
+          <p:cNvPr id="24" name="TextBox 23"/>
+          <p:cNvSpPr txBox="1"/>
+          <p:nvPr/>
+        </p:nvSpPr>
+        <p:spPr>
+          <a:xfrm>
+            <a:off x="7187184" y="4142232"/>
+            <a:ext cx="3840480" cy="274320"/>
+          </a:xfrm>
+          <a:prstGeom prst="rect">
+            <a:avLst/>
+          </a:prstGeom>
+          <a:noFill/>
+        </p:spPr>
+        <p:txBody>
+          <a:bodyPr wrap="square" tIns="0" bIns="0">
+            <a:spAutoFit/>
+          </a:bodyPr>
+          <a:lstStyle/>
+          <a:p>
+            <a:pPr algn="l"/>
+            <a:r>
+              <a:rPr sz="1200" b="0">
+                <a:solidFill>
+                  <a:srgbClr val="444444"/>
+                </a:solidFill>
+                <a:latin typeface="Meiryo"/>
+              </a:rPr>
+              <a:t>光ファイバ心線（多心）</a:t>
+            </a:r>
+          </a:p>
+        </p:txBody>
+      </p:sp>
+      <p:sp>
+        <p:nvSpPr>
+          <p:cNvPr id="25" name="Rectangle 24"/>
+          <p:cNvSpPr/>
+          <p:nvPr/>
+        </p:nvSpPr>
+        <p:spPr>
+          <a:xfrm>
+            <a:off x="6858000" y="4581144"/>
+            <a:ext cx="219456" cy="219456"/>
+          </a:xfrm>
+          <a:prstGeom prst="rect">
+            <a:avLst/>
+          </a:prstGeom>
+          <a:solidFill>
+            <a:srgbClr val="888F99"/>
+          </a:solidFill>
+          <a:ln w="6350">
+            <a:solidFill>
+              <a:srgbClr val="1F3A5F"/>
+            </a:solidFill>
+          </a:ln>
+          <a:effectLst/>
+        </p:spPr>
+        <p:style>
+          <a:lnRef idx="1">
+            <a:schemeClr val="accent1"/>
+          </a:lnRef>
+          <a:fillRef idx="3">
+            <a:schemeClr val="accent1"/>
+          </a:fillRef>
+          <a:effectRef idx="2">
+            <a:schemeClr val="accent1"/>
+          </a:effectRef>
+          <a:fontRef idx="minor">
+            <a:schemeClr val="lt1"/>
+          </a:fontRef>
+        </p:style>
+        <p:txBody>
+          <a:bodyPr rtlCol="0" anchor="ctr"/>
+          <a:lstStyle/>
+          <a:p>
+            <a:pPr algn="ctr"/>
+          </a:p>
+        </p:txBody>
+      </p:sp>
+      <p:sp>
+        <p:nvSpPr>
+          <p:cNvPr id="26" name="TextBox 25"/>
+          <p:cNvSpPr txBox="1"/>
+          <p:nvPr/>
+        </p:nvSpPr>
+        <p:spPr>
+          <a:xfrm>
+            <a:off x="7187184" y="4562856"/>
+            <a:ext cx="3840480" cy="274320"/>
+          </a:xfrm>
+          <a:prstGeom prst="rect">
+            <a:avLst/>
+          </a:prstGeom>
+          <a:noFill/>
+        </p:spPr>
+        <p:txBody>
+          <a:bodyPr wrap="square" tIns="0" bIns="0">
+            <a:spAutoFit/>
+          </a:bodyPr>
+          <a:lstStyle/>
+          <a:p>
+            <a:pPr algn="l"/>
+            <a:r>
+              <a:rPr sz="1200" b="0">
+                <a:solidFill>
+                  <a:srgbClr val="444444"/>
+                </a:solidFill>
+                <a:latin typeface="Meiryo"/>
+              </a:rPr>
+              <a:t>テンションメンバ（鋼線/FRP）</a:t>
+            </a:r>
+          </a:p>
+        </p:txBody>
+      </p:sp>
+      <p:sp>
+        <p:nvSpPr>
+          <p:cNvPr id="27" name="Rectangle 26"/>
+          <p:cNvSpPr/>
+          <p:nvPr/>
+        </p:nvSpPr>
+        <p:spPr>
+          <a:xfrm>
+            <a:off x="6858000" y="5001768"/>
+            <a:ext cx="219456" cy="219456"/>
+          </a:xfrm>
+          <a:prstGeom prst="rect">
+            <a:avLst/>
+          </a:prstGeom>
+          <a:solidFill>
+            <a:srgbClr val="223344"/>
+          </a:solidFill>
+          <a:ln w="6350">
+            <a:solidFill>
+              <a:srgbClr val="1F3A5F"/>
+            </a:solidFill>
+          </a:ln>
+          <a:effectLst/>
+        </p:spPr>
+        <p:style>
+          <a:lnRef idx="1">
+            <a:schemeClr val="accent1"/>
+          </a:lnRef>
+          <a:fillRef idx="3">
+            <a:schemeClr val="accent1"/>
+          </a:fillRef>
+          <a:effectRef idx="2">
+            <a:schemeClr val="accent1"/>
+          </a:effectRef>
+          <a:fontRef idx="minor">
+            <a:schemeClr val="lt1"/>
+          </a:fontRef>
+        </p:style>
+        <p:txBody>
+          <a:bodyPr rtlCol="0" anchor="ctr"/>
+          <a:lstStyle/>
+          <a:p>
+            <a:pPr algn="ctr"/>
+          </a:p>
+        </p:txBody>
+      </p:sp>
+      <p:sp>
+        <p:nvSpPr>
+          <p:cNvPr id="28" name="TextBox 27"/>
+          <p:cNvSpPr txBox="1"/>
+          <p:nvPr/>
+        </p:nvSpPr>
+        <p:spPr>
+          <a:xfrm>
+            <a:off x="7187184" y="4983480"/>
+            <a:ext cx="3840480" cy="274320"/>
+          </a:xfrm>
+          <a:prstGeom prst="rect">
+            <a:avLst/>
+          </a:prstGeom>
+          <a:noFill/>
+        </p:spPr>
+        <p:txBody>
+          <a:bodyPr wrap="square" tIns="0" bIns="0">
+            <a:spAutoFit/>
+          </a:bodyPr>
+          <a:lstStyle/>
+          <a:p>
+            <a:pPr algn="l"/>
+            <a:r>
+              <a:rPr sz="1200" b="0">
+                <a:solidFill>
+                  <a:srgbClr val="444444"/>
+                </a:solidFill>
+                <a:latin typeface="Meiryo"/>
+              </a:rPr>
+              <a:t>厚い外被（防水・耐候）</a:t>
+            </a:r>
+          </a:p>
+        </p:txBody>
+      </p:sp>
+      <p:sp>
+        <p:nvSpPr>
+          <p:cNvPr id="29" name="Rounded Rectangle 28"/>
+          <p:cNvSpPr/>
+          <p:nvPr/>
+        </p:nvSpPr>
+        <p:spPr>
+          <a:xfrm>
+            <a:off x="868680" y="5843016"/>
+            <a:ext cx="1737360" cy="566928"/>
+          </a:xfrm>
+          <a:prstGeom prst="roundRect">
+            <a:avLst/>
+          </a:prstGeom>
+          <a:solidFill>
+            <a:srgbClr val="1F3A5F"/>
+          </a:solidFill>
+          <a:ln w="12700">
+            <a:solidFill>
+              <a:srgbClr val="1F3A5F"/>
+            </a:solidFill>
+          </a:ln>
+          <a:effectLst/>
+        </p:spPr>
+        <p:style>
+          <a:lnRef idx="1">
+            <a:schemeClr val="accent1"/>
+          </a:lnRef>
+          <a:fillRef idx="3">
+            <a:schemeClr val="accent1"/>
+          </a:fillRef>
+          <a:effectRef idx="2">
+            <a:schemeClr val="accent1"/>
+          </a:effectRef>
+          <a:fontRef idx="minor">
+            <a:schemeClr val="lt1"/>
+          </a:fontRef>
+        </p:style>
+        <p:txBody>
+          <a:bodyPr rtlCol="0" anchor="ctr" wrap="square"/>
+          <a:lstStyle/>
+          <a:p>
+            <a:pPr algn="ctr"/>
+            <a:r>
+              <a:rPr sz="1200" b="1">
+                <a:solidFill>
+                  <a:srgbClr val="FFFFFF"/>
+                </a:solidFill>
+                <a:latin typeface="Meiryo"/>
+              </a:rPr>
+              <a:t>機器</a:t>
+            </a:r>
+          </a:p>
+        </p:txBody>
+      </p:sp>
+      <p:cxnSp>
+        <p:nvCxnSpPr>
+          <p:cNvPr id="30" name="Connector 29"/>
+          <p:cNvCxnSpPr/>
+          <p:nvPr/>
+        </p:nvCxnSpPr>
+        <p:spPr>
+          <a:xfrm>
+            <a:off x="2606040" y="6126480"/>
+            <a:ext cx="1325880" cy="0"/>
+          </a:xfrm>
+          <a:prstGeom prst="line">
+            <a:avLst/>
+          </a:prstGeom>
+          <a:ln w="19050">
+            <a:solidFill>
+              <a:srgbClr val="2E6DB4"/>
+            </a:solidFill>
+            <a:tailEnd type="triangle" w="med" len="med"/>
+          </a:ln>
+        </p:spPr>
+        <p:style>
+          <a:lnRef idx="2">
+            <a:schemeClr val="accent1"/>
+          </a:lnRef>
+          <a:fillRef idx="0">
+            <a:schemeClr val="accent1"/>
+          </a:fillRef>
+          <a:effectRef idx="1">
+            <a:schemeClr val="accent1"/>
+          </a:effectRef>
+          <a:fontRef idx="minor">
+            <a:schemeClr val="tx1"/>
+          </a:fontRef>
+        </p:style>
+      </p:cxnSp>
+      <p:sp>
+        <p:nvSpPr>
+          <p:cNvPr id="31" name="TextBox 30"/>
+          <p:cNvSpPr txBox="1"/>
+          <p:nvPr/>
+        </p:nvSpPr>
+        <p:spPr>
+          <a:xfrm>
+            <a:off x="2606040" y="5760720"/>
+            <a:ext cx="1325880" cy="274320"/>
+          </a:xfrm>
+          <a:prstGeom prst="rect">
+            <a:avLst/>
+          </a:prstGeom>
+          <a:noFill/>
+        </p:spPr>
+        <p:txBody>
+          <a:bodyPr wrap="square" tIns="0" bIns="0">
+            <a:spAutoFit/>
+          </a:bodyPr>
+          <a:lstStyle/>
+          <a:p>
+            <a:pPr algn="ctr"/>
+            <a:r>
+              <a:rPr sz="1100" b="0">
+                <a:solidFill>
+                  <a:srgbClr val="2E6DB4"/>
+                </a:solidFill>
+                <a:latin typeface="Meiryo"/>
+              </a:rPr>
+              <a:t>コード(細)</a:t>
+            </a:r>
+          </a:p>
+        </p:txBody>
+      </p:sp>
+      <p:sp>
+        <p:nvSpPr>
+          <p:cNvPr id="32" name="Rounded Rectangle 31"/>
+          <p:cNvSpPr/>
+          <p:nvPr/>
+        </p:nvSpPr>
+        <p:spPr>
+          <a:xfrm>
+            <a:off x="3931920" y="5843016"/>
+            <a:ext cx="1828800" cy="566928"/>
+          </a:xfrm>
+          <a:prstGeom prst="roundRect">
+            <a:avLst/>
+          </a:prstGeom>
+          <a:solidFill>
+            <a:srgbClr val="1F3A5F"/>
+          </a:solidFill>
+          <a:ln w="12700">
+            <a:solidFill>
+              <a:srgbClr val="1F3A5F"/>
+            </a:solidFill>
+          </a:ln>
+          <a:effectLst/>
+        </p:spPr>
+        <p:style>
+          <a:lnRef idx="1">
+            <a:schemeClr val="accent1"/>
+          </a:lnRef>
+          <a:fillRef idx="3">
+            <a:schemeClr val="accent1"/>
+          </a:fillRef>
+          <a:effectRef idx="2">
+            <a:schemeClr val="accent1"/>
+          </a:effectRef>
+          <a:fontRef idx="minor">
+            <a:schemeClr val="lt1"/>
+          </a:fontRef>
+        </p:style>
+        <p:txBody>
+          <a:bodyPr rtlCol="0" anchor="ctr" wrap="square"/>
+          <a:lstStyle/>
+          <a:p>
+            <a:pPr algn="ctr"/>
+            <a:r>
+              <a:rPr sz="1200" b="1">
+                <a:solidFill>
+                  <a:srgbClr val="FFFFFF"/>
+                </a:solidFill>
+                <a:latin typeface="Meiryo"/>
+              </a:rPr>
+              <a:t>成端箱</a:t>
+            </a:r>
+          </a:p>
+        </p:txBody>
+      </p:sp>
+      <p:cxnSp>
+        <p:nvCxnSpPr>
+          <p:cNvPr id="33" name="Connector 32"/>
+          <p:cNvCxnSpPr/>
+          <p:nvPr/>
+        </p:nvCxnSpPr>
+        <p:spPr>
+          <a:xfrm>
+            <a:off x="5760720" y="6126480"/>
+            <a:ext cx="2560320" cy="0"/>
+          </a:xfrm>
+          <a:prstGeom prst="line">
+            <a:avLst/>
+          </a:prstGeom>
+          <a:ln w="57150">
+            <a:solidFill>
+              <a:srgbClr val="1F3A5F"/>
+            </a:solidFill>
+            <a:tailEnd type="triangle" w="med" len="med"/>
+          </a:ln>
+        </p:spPr>
+        <p:style>
+          <a:lnRef idx="2">
+            <a:schemeClr val="accent1"/>
+          </a:lnRef>
+          <a:fillRef idx="0">
+            <a:schemeClr val="accent1"/>
+          </a:fillRef>
+          <a:effectRef idx="1">
+            <a:schemeClr val="accent1"/>
+          </a:effectRef>
+          <a:fontRef idx="minor">
+            <a:schemeClr val="tx1"/>
+          </a:fontRef>
+        </p:style>
+      </p:cxnSp>
+      <p:sp>
+        <p:nvSpPr>
+          <p:cNvPr id="34" name="TextBox 33"/>
+          <p:cNvSpPr txBox="1"/>
+          <p:nvPr/>
+        </p:nvSpPr>
+        <p:spPr>
+          <a:xfrm>
+            <a:off x="5760720" y="5760720"/>
+            <a:ext cx="2560320" cy="274320"/>
+          </a:xfrm>
+          <a:prstGeom prst="rect">
+            <a:avLst/>
+          </a:prstGeom>
+          <a:noFill/>
+        </p:spPr>
+        <p:txBody>
+          <a:bodyPr wrap="square" tIns="0" bIns="0">
+            <a:spAutoFit/>
+          </a:bodyPr>
+          <a:lstStyle/>
+          <a:p>
+            <a:pPr algn="ctr"/>
+            <a:r>
+              <a:rPr sz="1100" b="0">
+                <a:solidFill>
+                  <a:srgbClr val="1F3A5F"/>
+                </a:solidFill>
+                <a:latin typeface="Meiryo"/>
+              </a:rPr>
+              <a:t>ケーブル(太)</a:t>
+            </a:r>
+          </a:p>
+        </p:txBody>
+      </p:sp>
+      <p:sp>
+        <p:nvSpPr>
+          <p:cNvPr id="35" name="Rounded Rectangle 34"/>
+          <p:cNvSpPr/>
+          <p:nvPr/>
+        </p:nvSpPr>
+        <p:spPr>
+          <a:xfrm>
+            <a:off x="8321040" y="5843016"/>
+            <a:ext cx="2377440" cy="566928"/>
+          </a:xfrm>
+          <a:prstGeom prst="roundRect">
+            <a:avLst/>
+          </a:prstGeom>
+          <a:solidFill>
+            <a:srgbClr val="1F3A5F"/>
+          </a:solidFill>
+          <a:ln w="12700">
+            <a:solidFill>
+              <a:srgbClr val="1F3A5F"/>
+            </a:solidFill>
+          </a:ln>
+          <a:effectLst/>
+        </p:spPr>
+        <p:style>
+          <a:lnRef idx="1">
+            <a:schemeClr val="accent1"/>
+          </a:lnRef>
+          <a:fillRef idx="3">
+            <a:schemeClr val="accent1"/>
+          </a:fillRef>
+          <a:effectRef idx="2">
+            <a:schemeClr val="accent1"/>
+          </a:effectRef>
+          <a:fontRef idx="minor">
+            <a:schemeClr val="lt1"/>
+          </a:fontRef>
+        </p:style>
+        <p:txBody>
+          <a:bodyPr rtlCol="0" anchor="ctr" wrap="square"/>
+          <a:lstStyle/>
+          <a:p>
+            <a:pPr algn="ctr"/>
+            <a:r>
+              <a:rPr sz="1200" b="1">
+                <a:solidFill>
+                  <a:srgbClr val="FFFFFF"/>
+                </a:solidFill>
+                <a:latin typeface="Meiryo"/>
+              </a:rPr>
+              <a:t>屋外・電柱・地中</a:t>
+            </a:r>
+          </a:p>
+        </p:txBody>
+      </p:sp>
     </p:spTree>
   </p:cSld>
   <p:clrMapOvr>
@@ -5955,6 +6931,1794 @@
                 </a:solidFill>
                 <a:latin typeface="Meiryo"/>
               </a:rPr>
+              <a:t>成端箱とクロージャの違い</a:t>
+            </a:r>
+          </a:p>
+        </p:txBody>
+      </p:sp>
+      <p:graphicFrame>
+        <p:nvGraphicFramePr>
+          <p:cNvPr id="3" name="Table 2"/>
+          <p:cNvGraphicFramePr>
+            <a:graphicFrameLocks noGrp="1"/>
+          </p:cNvGraphicFramePr>
+          <p:nvPr/>
+        </p:nvGraphicFramePr>
+        <p:xfrm>
+          <a:off x="548640" y="1325880"/>
+          <a:ext cx="11064240" cy="4389120"/>
+        </p:xfrm>
+        <a:graphic>
+          <a:graphicData uri="http://schemas.openxmlformats.org/drawingml/2006/table">
+            <a:tbl>
+              <a:tblPr firstRow="1" bandRow="1">
+                <a:tableStyleId>{5C22544A-7EE6-4342-B048-85BDC9FD1C3A}</a:tableStyleId>
+              </a:tblPr>
+              <a:tblGrid>
+                <a:gridCol w="2103120"/>
+                <a:gridCol w="4480560"/>
+                <a:gridCol w="4480560"/>
+              </a:tblGrid>
+              <a:tr h="731520">
+                <a:tc>
+                  <a:txBody>
+                    <a:bodyPr wrap="square"/>
+                    <a:lstStyle/>
+                    <a:p>
+                      <a:pPr algn="ctr"/>
+                      <a:r>
+                        <a:rPr sz="1500" b="1">
+                          <a:solidFill>
+                            <a:srgbClr val="FFFFFF"/>
+                          </a:solidFill>
+                          <a:latin typeface="Meiryo"/>
+                        </a:rPr>
+                        <a:t>観点</a:t>
+                      </a:r>
+                    </a:p>
+                  </a:txBody>
+                  <a:tcPr>
+                    <a:solidFill>
+                      <a:srgbClr val="1F3A5F"/>
+                    </a:solidFill>
+                  </a:tcPr>
+                </a:tc>
+                <a:tc>
+                  <a:txBody>
+                    <a:bodyPr wrap="square"/>
+                    <a:lstStyle/>
+                    <a:p>
+                      <a:pPr algn="ctr"/>
+                      <a:r>
+                        <a:rPr sz="1500" b="1">
+                          <a:solidFill>
+                            <a:srgbClr val="FFFFFF"/>
+                          </a:solidFill>
+                          <a:latin typeface="Meiryo"/>
+                        </a:rPr>
+                        <a:t>成端箱</a:t>
+                      </a:r>
+                    </a:p>
+                  </a:txBody>
+                  <a:tcPr>
+                    <a:solidFill>
+                      <a:srgbClr val="1F3A5F"/>
+                    </a:solidFill>
+                  </a:tcPr>
+                </a:tc>
+                <a:tc>
+                  <a:txBody>
+                    <a:bodyPr wrap="square"/>
+                    <a:lstStyle/>
+                    <a:p>
+                      <a:pPr algn="ctr"/>
+                      <a:r>
+                        <a:rPr sz="1500" b="1">
+                          <a:solidFill>
+                            <a:srgbClr val="FFFFFF"/>
+                          </a:solidFill>
+                          <a:latin typeface="Meiryo"/>
+                        </a:rPr>
+                        <a:t>クロージャ</a:t>
+                      </a:r>
+                    </a:p>
+                  </a:txBody>
+                  <a:tcPr>
+                    <a:solidFill>
+                      <a:srgbClr val="1F3A5F"/>
+                    </a:solidFill>
+                  </a:tcPr>
+                </a:tc>
+              </a:tr>
+              <a:tr h="731520">
+                <a:tc>
+                  <a:txBody>
+                    <a:bodyPr wrap="square"/>
+                    <a:lstStyle/>
+                    <a:p>
+                      <a:r>
+                        <a:rPr sz="1500" b="1">
+                          <a:solidFill>
+                            <a:srgbClr val="1F3A5F"/>
+                          </a:solidFill>
+                          <a:latin typeface="Meiryo"/>
+                        </a:rPr>
+                        <a:t>位置</a:t>
+                      </a:r>
+                    </a:p>
+                  </a:txBody>
+                  <a:tcPr>
+                    <a:solidFill>
+                      <a:srgbClr val="EDF3FA"/>
+                    </a:solidFill>
+                  </a:tcPr>
+                </a:tc>
+                <a:tc>
+                  <a:txBody>
+                    <a:bodyPr wrap="square"/>
+                    <a:lstStyle/>
+                    <a:p>
+                      <a:r>
+                        <a:rPr sz="1500" b="0">
+                          <a:solidFill>
+                            <a:srgbClr val="444444"/>
+                          </a:solidFill>
+                          <a:latin typeface="Meiryo"/>
+                        </a:rPr>
+                        <a:t>ケーブルの端末</a:t>
+                      </a:r>
+                    </a:p>
+                  </a:txBody>
+                  <a:tcPr>
+                    <a:solidFill>
+                      <a:srgbClr val="EDF3FA"/>
+                    </a:solidFill>
+                  </a:tcPr>
+                </a:tc>
+                <a:tc>
+                  <a:txBody>
+                    <a:bodyPr wrap="square"/>
+                    <a:lstStyle/>
+                    <a:p>
+                      <a:r>
+                        <a:rPr sz="1500" b="0">
+                          <a:solidFill>
+                            <a:srgbClr val="444444"/>
+                          </a:solidFill>
+                          <a:latin typeface="Meiryo"/>
+                        </a:rPr>
+                        <a:t>ケーブルの途中</a:t>
+                      </a:r>
+                    </a:p>
+                  </a:txBody>
+                  <a:tcPr>
+                    <a:solidFill>
+                      <a:srgbClr val="EDF3FA"/>
+                    </a:solidFill>
+                  </a:tcPr>
+                </a:tc>
+              </a:tr>
+              <a:tr h="731520">
+                <a:tc>
+                  <a:txBody>
+                    <a:bodyPr wrap="square"/>
+                    <a:lstStyle/>
+                    <a:p>
+                      <a:r>
+                        <a:rPr sz="1500" b="1">
+                          <a:solidFill>
+                            <a:srgbClr val="1F3A5F"/>
+                          </a:solidFill>
+                          <a:latin typeface="Meiryo"/>
+                        </a:rPr>
+                        <a:t>主目的</a:t>
+                      </a:r>
+                    </a:p>
+                  </a:txBody>
+                  <a:tcPr>
+                    <a:solidFill>
+                      <a:srgbClr val="FFFFFF"/>
+                    </a:solidFill>
+                  </a:tcPr>
+                </a:tc>
+                <a:tc>
+                  <a:txBody>
+                    <a:bodyPr wrap="square"/>
+                    <a:lstStyle/>
+                    <a:p>
+                      <a:r>
+                        <a:rPr sz="1500" b="0">
+                          <a:solidFill>
+                            <a:srgbClr val="444444"/>
+                          </a:solidFill>
+                          <a:latin typeface="Meiryo"/>
+                        </a:rPr>
+                        <a:t>心線をコネクタ化(成端)して機器へ</a:t>
+                      </a:r>
+                    </a:p>
+                  </a:txBody>
+                  <a:tcPr>
+                    <a:solidFill>
+                      <a:srgbClr val="FFFFFF"/>
+                    </a:solidFill>
+                  </a:tcPr>
+                </a:tc>
+                <a:tc>
+                  <a:txBody>
+                    <a:bodyPr wrap="square"/>
+                    <a:lstStyle/>
+                    <a:p>
+                      <a:r>
+                        <a:rPr sz="1500" b="0">
+                          <a:solidFill>
+                            <a:srgbClr val="444444"/>
+                          </a:solidFill>
+                          <a:latin typeface="Meiryo"/>
+                        </a:rPr>
+                        <a:t>接続・分岐点を保護・収納</a:t>
+                      </a:r>
+                    </a:p>
+                  </a:txBody>
+                  <a:tcPr>
+                    <a:solidFill>
+                      <a:srgbClr val="FFFFFF"/>
+                    </a:solidFill>
+                  </a:tcPr>
+                </a:tc>
+              </a:tr>
+              <a:tr h="731520">
+                <a:tc>
+                  <a:txBody>
+                    <a:bodyPr wrap="square"/>
+                    <a:lstStyle/>
+                    <a:p>
+                      <a:r>
+                        <a:rPr sz="1500" b="1">
+                          <a:solidFill>
+                            <a:srgbClr val="1F3A5F"/>
+                          </a:solidFill>
+                          <a:latin typeface="Meiryo"/>
+                        </a:rPr>
+                        <a:t>設置場所</a:t>
+                      </a:r>
+                    </a:p>
+                  </a:txBody>
+                  <a:tcPr>
+                    <a:solidFill>
+                      <a:srgbClr val="EDF3FA"/>
+                    </a:solidFill>
+                  </a:tcPr>
+                </a:tc>
+                <a:tc>
+                  <a:txBody>
+                    <a:bodyPr wrap="square"/>
+                    <a:lstStyle/>
+                    <a:p>
+                      <a:r>
+                        <a:rPr sz="1500" b="0">
+                          <a:solidFill>
+                            <a:srgbClr val="444444"/>
+                          </a:solidFill>
+                          <a:latin typeface="Meiryo"/>
+                        </a:rPr>
+                        <a:t>屋内が中心</a:t>
+                      </a:r>
+                    </a:p>
+                  </a:txBody>
+                  <a:tcPr>
+                    <a:solidFill>
+                      <a:srgbClr val="EDF3FA"/>
+                    </a:solidFill>
+                  </a:tcPr>
+                </a:tc>
+                <a:tc>
+                  <a:txBody>
+                    <a:bodyPr wrap="square"/>
+                    <a:lstStyle/>
+                    <a:p>
+                      <a:r>
+                        <a:rPr sz="1500" b="0">
+                          <a:solidFill>
+                            <a:srgbClr val="444444"/>
+                          </a:solidFill>
+                          <a:latin typeface="Meiryo"/>
+                        </a:rPr>
+                        <a:t>屋外(架空・地中)が中心</a:t>
+                      </a:r>
+                    </a:p>
+                  </a:txBody>
+                  <a:tcPr>
+                    <a:solidFill>
+                      <a:srgbClr val="EDF3FA"/>
+                    </a:solidFill>
+                  </a:tcPr>
+                </a:tc>
+              </a:tr>
+              <a:tr h="731520">
+                <a:tc>
+                  <a:txBody>
+                    <a:bodyPr wrap="square"/>
+                    <a:lstStyle/>
+                    <a:p>
+                      <a:r>
+                        <a:rPr sz="1500" b="1">
+                          <a:solidFill>
+                            <a:srgbClr val="1F3A5F"/>
+                          </a:solidFill>
+                          <a:latin typeface="Meiryo"/>
+                        </a:rPr>
+                        <a:t>防水</a:t>
+                      </a:r>
+                    </a:p>
+                  </a:txBody>
+                  <a:tcPr>
+                    <a:solidFill>
+                      <a:srgbClr val="FFFFFF"/>
+                    </a:solidFill>
+                  </a:tcPr>
+                </a:tc>
+                <a:tc>
+                  <a:txBody>
+                    <a:bodyPr wrap="square"/>
+                    <a:lstStyle/>
+                    <a:p>
+                      <a:r>
+                        <a:rPr sz="1500" b="0">
+                          <a:solidFill>
+                            <a:srgbClr val="444444"/>
+                          </a:solidFill>
+                          <a:latin typeface="Meiryo"/>
+                        </a:rPr>
+                        <a:t>屋内前提(屋外型もあり)</a:t>
+                      </a:r>
+                    </a:p>
+                  </a:txBody>
+                  <a:tcPr>
+                    <a:solidFill>
+                      <a:srgbClr val="FFFFFF"/>
+                    </a:solidFill>
+                  </a:tcPr>
+                </a:tc>
+                <a:tc>
+                  <a:txBody>
+                    <a:bodyPr wrap="square"/>
+                    <a:lstStyle/>
+                    <a:p>
+                      <a:r>
+                        <a:rPr sz="1500" b="0">
+                          <a:solidFill>
+                            <a:srgbClr val="444444"/>
+                          </a:solidFill>
+                          <a:latin typeface="Meiryo"/>
+                        </a:rPr>
+                        <a:t>防水・防塵が前提</a:t>
+                      </a:r>
+                    </a:p>
+                  </a:txBody>
+                  <a:tcPr>
+                    <a:solidFill>
+                      <a:srgbClr val="FFFFFF"/>
+                    </a:solidFill>
+                  </a:tcPr>
+                </a:tc>
+              </a:tr>
+              <a:tr h="731520">
+                <a:tc>
+                  <a:txBody>
+                    <a:bodyPr wrap="square"/>
+                    <a:lstStyle/>
+                    <a:p>
+                      <a:r>
+                        <a:rPr sz="1500" b="1">
+                          <a:solidFill>
+                            <a:srgbClr val="1F3A5F"/>
+                          </a:solidFill>
+                          <a:latin typeface="Meiryo"/>
+                        </a:rPr>
+                        <a:t>イメージ</a:t>
+                      </a:r>
+                    </a:p>
+                  </a:txBody>
+                  <a:tcPr>
+                    <a:solidFill>
+                      <a:srgbClr val="EDF3FA"/>
+                    </a:solidFill>
+                  </a:tcPr>
+                </a:tc>
+                <a:tc>
+                  <a:txBody>
+                    <a:bodyPr wrap="square"/>
+                    <a:lstStyle/>
+                    <a:p>
+                      <a:r>
+                        <a:rPr sz="1500" b="0">
+                          <a:solidFill>
+                            <a:srgbClr val="444444"/>
+                          </a:solidFill>
+                          <a:latin typeface="Meiryo"/>
+                        </a:rPr>
+                        <a:t>配線盤/パッチパネル</a:t>
+                      </a:r>
+                    </a:p>
+                  </a:txBody>
+                  <a:tcPr>
+                    <a:solidFill>
+                      <a:srgbClr val="EDF3FA"/>
+                    </a:solidFill>
+                  </a:tcPr>
+                </a:tc>
+                <a:tc>
+                  <a:txBody>
+                    <a:bodyPr wrap="square"/>
+                    <a:lstStyle/>
+                    <a:p>
+                      <a:r>
+                        <a:rPr sz="1500" b="0">
+                          <a:solidFill>
+                            <a:srgbClr val="444444"/>
+                          </a:solidFill>
+                          <a:latin typeface="Meiryo"/>
+                        </a:rPr>
+                        <a:t>電線途中の保護ボックス</a:t>
+                      </a:r>
+                    </a:p>
+                  </a:txBody>
+                  <a:tcPr>
+                    <a:solidFill>
+                      <a:srgbClr val="EDF3FA"/>
+                    </a:solidFill>
+                  </a:tcPr>
+                </a:tc>
+              </a:tr>
+            </a:tbl>
+          </a:graphicData>
+        </a:graphic>
+      </p:graphicFrame>
+    </p:spTree>
+  </p:cSld>
+  <p:clrMapOvr>
+    <a:masterClrMapping/>
+  </p:clrMapOvr>
+</p:sld>
+</file>
+
+<file path=ppt/slides/slide18.xml><?xml version="1.0" encoding="utf-8"?>
+<p:sld xmlns:a="http://schemas.openxmlformats.org/drawingml/2006/main" xmlns:p="http://schemas.openxmlformats.org/presentationml/2006/main" xmlns:r="http://schemas.openxmlformats.org/officeDocument/2006/relationships">
+  <p:cSld>
+    <p:bg>
+      <p:bgPr>
+        <a:solidFill>
+          <a:srgbClr val="FFFFFF"/>
+        </a:solidFill>
+        <a:effectLst/>
+      </p:bgPr>
+    </p:bg>
+    <p:spTree>
+      <p:nvGrpSpPr>
+        <p:cNvPr id="1" name=""/>
+        <p:cNvGrpSpPr/>
+        <p:nvPr/>
+      </p:nvGrpSpPr>
+      <p:grpSpPr/>
+      <p:sp>
+        <p:nvSpPr>
+          <p:cNvPr id="2" name="Rectangle 1"/>
+          <p:cNvSpPr/>
+          <p:nvPr/>
+        </p:nvSpPr>
+        <p:spPr>
+          <a:xfrm>
+            <a:off x="0" y="0"/>
+            <a:ext cx="12191695" cy="960120"/>
+          </a:xfrm>
+          <a:prstGeom prst="rect">
+            <a:avLst/>
+          </a:prstGeom>
+          <a:solidFill>
+            <a:srgbClr val="1F3A5F"/>
+          </a:solidFill>
+          <a:ln>
+            <a:noFill/>
+          </a:ln>
+        </p:spPr>
+        <p:style>
+          <a:lnRef idx="1">
+            <a:schemeClr val="accent1"/>
+          </a:lnRef>
+          <a:fillRef idx="3">
+            <a:schemeClr val="accent1"/>
+          </a:fillRef>
+          <a:effectRef idx="2">
+            <a:schemeClr val="accent1"/>
+          </a:effectRef>
+          <a:fontRef idx="minor">
+            <a:schemeClr val="lt1"/>
+          </a:fontRef>
+        </p:style>
+        <p:txBody>
+          <a:bodyPr rtlCol="0" anchor="ctr" wrap="square" lIns="457200"/>
+          <a:lstStyle/>
+          <a:p>
+            <a:pPr algn="ctr"/>
+            <a:r>
+              <a:rPr sz="2600" b="1">
+                <a:solidFill>
+                  <a:srgbClr val="FFFFFF"/>
+                </a:solidFill>
+                <a:latin typeface="Meiryo"/>
+              </a:rPr>
+              <a:t>コネクタと規格（つなぎ口の種類）</a:t>
+            </a:r>
+          </a:p>
+        </p:txBody>
+      </p:sp>
+      <p:graphicFrame>
+        <p:nvGraphicFramePr>
+          <p:cNvPr id="3" name="Table 2"/>
+          <p:cNvGraphicFramePr>
+            <a:graphicFrameLocks noGrp="1"/>
+          </p:cNvGraphicFramePr>
+          <p:nvPr/>
+        </p:nvGraphicFramePr>
+        <p:xfrm>
+          <a:off x="548640" y="1280160"/>
+          <a:ext cx="11064240" cy="2286000"/>
+        </p:xfrm>
+        <a:graphic>
+          <a:graphicData uri="http://schemas.openxmlformats.org/drawingml/2006/table">
+            <a:tbl>
+              <a:tblPr firstRow="1" bandRow="1">
+                <a:tableStyleId>{5C22544A-7EE6-4342-B048-85BDC9FD1C3A}</a:tableStyleId>
+              </a:tblPr>
+              <a:tblGrid>
+                <a:gridCol w="1645920"/>
+                <a:gridCol w="5577840"/>
+                <a:gridCol w="3840480"/>
+              </a:tblGrid>
+              <a:tr h="457200">
+                <a:tc>
+                  <a:txBody>
+                    <a:bodyPr wrap="square"/>
+                    <a:lstStyle/>
+                    <a:p>
+                      <a:pPr algn="ctr"/>
+                      <a:r>
+                        <a:rPr sz="1500" b="1">
+                          <a:solidFill>
+                            <a:srgbClr val="FFFFFF"/>
+                          </a:solidFill>
+                          <a:latin typeface="Meiryo"/>
+                        </a:rPr>
+                        <a:t>コネクタ</a:t>
+                      </a:r>
+                    </a:p>
+                  </a:txBody>
+                  <a:tcPr>
+                    <a:solidFill>
+                      <a:srgbClr val="1F3A5F"/>
+                    </a:solidFill>
+                  </a:tcPr>
+                </a:tc>
+                <a:tc>
+                  <a:txBody>
+                    <a:bodyPr wrap="square"/>
+                    <a:lstStyle/>
+                    <a:p>
+                      <a:pPr algn="ctr"/>
+                      <a:r>
+                        <a:rPr sz="1500" b="1">
+                          <a:solidFill>
+                            <a:srgbClr val="FFFFFF"/>
+                          </a:solidFill>
+                          <a:latin typeface="Meiryo"/>
+                        </a:rPr>
+                        <a:t>形・固定方法</a:t>
+                      </a:r>
+                    </a:p>
+                  </a:txBody>
+                  <a:tcPr>
+                    <a:solidFill>
+                      <a:srgbClr val="1F3A5F"/>
+                    </a:solidFill>
+                  </a:tcPr>
+                </a:tc>
+                <a:tc>
+                  <a:txBody>
+                    <a:bodyPr wrap="square"/>
+                    <a:lstStyle/>
+                    <a:p>
+                      <a:pPr algn="ctr"/>
+                      <a:r>
+                        <a:rPr sz="1500" b="1">
+                          <a:solidFill>
+                            <a:srgbClr val="FFFFFF"/>
+                          </a:solidFill>
+                          <a:latin typeface="Meiryo"/>
+                        </a:rPr>
+                        <a:t>よく見る場所</a:t>
+                      </a:r>
+                    </a:p>
+                  </a:txBody>
+                  <a:tcPr>
+                    <a:solidFill>
+                      <a:srgbClr val="1F3A5F"/>
+                    </a:solidFill>
+                  </a:tcPr>
+                </a:tc>
+              </a:tr>
+              <a:tr h="457200">
+                <a:tc>
+                  <a:txBody>
+                    <a:bodyPr wrap="square"/>
+                    <a:lstStyle/>
+                    <a:p>
+                      <a:r>
+                        <a:rPr sz="1500" b="1">
+                          <a:solidFill>
+                            <a:srgbClr val="1F3A5F"/>
+                          </a:solidFill>
+                          <a:latin typeface="Meiryo"/>
+                        </a:rPr>
+                        <a:t>SC</a:t>
+                      </a:r>
+                    </a:p>
+                  </a:txBody>
+                  <a:tcPr>
+                    <a:solidFill>
+                      <a:srgbClr val="EDF3FA"/>
+                    </a:solidFill>
+                  </a:tcPr>
+                </a:tc>
+                <a:tc>
+                  <a:txBody>
+                    <a:bodyPr wrap="square"/>
+                    <a:lstStyle/>
+                    <a:p>
+                      <a:r>
+                        <a:rPr sz="1500" b="0">
+                          <a:solidFill>
+                            <a:srgbClr val="444444"/>
+                          </a:solidFill>
+                          <a:latin typeface="Meiryo"/>
+                        </a:rPr>
+                        <a:t>四角形・押して固定（プッシュプル）</a:t>
+                      </a:r>
+                    </a:p>
+                  </a:txBody>
+                  <a:tcPr>
+                    <a:solidFill>
+                      <a:srgbClr val="EDF3FA"/>
+                    </a:solidFill>
+                  </a:tcPr>
+                </a:tc>
+                <a:tc>
+                  <a:txBody>
+                    <a:bodyPr wrap="square"/>
+                    <a:lstStyle/>
+                    <a:p>
+                      <a:r>
+                        <a:rPr sz="1500" b="0">
+                          <a:solidFill>
+                            <a:srgbClr val="444444"/>
+                          </a:solidFill>
+                          <a:latin typeface="Meiryo"/>
+                        </a:rPr>
+                        <a:t>家庭のONU・通信機器</a:t>
+                      </a:r>
+                    </a:p>
+                  </a:txBody>
+                  <a:tcPr>
+                    <a:solidFill>
+                      <a:srgbClr val="EDF3FA"/>
+                    </a:solidFill>
+                  </a:tcPr>
+                </a:tc>
+              </a:tr>
+              <a:tr h="457200">
+                <a:tc>
+                  <a:txBody>
+                    <a:bodyPr wrap="square"/>
+                    <a:lstStyle/>
+                    <a:p>
+                      <a:r>
+                        <a:rPr sz="1500" b="1">
+                          <a:solidFill>
+                            <a:srgbClr val="1F3A5F"/>
+                          </a:solidFill>
+                          <a:latin typeface="Meiryo"/>
+                        </a:rPr>
+                        <a:t>LC</a:t>
+                      </a:r>
+                    </a:p>
+                  </a:txBody>
+                  <a:tcPr>
+                    <a:solidFill>
+                      <a:srgbClr val="FFFFFF"/>
+                    </a:solidFill>
+                  </a:tcPr>
+                </a:tc>
+                <a:tc>
+                  <a:txBody>
+                    <a:bodyPr wrap="square"/>
+                    <a:lstStyle/>
+                    <a:p>
+                      <a:r>
+                        <a:rPr sz="1500" b="0">
+                          <a:solidFill>
+                            <a:srgbClr val="444444"/>
+                          </a:solidFill>
+                          <a:latin typeface="Meiryo"/>
+                        </a:rPr>
+                        <a:t>SCを小型化・ツメで固定</a:t>
+                      </a:r>
+                    </a:p>
+                  </a:txBody>
+                  <a:tcPr>
+                    <a:solidFill>
+                      <a:srgbClr val="FFFFFF"/>
+                    </a:solidFill>
+                  </a:tcPr>
+                </a:tc>
+                <a:tc>
+                  <a:txBody>
+                    <a:bodyPr wrap="square"/>
+                    <a:lstStyle/>
+                    <a:p>
+                      <a:r>
+                        <a:rPr sz="1500" b="0">
+                          <a:solidFill>
+                            <a:srgbClr val="444444"/>
+                          </a:solidFill>
+                          <a:latin typeface="Meiryo"/>
+                        </a:rPr>
+                        <a:t>データセンター・スイッチ</a:t>
+                      </a:r>
+                    </a:p>
+                  </a:txBody>
+                  <a:tcPr>
+                    <a:solidFill>
+                      <a:srgbClr val="FFFFFF"/>
+                    </a:solidFill>
+                  </a:tcPr>
+                </a:tc>
+              </a:tr>
+              <a:tr h="457200">
+                <a:tc>
+                  <a:txBody>
+                    <a:bodyPr wrap="square"/>
+                    <a:lstStyle/>
+                    <a:p>
+                      <a:r>
+                        <a:rPr sz="1500" b="1">
+                          <a:solidFill>
+                            <a:srgbClr val="1F3A5F"/>
+                          </a:solidFill>
+                          <a:latin typeface="Meiryo"/>
+                        </a:rPr>
+                        <a:t>ST</a:t>
+                      </a:r>
+                    </a:p>
+                  </a:txBody>
+                  <a:tcPr>
+                    <a:solidFill>
+                      <a:srgbClr val="EDF3FA"/>
+                    </a:solidFill>
+                  </a:tcPr>
+                </a:tc>
+                <a:tc>
+                  <a:txBody>
+                    <a:bodyPr wrap="square"/>
+                    <a:lstStyle/>
+                    <a:p>
+                      <a:r>
+                        <a:rPr sz="1500" b="0">
+                          <a:solidFill>
+                            <a:srgbClr val="444444"/>
+                          </a:solidFill>
+                          <a:latin typeface="Meiryo"/>
+                        </a:rPr>
+                        <a:t>丸型・ひねって固定（バヨネット）</a:t>
+                      </a:r>
+                    </a:p>
+                  </a:txBody>
+                  <a:tcPr>
+                    <a:solidFill>
+                      <a:srgbClr val="EDF3FA"/>
+                    </a:solidFill>
+                  </a:tcPr>
+                </a:tc>
+                <a:tc>
+                  <a:txBody>
+                    <a:bodyPr wrap="square"/>
+                    <a:lstStyle/>
+                    <a:p>
+                      <a:r>
+                        <a:rPr sz="1500" b="0">
+                          <a:solidFill>
+                            <a:srgbClr val="444444"/>
+                          </a:solidFill>
+                          <a:latin typeface="Meiryo"/>
+                        </a:rPr>
+                        <a:t>古めの設備・LAN</a:t>
+                      </a:r>
+                    </a:p>
+                  </a:txBody>
+                  <a:tcPr>
+                    <a:solidFill>
+                      <a:srgbClr val="EDF3FA"/>
+                    </a:solidFill>
+                  </a:tcPr>
+                </a:tc>
+              </a:tr>
+              <a:tr h="457200">
+                <a:tc>
+                  <a:txBody>
+                    <a:bodyPr wrap="square"/>
+                    <a:lstStyle/>
+                    <a:p>
+                      <a:r>
+                        <a:rPr sz="1500" b="1">
+                          <a:solidFill>
+                            <a:srgbClr val="1F3A5F"/>
+                          </a:solidFill>
+                          <a:latin typeface="Meiryo"/>
+                        </a:rPr>
+                        <a:t>FC</a:t>
+                      </a:r>
+                    </a:p>
+                  </a:txBody>
+                  <a:tcPr>
+                    <a:solidFill>
+                      <a:srgbClr val="FFFFFF"/>
+                    </a:solidFill>
+                  </a:tcPr>
+                </a:tc>
+                <a:tc>
+                  <a:txBody>
+                    <a:bodyPr wrap="square"/>
+                    <a:lstStyle/>
+                    <a:p>
+                      <a:r>
+                        <a:rPr sz="1500" b="0">
+                          <a:solidFill>
+                            <a:srgbClr val="444444"/>
+                          </a:solidFill>
+                          <a:latin typeface="Meiryo"/>
+                        </a:rPr>
+                        <a:t>丸型・ねじで締めて固定</a:t>
+                      </a:r>
+                    </a:p>
+                  </a:txBody>
+                  <a:tcPr>
+                    <a:solidFill>
+                      <a:srgbClr val="FFFFFF"/>
+                    </a:solidFill>
+                  </a:tcPr>
+                </a:tc>
+                <a:tc>
+                  <a:txBody>
+                    <a:bodyPr wrap="square"/>
+                    <a:lstStyle/>
+                    <a:p>
+                      <a:r>
+                        <a:rPr sz="1500" b="0">
+                          <a:solidFill>
+                            <a:srgbClr val="444444"/>
+                          </a:solidFill>
+                          <a:latin typeface="Meiryo"/>
+                        </a:rPr>
+                        <a:t>計測器・産業用</a:t>
+                      </a:r>
+                    </a:p>
+                  </a:txBody>
+                  <a:tcPr>
+                    <a:solidFill>
+                      <a:srgbClr val="FFFFFF"/>
+                    </a:solidFill>
+                  </a:tcPr>
+                </a:tc>
+              </a:tr>
+            </a:tbl>
+          </a:graphicData>
+        </a:graphic>
+      </p:graphicFrame>
+      <p:sp>
+        <p:nvSpPr>
+          <p:cNvPr id="4" name="Rounded Rectangle 3"/>
+          <p:cNvSpPr/>
+          <p:nvPr/>
+        </p:nvSpPr>
+        <p:spPr>
+          <a:xfrm>
+            <a:off x="937259" y="4206240"/>
+            <a:ext cx="2331720" cy="1828800"/>
+          </a:xfrm>
+          <a:prstGeom prst="roundRect">
+            <a:avLst/>
+          </a:prstGeom>
+          <a:solidFill>
+            <a:srgbClr val="EDF3FA"/>
+          </a:solidFill>
+          <a:ln w="12700">
+            <a:solidFill>
+              <a:srgbClr val="2E6DB4"/>
+            </a:solidFill>
+          </a:ln>
+          <a:effectLst/>
+        </p:spPr>
+        <p:style>
+          <a:lnRef idx="1">
+            <a:schemeClr val="accent1"/>
+          </a:lnRef>
+          <a:fillRef idx="3">
+            <a:schemeClr val="accent1"/>
+          </a:fillRef>
+          <a:effectRef idx="2">
+            <a:schemeClr val="accent1"/>
+          </a:effectRef>
+          <a:fontRef idx="minor">
+            <a:schemeClr val="lt1"/>
+          </a:fontRef>
+        </p:style>
+        <p:txBody>
+          <a:bodyPr rtlCol="0" anchor="ctr"/>
+          <a:lstStyle/>
+          <a:p>
+            <a:pPr algn="ctr"/>
+          </a:p>
+        </p:txBody>
+      </p:sp>
+      <p:sp>
+        <p:nvSpPr>
+          <p:cNvPr id="5" name="TextBox 4"/>
+          <p:cNvSpPr txBox="1"/>
+          <p:nvPr/>
+        </p:nvSpPr>
+        <p:spPr>
+          <a:xfrm>
+            <a:off x="937259" y="4279392"/>
+            <a:ext cx="2331720" cy="365760"/>
+          </a:xfrm>
+          <a:prstGeom prst="rect">
+            <a:avLst/>
+          </a:prstGeom>
+          <a:noFill/>
+        </p:spPr>
+        <p:txBody>
+          <a:bodyPr wrap="square" tIns="0" bIns="0">
+            <a:spAutoFit/>
+          </a:bodyPr>
+          <a:lstStyle/>
+          <a:p>
+            <a:pPr algn="ctr"/>
+            <a:r>
+              <a:rPr sz="1800" b="1">
+                <a:solidFill>
+                  <a:srgbClr val="1F3A5F"/>
+                </a:solidFill>
+                <a:latin typeface="Meiryo"/>
+              </a:rPr>
+              <a:t>SC</a:t>
+            </a:r>
+          </a:p>
+        </p:txBody>
+      </p:sp>
+      <p:sp>
+        <p:nvSpPr>
+          <p:cNvPr id="6" name="Rectangle 5"/>
+          <p:cNvSpPr/>
+          <p:nvPr/>
+        </p:nvSpPr>
+        <p:spPr>
+          <a:xfrm>
+            <a:off x="1783079" y="4782312"/>
+            <a:ext cx="640080" cy="640080"/>
+          </a:xfrm>
+          <a:prstGeom prst="rect">
+            <a:avLst/>
+          </a:prstGeom>
+          <a:solidFill>
+            <a:srgbClr val="1F3A5F"/>
+          </a:solidFill>
+          <a:ln>
+            <a:solidFill>
+              <a:srgbClr val="1F3A5F"/>
+            </a:solidFill>
+          </a:ln>
+          <a:effectLst/>
+        </p:spPr>
+        <p:style>
+          <a:lnRef idx="1">
+            <a:schemeClr val="accent1"/>
+          </a:lnRef>
+          <a:fillRef idx="3">
+            <a:schemeClr val="accent1"/>
+          </a:fillRef>
+          <a:effectRef idx="2">
+            <a:schemeClr val="accent1"/>
+          </a:effectRef>
+          <a:fontRef idx="minor">
+            <a:schemeClr val="lt1"/>
+          </a:fontRef>
+        </p:style>
+        <p:txBody>
+          <a:bodyPr rtlCol="0" anchor="ctr"/>
+          <a:lstStyle/>
+          <a:p>
+            <a:pPr algn="ctr"/>
+          </a:p>
+        </p:txBody>
+      </p:sp>
+      <p:sp>
+        <p:nvSpPr>
+          <p:cNvPr id="7" name="Oval 6"/>
+          <p:cNvSpPr/>
+          <p:nvPr/>
+        </p:nvSpPr>
+        <p:spPr>
+          <a:xfrm>
+            <a:off x="2029967" y="5029200"/>
+            <a:ext cx="146304" cy="146304"/>
+          </a:xfrm>
+          <a:prstGeom prst="ellipse">
+            <a:avLst/>
+          </a:prstGeom>
+          <a:solidFill>
+            <a:srgbClr val="FFFFFF"/>
+          </a:solidFill>
+          <a:ln>
+            <a:noFill/>
+          </a:ln>
+          <a:effectLst/>
+        </p:spPr>
+        <p:style>
+          <a:lnRef idx="1">
+            <a:schemeClr val="accent1"/>
+          </a:lnRef>
+          <a:fillRef idx="3">
+            <a:schemeClr val="accent1"/>
+          </a:fillRef>
+          <a:effectRef idx="2">
+            <a:schemeClr val="accent1"/>
+          </a:effectRef>
+          <a:fontRef idx="minor">
+            <a:schemeClr val="lt1"/>
+          </a:fontRef>
+        </p:style>
+        <p:txBody>
+          <a:bodyPr rtlCol="0" anchor="ctr"/>
+          <a:lstStyle/>
+          <a:p>
+            <a:pPr algn="ctr"/>
+          </a:p>
+        </p:txBody>
+      </p:sp>
+      <p:sp>
+        <p:nvSpPr>
+          <p:cNvPr id="8" name="TextBox 7"/>
+          <p:cNvSpPr txBox="1"/>
+          <p:nvPr/>
+        </p:nvSpPr>
+        <p:spPr>
+          <a:xfrm>
+            <a:off x="1028700" y="5650992"/>
+            <a:ext cx="2148839" cy="320040"/>
+          </a:xfrm>
+          <a:prstGeom prst="rect">
+            <a:avLst/>
+          </a:prstGeom>
+          <a:noFill/>
+        </p:spPr>
+        <p:txBody>
+          <a:bodyPr wrap="square" tIns="0" bIns="0">
+            <a:spAutoFit/>
+          </a:bodyPr>
+          <a:lstStyle/>
+          <a:p>
+            <a:pPr algn="ctr"/>
+            <a:r>
+              <a:rPr sz="1200" b="0">
+                <a:solidFill>
+                  <a:srgbClr val="444444"/>
+                </a:solidFill>
+                <a:latin typeface="Meiryo"/>
+              </a:rPr>
+              <a:t>角型・押す</a:t>
+            </a:r>
+          </a:p>
+        </p:txBody>
+      </p:sp>
+      <p:sp>
+        <p:nvSpPr>
+          <p:cNvPr id="9" name="Rounded Rectangle 8"/>
+          <p:cNvSpPr/>
+          <p:nvPr/>
+        </p:nvSpPr>
+        <p:spPr>
+          <a:xfrm>
+            <a:off x="3680460" y="4206240"/>
+            <a:ext cx="2331720" cy="1828800"/>
+          </a:xfrm>
+          <a:prstGeom prst="roundRect">
+            <a:avLst/>
+          </a:prstGeom>
+          <a:solidFill>
+            <a:srgbClr val="EDF3FA"/>
+          </a:solidFill>
+          <a:ln w="12700">
+            <a:solidFill>
+              <a:srgbClr val="2E6DB4"/>
+            </a:solidFill>
+          </a:ln>
+          <a:effectLst/>
+        </p:spPr>
+        <p:style>
+          <a:lnRef idx="1">
+            <a:schemeClr val="accent1"/>
+          </a:lnRef>
+          <a:fillRef idx="3">
+            <a:schemeClr val="accent1"/>
+          </a:fillRef>
+          <a:effectRef idx="2">
+            <a:schemeClr val="accent1"/>
+          </a:effectRef>
+          <a:fontRef idx="minor">
+            <a:schemeClr val="lt1"/>
+          </a:fontRef>
+        </p:style>
+        <p:txBody>
+          <a:bodyPr rtlCol="0" anchor="ctr"/>
+          <a:lstStyle/>
+          <a:p>
+            <a:pPr algn="ctr"/>
+          </a:p>
+        </p:txBody>
+      </p:sp>
+      <p:sp>
+        <p:nvSpPr>
+          <p:cNvPr id="10" name="TextBox 9"/>
+          <p:cNvSpPr txBox="1"/>
+          <p:nvPr/>
+        </p:nvSpPr>
+        <p:spPr>
+          <a:xfrm>
+            <a:off x="3680460" y="4279392"/>
+            <a:ext cx="2331720" cy="365760"/>
+          </a:xfrm>
+          <a:prstGeom prst="rect">
+            <a:avLst/>
+          </a:prstGeom>
+          <a:noFill/>
+        </p:spPr>
+        <p:txBody>
+          <a:bodyPr wrap="square" tIns="0" bIns="0">
+            <a:spAutoFit/>
+          </a:bodyPr>
+          <a:lstStyle/>
+          <a:p>
+            <a:pPr algn="ctr"/>
+            <a:r>
+              <a:rPr sz="1800" b="1">
+                <a:solidFill>
+                  <a:srgbClr val="1F3A5F"/>
+                </a:solidFill>
+                <a:latin typeface="Meiryo"/>
+              </a:rPr>
+              <a:t>LC</a:t>
+            </a:r>
+          </a:p>
+        </p:txBody>
+      </p:sp>
+      <p:sp>
+        <p:nvSpPr>
+          <p:cNvPr id="11" name="Rectangle 10"/>
+          <p:cNvSpPr/>
+          <p:nvPr/>
+        </p:nvSpPr>
+        <p:spPr>
+          <a:xfrm>
+            <a:off x="4626864" y="4882896"/>
+            <a:ext cx="438912" cy="438912"/>
+          </a:xfrm>
+          <a:prstGeom prst="rect">
+            <a:avLst/>
+          </a:prstGeom>
+          <a:solidFill>
+            <a:srgbClr val="1F3A5F"/>
+          </a:solidFill>
+          <a:ln>
+            <a:solidFill>
+              <a:srgbClr val="1F3A5F"/>
+            </a:solidFill>
+          </a:ln>
+          <a:effectLst/>
+        </p:spPr>
+        <p:style>
+          <a:lnRef idx="1">
+            <a:schemeClr val="accent1"/>
+          </a:lnRef>
+          <a:fillRef idx="3">
+            <a:schemeClr val="accent1"/>
+          </a:fillRef>
+          <a:effectRef idx="2">
+            <a:schemeClr val="accent1"/>
+          </a:effectRef>
+          <a:fontRef idx="minor">
+            <a:schemeClr val="lt1"/>
+          </a:fontRef>
+        </p:style>
+        <p:txBody>
+          <a:bodyPr rtlCol="0" anchor="ctr"/>
+          <a:lstStyle/>
+          <a:p>
+            <a:pPr algn="ctr"/>
+          </a:p>
+        </p:txBody>
+      </p:sp>
+      <p:sp>
+        <p:nvSpPr>
+          <p:cNvPr id="12" name="Oval 11"/>
+          <p:cNvSpPr/>
+          <p:nvPr/>
+        </p:nvSpPr>
+        <p:spPr>
+          <a:xfrm>
+            <a:off x="4773168" y="5029200"/>
+            <a:ext cx="146304" cy="146304"/>
+          </a:xfrm>
+          <a:prstGeom prst="ellipse">
+            <a:avLst/>
+          </a:prstGeom>
+          <a:solidFill>
+            <a:srgbClr val="FFFFFF"/>
+          </a:solidFill>
+          <a:ln>
+            <a:noFill/>
+          </a:ln>
+          <a:effectLst/>
+        </p:spPr>
+        <p:style>
+          <a:lnRef idx="1">
+            <a:schemeClr val="accent1"/>
+          </a:lnRef>
+          <a:fillRef idx="3">
+            <a:schemeClr val="accent1"/>
+          </a:fillRef>
+          <a:effectRef idx="2">
+            <a:schemeClr val="accent1"/>
+          </a:effectRef>
+          <a:fontRef idx="minor">
+            <a:schemeClr val="lt1"/>
+          </a:fontRef>
+        </p:style>
+        <p:txBody>
+          <a:bodyPr rtlCol="0" anchor="ctr"/>
+          <a:lstStyle/>
+          <a:p>
+            <a:pPr algn="ctr"/>
+          </a:p>
+        </p:txBody>
+      </p:sp>
+      <p:sp>
+        <p:nvSpPr>
+          <p:cNvPr id="13" name="TextBox 12"/>
+          <p:cNvSpPr txBox="1"/>
+          <p:nvPr/>
+        </p:nvSpPr>
+        <p:spPr>
+          <a:xfrm>
+            <a:off x="3771900" y="5650992"/>
+            <a:ext cx="2148839" cy="320040"/>
+          </a:xfrm>
+          <a:prstGeom prst="rect">
+            <a:avLst/>
+          </a:prstGeom>
+          <a:noFill/>
+        </p:spPr>
+        <p:txBody>
+          <a:bodyPr wrap="square" tIns="0" bIns="0">
+            <a:spAutoFit/>
+          </a:bodyPr>
+          <a:lstStyle/>
+          <a:p>
+            <a:pPr algn="ctr"/>
+            <a:r>
+              <a:rPr sz="1200" b="0">
+                <a:solidFill>
+                  <a:srgbClr val="444444"/>
+                </a:solidFill>
+                <a:latin typeface="Meiryo"/>
+              </a:rPr>
+              <a:t>小型・ツメ</a:t>
+            </a:r>
+          </a:p>
+        </p:txBody>
+      </p:sp>
+      <p:sp>
+        <p:nvSpPr>
+          <p:cNvPr id="14" name="Rounded Rectangle 13"/>
+          <p:cNvSpPr/>
+          <p:nvPr/>
+        </p:nvSpPr>
+        <p:spPr>
+          <a:xfrm>
+            <a:off x="6423660" y="4206240"/>
+            <a:ext cx="2331720" cy="1828800"/>
+          </a:xfrm>
+          <a:prstGeom prst="roundRect">
+            <a:avLst/>
+          </a:prstGeom>
+          <a:solidFill>
+            <a:srgbClr val="EDF3FA"/>
+          </a:solidFill>
+          <a:ln w="12700">
+            <a:solidFill>
+              <a:srgbClr val="2E6DB4"/>
+            </a:solidFill>
+          </a:ln>
+          <a:effectLst/>
+        </p:spPr>
+        <p:style>
+          <a:lnRef idx="1">
+            <a:schemeClr val="accent1"/>
+          </a:lnRef>
+          <a:fillRef idx="3">
+            <a:schemeClr val="accent1"/>
+          </a:fillRef>
+          <a:effectRef idx="2">
+            <a:schemeClr val="accent1"/>
+          </a:effectRef>
+          <a:fontRef idx="minor">
+            <a:schemeClr val="lt1"/>
+          </a:fontRef>
+        </p:style>
+        <p:txBody>
+          <a:bodyPr rtlCol="0" anchor="ctr"/>
+          <a:lstStyle/>
+          <a:p>
+            <a:pPr algn="ctr"/>
+          </a:p>
+        </p:txBody>
+      </p:sp>
+      <p:sp>
+        <p:nvSpPr>
+          <p:cNvPr id="15" name="TextBox 14"/>
+          <p:cNvSpPr txBox="1"/>
+          <p:nvPr/>
+        </p:nvSpPr>
+        <p:spPr>
+          <a:xfrm>
+            <a:off x="6423660" y="4279392"/>
+            <a:ext cx="2331720" cy="365760"/>
+          </a:xfrm>
+          <a:prstGeom prst="rect">
+            <a:avLst/>
+          </a:prstGeom>
+          <a:noFill/>
+        </p:spPr>
+        <p:txBody>
+          <a:bodyPr wrap="square" tIns="0" bIns="0">
+            <a:spAutoFit/>
+          </a:bodyPr>
+          <a:lstStyle/>
+          <a:p>
+            <a:pPr algn="ctr"/>
+            <a:r>
+              <a:rPr sz="1800" b="1">
+                <a:solidFill>
+                  <a:srgbClr val="1F3A5F"/>
+                </a:solidFill>
+                <a:latin typeface="Meiryo"/>
+              </a:rPr>
+              <a:t>ST</a:t>
+            </a:r>
+          </a:p>
+        </p:txBody>
+      </p:sp>
+      <p:sp>
+        <p:nvSpPr>
+          <p:cNvPr id="16" name="Oval 15"/>
+          <p:cNvSpPr/>
+          <p:nvPr/>
+        </p:nvSpPr>
+        <p:spPr>
+          <a:xfrm>
+            <a:off x="7269480" y="4782312"/>
+            <a:ext cx="640080" cy="640080"/>
+          </a:xfrm>
+          <a:prstGeom prst="ellipse">
+            <a:avLst/>
+          </a:prstGeom>
+          <a:solidFill>
+            <a:srgbClr val="1F3A5F"/>
+          </a:solidFill>
+          <a:ln>
+            <a:solidFill>
+              <a:srgbClr val="1F3A5F"/>
+            </a:solidFill>
+          </a:ln>
+          <a:effectLst/>
+        </p:spPr>
+        <p:style>
+          <a:lnRef idx="1">
+            <a:schemeClr val="accent1"/>
+          </a:lnRef>
+          <a:fillRef idx="3">
+            <a:schemeClr val="accent1"/>
+          </a:fillRef>
+          <a:effectRef idx="2">
+            <a:schemeClr val="accent1"/>
+          </a:effectRef>
+          <a:fontRef idx="minor">
+            <a:schemeClr val="lt1"/>
+          </a:fontRef>
+        </p:style>
+        <p:txBody>
+          <a:bodyPr rtlCol="0" anchor="ctr"/>
+          <a:lstStyle/>
+          <a:p>
+            <a:pPr algn="ctr"/>
+          </a:p>
+        </p:txBody>
+      </p:sp>
+      <p:sp>
+        <p:nvSpPr>
+          <p:cNvPr id="17" name="Oval 16"/>
+          <p:cNvSpPr/>
+          <p:nvPr/>
+        </p:nvSpPr>
+        <p:spPr>
+          <a:xfrm>
+            <a:off x="7516368" y="5029200"/>
+            <a:ext cx="146304" cy="146304"/>
+          </a:xfrm>
+          <a:prstGeom prst="ellipse">
+            <a:avLst/>
+          </a:prstGeom>
+          <a:solidFill>
+            <a:srgbClr val="FFFFFF"/>
+          </a:solidFill>
+          <a:ln>
+            <a:noFill/>
+          </a:ln>
+          <a:effectLst/>
+        </p:spPr>
+        <p:style>
+          <a:lnRef idx="1">
+            <a:schemeClr val="accent1"/>
+          </a:lnRef>
+          <a:fillRef idx="3">
+            <a:schemeClr val="accent1"/>
+          </a:fillRef>
+          <a:effectRef idx="2">
+            <a:schemeClr val="accent1"/>
+          </a:effectRef>
+          <a:fontRef idx="minor">
+            <a:schemeClr val="lt1"/>
+          </a:fontRef>
+        </p:style>
+        <p:txBody>
+          <a:bodyPr rtlCol="0" anchor="ctr"/>
+          <a:lstStyle/>
+          <a:p>
+            <a:pPr algn="ctr"/>
+          </a:p>
+        </p:txBody>
+      </p:sp>
+      <p:sp>
+        <p:nvSpPr>
+          <p:cNvPr id="18" name="TextBox 17"/>
+          <p:cNvSpPr txBox="1"/>
+          <p:nvPr/>
+        </p:nvSpPr>
+        <p:spPr>
+          <a:xfrm>
+            <a:off x="6515100" y="5650992"/>
+            <a:ext cx="2148839" cy="320040"/>
+          </a:xfrm>
+          <a:prstGeom prst="rect">
+            <a:avLst/>
+          </a:prstGeom>
+          <a:noFill/>
+        </p:spPr>
+        <p:txBody>
+          <a:bodyPr wrap="square" tIns="0" bIns="0">
+            <a:spAutoFit/>
+          </a:bodyPr>
+          <a:lstStyle/>
+          <a:p>
+            <a:pPr algn="ctr"/>
+            <a:r>
+              <a:rPr sz="1200" b="0">
+                <a:solidFill>
+                  <a:srgbClr val="444444"/>
+                </a:solidFill>
+                <a:latin typeface="Meiryo"/>
+              </a:rPr>
+              <a:t>丸型・ひねる</a:t>
+            </a:r>
+          </a:p>
+        </p:txBody>
+      </p:sp>
+      <p:sp>
+        <p:nvSpPr>
+          <p:cNvPr id="19" name="Rounded Rectangle 18"/>
+          <p:cNvSpPr/>
+          <p:nvPr/>
+        </p:nvSpPr>
+        <p:spPr>
+          <a:xfrm>
+            <a:off x="9166860" y="4206240"/>
+            <a:ext cx="2331720" cy="1828800"/>
+          </a:xfrm>
+          <a:prstGeom prst="roundRect">
+            <a:avLst/>
+          </a:prstGeom>
+          <a:solidFill>
+            <a:srgbClr val="EDF3FA"/>
+          </a:solidFill>
+          <a:ln w="12700">
+            <a:solidFill>
+              <a:srgbClr val="2E6DB4"/>
+            </a:solidFill>
+          </a:ln>
+          <a:effectLst/>
+        </p:spPr>
+        <p:style>
+          <a:lnRef idx="1">
+            <a:schemeClr val="accent1"/>
+          </a:lnRef>
+          <a:fillRef idx="3">
+            <a:schemeClr val="accent1"/>
+          </a:fillRef>
+          <a:effectRef idx="2">
+            <a:schemeClr val="accent1"/>
+          </a:effectRef>
+          <a:fontRef idx="minor">
+            <a:schemeClr val="lt1"/>
+          </a:fontRef>
+        </p:style>
+        <p:txBody>
+          <a:bodyPr rtlCol="0" anchor="ctr"/>
+          <a:lstStyle/>
+          <a:p>
+            <a:pPr algn="ctr"/>
+          </a:p>
+        </p:txBody>
+      </p:sp>
+      <p:sp>
+        <p:nvSpPr>
+          <p:cNvPr id="20" name="TextBox 19"/>
+          <p:cNvSpPr txBox="1"/>
+          <p:nvPr/>
+        </p:nvSpPr>
+        <p:spPr>
+          <a:xfrm>
+            <a:off x="9166860" y="4279392"/>
+            <a:ext cx="2331720" cy="365760"/>
+          </a:xfrm>
+          <a:prstGeom prst="rect">
+            <a:avLst/>
+          </a:prstGeom>
+          <a:noFill/>
+        </p:spPr>
+        <p:txBody>
+          <a:bodyPr wrap="square" tIns="0" bIns="0">
+            <a:spAutoFit/>
+          </a:bodyPr>
+          <a:lstStyle/>
+          <a:p>
+            <a:pPr algn="ctr"/>
+            <a:r>
+              <a:rPr sz="1800" b="1">
+                <a:solidFill>
+                  <a:srgbClr val="1F3A5F"/>
+                </a:solidFill>
+                <a:latin typeface="Meiryo"/>
+              </a:rPr>
+              <a:t>FC</a:t>
+            </a:r>
+          </a:p>
+        </p:txBody>
+      </p:sp>
+      <p:sp>
+        <p:nvSpPr>
+          <p:cNvPr id="21" name="Hexagon 20"/>
+          <p:cNvSpPr/>
+          <p:nvPr/>
+        </p:nvSpPr>
+        <p:spPr>
+          <a:xfrm>
+            <a:off x="9966960" y="4773168"/>
+            <a:ext cx="731520" cy="658368"/>
+          </a:xfrm>
+          <a:prstGeom prst="hexagon">
+            <a:avLst/>
+          </a:prstGeom>
+          <a:solidFill>
+            <a:srgbClr val="1F3A5F"/>
+          </a:solidFill>
+          <a:ln>
+            <a:solidFill>
+              <a:srgbClr val="1F3A5F"/>
+            </a:solidFill>
+          </a:ln>
+          <a:effectLst/>
+        </p:spPr>
+        <p:style>
+          <a:lnRef idx="1">
+            <a:schemeClr val="accent1"/>
+          </a:lnRef>
+          <a:fillRef idx="3">
+            <a:schemeClr val="accent1"/>
+          </a:fillRef>
+          <a:effectRef idx="2">
+            <a:schemeClr val="accent1"/>
+          </a:effectRef>
+          <a:fontRef idx="minor">
+            <a:schemeClr val="lt1"/>
+          </a:fontRef>
+        </p:style>
+        <p:txBody>
+          <a:bodyPr rtlCol="0" anchor="ctr"/>
+          <a:lstStyle/>
+          <a:p>
+            <a:pPr algn="ctr"/>
+          </a:p>
+        </p:txBody>
+      </p:sp>
+      <p:sp>
+        <p:nvSpPr>
+          <p:cNvPr id="22" name="Oval 21"/>
+          <p:cNvSpPr/>
+          <p:nvPr/>
+        </p:nvSpPr>
+        <p:spPr>
+          <a:xfrm>
+            <a:off x="10259568" y="5029200"/>
+            <a:ext cx="146304" cy="146304"/>
+          </a:xfrm>
+          <a:prstGeom prst="ellipse">
+            <a:avLst/>
+          </a:prstGeom>
+          <a:solidFill>
+            <a:srgbClr val="FFFFFF"/>
+          </a:solidFill>
+          <a:ln>
+            <a:noFill/>
+          </a:ln>
+          <a:effectLst/>
+        </p:spPr>
+        <p:style>
+          <a:lnRef idx="1">
+            <a:schemeClr val="accent1"/>
+          </a:lnRef>
+          <a:fillRef idx="3">
+            <a:schemeClr val="accent1"/>
+          </a:fillRef>
+          <a:effectRef idx="2">
+            <a:schemeClr val="accent1"/>
+          </a:effectRef>
+          <a:fontRef idx="minor">
+            <a:schemeClr val="lt1"/>
+          </a:fontRef>
+        </p:style>
+        <p:txBody>
+          <a:bodyPr rtlCol="0" anchor="ctr"/>
+          <a:lstStyle/>
+          <a:p>
+            <a:pPr algn="ctr"/>
+          </a:p>
+        </p:txBody>
+      </p:sp>
+      <p:sp>
+        <p:nvSpPr>
+          <p:cNvPr id="23" name="TextBox 22"/>
+          <p:cNvSpPr txBox="1"/>
+          <p:nvPr/>
+        </p:nvSpPr>
+        <p:spPr>
+          <a:xfrm>
+            <a:off x="9258300" y="5650992"/>
+            <a:ext cx="2148839" cy="320040"/>
+          </a:xfrm>
+          <a:prstGeom prst="rect">
+            <a:avLst/>
+          </a:prstGeom>
+          <a:noFill/>
+        </p:spPr>
+        <p:txBody>
+          <a:bodyPr wrap="square" tIns="0" bIns="0">
+            <a:spAutoFit/>
+          </a:bodyPr>
+          <a:lstStyle/>
+          <a:p>
+            <a:pPr algn="ctr"/>
+            <a:r>
+              <a:rPr sz="1200" b="0">
+                <a:solidFill>
+                  <a:srgbClr val="444444"/>
+                </a:solidFill>
+                <a:latin typeface="Meiryo"/>
+              </a:rPr>
+              <a:t>丸型・ねじ</a:t>
+            </a:r>
+          </a:p>
+        </p:txBody>
+      </p:sp>
+    </p:spTree>
+  </p:cSld>
+  <p:clrMapOvr>
+    <a:masterClrMapping/>
+  </p:clrMapOvr>
+</p:sld>
+</file>
+
+<file path=ppt/slides/slide19.xml><?xml version="1.0" encoding="utf-8"?>
+<p:sld xmlns:a="http://schemas.openxmlformats.org/drawingml/2006/main" xmlns:p="http://schemas.openxmlformats.org/presentationml/2006/main" xmlns:r="http://schemas.openxmlformats.org/officeDocument/2006/relationships">
+  <p:cSld>
+    <p:bg>
+      <p:bgPr>
+        <a:solidFill>
+          <a:srgbClr val="FFFFFF"/>
+        </a:solidFill>
+        <a:effectLst/>
+      </p:bgPr>
+    </p:bg>
+    <p:spTree>
+      <p:nvGrpSpPr>
+        <p:cNvPr id="1" name=""/>
+        <p:cNvGrpSpPr/>
+        <p:nvPr/>
+      </p:nvGrpSpPr>
+      <p:grpSpPr/>
+      <p:sp>
+        <p:nvSpPr>
+          <p:cNvPr id="2" name="Rectangle 1"/>
+          <p:cNvSpPr/>
+          <p:nvPr/>
+        </p:nvSpPr>
+        <p:spPr>
+          <a:xfrm>
+            <a:off x="0" y="0"/>
+            <a:ext cx="12191695" cy="960120"/>
+          </a:xfrm>
+          <a:prstGeom prst="rect">
+            <a:avLst/>
+          </a:prstGeom>
+          <a:solidFill>
+            <a:srgbClr val="1F3A5F"/>
+          </a:solidFill>
+          <a:ln>
+            <a:noFill/>
+          </a:ln>
+        </p:spPr>
+        <p:style>
+          <a:lnRef idx="1">
+            <a:schemeClr val="accent1"/>
+          </a:lnRef>
+          <a:fillRef idx="3">
+            <a:schemeClr val="accent1"/>
+          </a:fillRef>
+          <a:effectRef idx="2">
+            <a:schemeClr val="accent1"/>
+          </a:effectRef>
+          <a:fontRef idx="minor">
+            <a:schemeClr val="lt1"/>
+          </a:fontRef>
+        </p:style>
+        <p:txBody>
+          <a:bodyPr rtlCol="0" anchor="ctr" wrap="square" lIns="457200"/>
+          <a:lstStyle/>
+          <a:p>
+            <a:pPr algn="ctr"/>
+            <a:r>
+              <a:rPr sz="2600" b="1">
+                <a:solidFill>
+                  <a:srgbClr val="FFFFFF"/>
+                </a:solidFill>
+                <a:latin typeface="Meiryo"/>
+              </a:rPr>
               <a:t>まとめ</a:t>
             </a:r>
           </a:p>
@@ -6165,7 +8929,7 @@
         </p:nvSpPr>
         <p:spPr>
           <a:xfrm>
-            <a:off x="640080" y="1371600"/>
+            <a:off x="640080" y="1234440"/>
             <a:ext cx="10972800" cy="5120640"/>
           </a:xfrm>
           <a:prstGeom prst="rect">
@@ -6185,7 +8949,7 @@
               </a:spcAft>
             </a:pPr>
             <a:r>
-              <a:rPr sz="2000" b="0">
+              <a:rPr sz="1800" b="0">
                 <a:solidFill>
                   <a:srgbClr val="444444"/>
                 </a:solidFill>
@@ -6201,17 +8965,145 @@
               </a:spcAft>
             </a:pPr>
             <a:r>
+              <a:rPr sz="1600" b="0">
+                <a:solidFill>
+                  <a:srgbClr val="444444"/>
+                </a:solidFill>
+                <a:latin typeface="Meiryo"/>
+              </a:rPr>
+              <a:t>  – 光ファイバーとは／なぜ光を使うのか</a:t>
+            </a:r>
+          </a:p>
+          <a:p>
+            <a:pPr lvl="1">
+              <a:spcAft>
+                <a:spcPts val="600"/>
+              </a:spcAft>
+            </a:pPr>
+            <a:r>
+              <a:rPr sz="1600" b="0">
+                <a:solidFill>
+                  <a:srgbClr val="444444"/>
+                </a:solidFill>
+                <a:latin typeface="Meiryo"/>
+              </a:rPr>
+              <a:t>  – 全反射のしくみ／3層構造</a:t>
+            </a:r>
+          </a:p>
+          <a:p>
+            <a:pPr lvl="1">
+              <a:spcAft>
+                <a:spcPts val="600"/>
+              </a:spcAft>
+            </a:pPr>
+            <a:r>
+              <a:rPr sz="1600" b="0">
+                <a:solidFill>
+                  <a:srgbClr val="444444"/>
+                </a:solidFill>
+                <a:latin typeface="Meiryo"/>
+              </a:rPr>
+              <a:t>  – シングルモードとマルチモード</a:t>
+            </a:r>
+          </a:p>
+          <a:p>
+            <a:pPr lvl="1">
+              <a:spcAft>
+                <a:spcPts val="600"/>
+              </a:spcAft>
+            </a:pPr>
+            <a:r>
+              <a:rPr sz="1600" b="0">
+                <a:solidFill>
+                  <a:srgbClr val="444444"/>
+                </a:solidFill>
+                <a:latin typeface="Meiryo"/>
+              </a:rPr>
+              <a:t>  – データの流れ・メリデメ・身近な用途</a:t>
+            </a:r>
+          </a:p>
+          <a:p>
+            <a:pPr>
+              <a:spcAft>
+                <a:spcPts val="600"/>
+              </a:spcAft>
+            </a:pPr>
+            <a:r>
               <a:rPr sz="1800" b="0">
                 <a:solidFill>
                   <a:srgbClr val="444444"/>
                 </a:solidFill>
                 <a:latin typeface="Meiryo"/>
               </a:rPr>
-              <a:t>  – 光ファイバーとは／なぜ光を使うのか</a:t>
+              <a:t>• 第2部　ケーブル・コードと接続部材</a:t>
             </a:r>
           </a:p>
           <a:p>
             <a:pPr lvl="1">
+              <a:spcAft>
+                <a:spcPts val="600"/>
+              </a:spcAft>
+            </a:pPr>
+            <a:r>
+              <a:rPr sz="1600" b="0">
+                <a:solidFill>
+                  <a:srgbClr val="444444"/>
+                </a:solidFill>
+                <a:latin typeface="Meiryo"/>
+              </a:rPr>
+              <a:t>  – テープスロット型 vs 層より型ケーブル</a:t>
+            </a:r>
+          </a:p>
+          <a:p>
+            <a:pPr lvl="1">
+              <a:spcAft>
+                <a:spcPts val="600"/>
+              </a:spcAft>
+            </a:pPr>
+            <a:r>
+              <a:rPr sz="1600" b="0">
+                <a:solidFill>
+                  <a:srgbClr val="444444"/>
+                </a:solidFill>
+                <a:latin typeface="Meiryo"/>
+              </a:rPr>
+              <a:t>  – 単心／メガネ／FOコードの違い</a:t>
+            </a:r>
+          </a:p>
+          <a:p>
+            <a:pPr lvl="1">
+              <a:spcAft>
+                <a:spcPts val="600"/>
+              </a:spcAft>
+            </a:pPr>
+            <a:r>
+              <a:rPr sz="1600" b="0">
+                <a:solidFill>
+                  <a:srgbClr val="444444"/>
+                </a:solidFill>
+                <a:latin typeface="Meiryo"/>
+              </a:rPr>
+              <a:t>  – ケーブルとコードの違い（図解あり）</a:t>
+            </a:r>
+          </a:p>
+          <a:p>
+            <a:pPr lvl="1">
+              <a:spcAft>
+                <a:spcPts val="600"/>
+              </a:spcAft>
+            </a:pPr>
+            <a:r>
+              <a:rPr sz="1600" b="0">
+                <a:solidFill>
+                  <a:srgbClr val="444444"/>
+                </a:solidFill>
+                <a:latin typeface="Meiryo"/>
+              </a:rPr>
+              <a:t>  – 成端箱とクロージャ／コネクタと規格（図解あり）</a:t>
+            </a:r>
+          </a:p>
+          <a:p>
+            <a:pPr>
               <a:spcAft>
                 <a:spcPts val="600"/>
               </a:spcAft>
@@ -6223,123 +9115,1306 @@
                 </a:solidFill>
                 <a:latin typeface="Meiryo"/>
               </a:rPr>
-              <a:t>  – 全反射のしくみ／3層構造</a:t>
-            </a:r>
-          </a:p>
-          <a:p>
-            <a:pPr lvl="1">
-              <a:spcAft>
-                <a:spcPts val="600"/>
-              </a:spcAft>
-            </a:pPr>
-            <a:r>
-              <a:rPr sz="1800" b="0">
+              <a:t>• 付録：用語集</a:t>
+            </a:r>
+          </a:p>
+        </p:txBody>
+      </p:sp>
+    </p:spTree>
+  </p:cSld>
+  <p:clrMapOvr>
+    <a:masterClrMapping/>
+  </p:clrMapOvr>
+</p:sld>
+</file>
+
+<file path=ppt/slides/slide20.xml><?xml version="1.0" encoding="utf-8"?>
+<p:sld xmlns:a="http://schemas.openxmlformats.org/drawingml/2006/main" xmlns:p="http://schemas.openxmlformats.org/presentationml/2006/main" xmlns:r="http://schemas.openxmlformats.org/officeDocument/2006/relationships">
+  <p:cSld>
+    <p:bg>
+      <p:bgPr>
+        <a:solidFill>
+          <a:srgbClr val="2E6DB4"/>
+        </a:solidFill>
+        <a:effectLst/>
+      </p:bgPr>
+    </p:bg>
+    <p:spTree>
+      <p:nvGrpSpPr>
+        <p:cNvPr id="1" name=""/>
+        <p:cNvGrpSpPr/>
+        <p:nvPr/>
+      </p:nvGrpSpPr>
+      <p:grpSpPr/>
+      <p:sp>
+        <p:nvSpPr>
+          <p:cNvPr id="2" name="TextBox 1"/>
+          <p:cNvSpPr txBox="1"/>
+          <p:nvPr/>
+        </p:nvSpPr>
+        <p:spPr>
+          <a:xfrm>
+            <a:off x="822960" y="2651760"/>
+            <a:ext cx="10515600" cy="1645920"/>
+          </a:xfrm>
+          <a:prstGeom prst="rect">
+            <a:avLst/>
+          </a:prstGeom>
+          <a:noFill/>
+        </p:spPr>
+        <p:txBody>
+          <a:bodyPr wrap="square">
+            <a:spAutoFit/>
+          </a:bodyPr>
+          <a:lstStyle/>
+          <a:p>
+            <a:r>
+              <a:rPr sz="2400" b="1">
                 <a:solidFill>
-                  <a:srgbClr val="444444"/>
+                  <a:srgbClr val="CFE0F2"/>
                 </a:solidFill>
                 <a:latin typeface="Meiryo"/>
               </a:rPr>
-              <a:t>  – シングルモードとマルチモード</a:t>
-            </a:r>
-          </a:p>
-          <a:p>
-            <a:pPr lvl="1">
-              <a:spcAft>
-                <a:spcPts val="600"/>
-              </a:spcAft>
-            </a:pPr>
-            <a:r>
-              <a:rPr sz="1800" b="0">
+              <a:t>付録</a:t>
+            </a:r>
+          </a:p>
+          <a:p>
+            <a:r>
+              <a:rPr sz="4000" b="1">
                 <a:solidFill>
-                  <a:srgbClr val="444444"/>
+                  <a:srgbClr val="FFFFFF"/>
                 </a:solidFill>
                 <a:latin typeface="Meiryo"/>
               </a:rPr>
-              <a:t>  – データの流れ・メリデメ・身近な用途</a:t>
-            </a:r>
-          </a:p>
-          <a:p>
-            <a:pPr>
-              <a:spcAft>
-                <a:spcPts val="600"/>
-              </a:spcAft>
-            </a:pPr>
-            <a:r>
-              <a:rPr sz="2000" b="0">
+              <a:t>用語集</a:t>
+            </a:r>
+          </a:p>
+        </p:txBody>
+      </p:sp>
+    </p:spTree>
+  </p:cSld>
+  <p:clrMapOvr>
+    <a:masterClrMapping/>
+  </p:clrMapOvr>
+</p:sld>
+</file>
+
+<file path=ppt/slides/slide21.xml><?xml version="1.0" encoding="utf-8"?>
+<p:sld xmlns:a="http://schemas.openxmlformats.org/drawingml/2006/main" xmlns:p="http://schemas.openxmlformats.org/presentationml/2006/main" xmlns:r="http://schemas.openxmlformats.org/officeDocument/2006/relationships">
+  <p:cSld>
+    <p:bg>
+      <p:bgPr>
+        <a:solidFill>
+          <a:srgbClr val="FFFFFF"/>
+        </a:solidFill>
+        <a:effectLst/>
+      </p:bgPr>
+    </p:bg>
+    <p:spTree>
+      <p:nvGrpSpPr>
+        <p:cNvPr id="1" name=""/>
+        <p:cNvGrpSpPr/>
+        <p:nvPr/>
+      </p:nvGrpSpPr>
+      <p:grpSpPr/>
+      <p:sp>
+        <p:nvSpPr>
+          <p:cNvPr id="2" name="Rectangle 1"/>
+          <p:cNvSpPr/>
+          <p:nvPr/>
+        </p:nvSpPr>
+        <p:spPr>
+          <a:xfrm>
+            <a:off x="0" y="0"/>
+            <a:ext cx="12191695" cy="960120"/>
+          </a:xfrm>
+          <a:prstGeom prst="rect">
+            <a:avLst/>
+          </a:prstGeom>
+          <a:solidFill>
+            <a:srgbClr val="1F3A5F"/>
+          </a:solidFill>
+          <a:ln>
+            <a:noFill/>
+          </a:ln>
+        </p:spPr>
+        <p:style>
+          <a:lnRef idx="1">
+            <a:schemeClr val="accent1"/>
+          </a:lnRef>
+          <a:fillRef idx="3">
+            <a:schemeClr val="accent1"/>
+          </a:fillRef>
+          <a:effectRef idx="2">
+            <a:schemeClr val="accent1"/>
+          </a:effectRef>
+          <a:fontRef idx="minor">
+            <a:schemeClr val="lt1"/>
+          </a:fontRef>
+        </p:style>
+        <p:txBody>
+          <a:bodyPr rtlCol="0" anchor="ctr" wrap="square" lIns="457200"/>
+          <a:lstStyle/>
+          <a:p>
+            <a:pPr algn="ctr"/>
+            <a:r>
+              <a:rPr sz="2600" b="1">
                 <a:solidFill>
-                  <a:srgbClr val="444444"/>
+                  <a:srgbClr val="FFFFFF"/>
                 </a:solidFill>
                 <a:latin typeface="Meiryo"/>
               </a:rPr>
-              <a:t>• 第2部　ケーブル・コードと接続部材</a:t>
-            </a:r>
-          </a:p>
-          <a:p>
-            <a:pPr lvl="1">
-              <a:spcAft>
-                <a:spcPts val="600"/>
-              </a:spcAft>
-            </a:pPr>
-            <a:r>
-              <a:rPr sz="1800" b="0">
+              <a:t>用語集 ①（基礎のことば）</a:t>
+            </a:r>
+          </a:p>
+        </p:txBody>
+      </p:sp>
+      <p:graphicFrame>
+        <p:nvGraphicFramePr>
+          <p:cNvPr id="3" name="Table 2"/>
+          <p:cNvGraphicFramePr>
+            <a:graphicFrameLocks noGrp="1"/>
+          </p:cNvGraphicFramePr>
+          <p:nvPr/>
+        </p:nvGraphicFramePr>
+        <p:xfrm>
+          <a:off x="548640" y="1234440"/>
+          <a:ext cx="11064239" cy="5120640"/>
+        </p:xfrm>
+        <a:graphic>
+          <a:graphicData uri="http://schemas.openxmlformats.org/drawingml/2006/table">
+            <a:tbl>
+              <a:tblPr firstRow="1" bandRow="1">
+                <a:tableStyleId>{5C22544A-7EE6-4342-B048-85BDC9FD1C3A}</a:tableStyleId>
+              </a:tblPr>
+              <a:tblGrid>
+                <a:gridCol w="3108960"/>
+                <a:gridCol w="7955279"/>
+              </a:tblGrid>
+              <a:tr h="465512">
+                <a:tc>
+                  <a:txBody>
+                    <a:bodyPr wrap="square"/>
+                    <a:lstStyle/>
+                    <a:p>
+                      <a:pPr algn="ctr"/>
+                      <a:r>
+                        <a:rPr sz="1400" b="1">
+                          <a:solidFill>
+                            <a:srgbClr val="FFFFFF"/>
+                          </a:solidFill>
+                          <a:latin typeface="Meiryo"/>
+                        </a:rPr>
+                        <a:t>用語</a:t>
+                      </a:r>
+                    </a:p>
+                  </a:txBody>
+                  <a:tcPr>
+                    <a:solidFill>
+                      <a:srgbClr val="1F3A5F"/>
+                    </a:solidFill>
+                  </a:tcPr>
+                </a:tc>
+                <a:tc>
+                  <a:txBody>
+                    <a:bodyPr wrap="square"/>
+                    <a:lstStyle/>
+                    <a:p>
+                      <a:pPr algn="ctr"/>
+                      <a:r>
+                        <a:rPr sz="1400" b="1">
+                          <a:solidFill>
+                            <a:srgbClr val="FFFFFF"/>
+                          </a:solidFill>
+                          <a:latin typeface="Meiryo"/>
+                        </a:rPr>
+                        <a:t>意味</a:t>
+                      </a:r>
+                    </a:p>
+                  </a:txBody>
+                  <a:tcPr>
+                    <a:solidFill>
+                      <a:srgbClr val="1F3A5F"/>
+                    </a:solidFill>
+                  </a:tcPr>
+                </a:tc>
+              </a:tr>
+              <a:tr h="465512">
+                <a:tc>
+                  <a:txBody>
+                    <a:bodyPr wrap="square"/>
+                    <a:lstStyle/>
+                    <a:p>
+                      <a:r>
+                        <a:rPr sz="1400" b="1">
+                          <a:solidFill>
+                            <a:srgbClr val="1F3A5F"/>
+                          </a:solidFill>
+                          <a:latin typeface="Meiryo"/>
+                        </a:rPr>
+                        <a:t>コア</a:t>
+                      </a:r>
+                    </a:p>
+                  </a:txBody>
+                  <a:tcPr>
+                    <a:solidFill>
+                      <a:srgbClr val="EDF3FA"/>
+                    </a:solidFill>
+                  </a:tcPr>
+                </a:tc>
+                <a:tc>
+                  <a:txBody>
+                    <a:bodyPr wrap="square"/>
+                    <a:lstStyle/>
+                    <a:p>
+                      <a:r>
+                        <a:rPr sz="1400" b="0">
+                          <a:solidFill>
+                            <a:srgbClr val="444444"/>
+                          </a:solidFill>
+                          <a:latin typeface="Meiryo"/>
+                        </a:rPr>
+                        <a:t>光が通る中心の芯（屈折率 高）</a:t>
+                      </a:r>
+                    </a:p>
+                  </a:txBody>
+                  <a:tcPr>
+                    <a:solidFill>
+                      <a:srgbClr val="EDF3FA"/>
+                    </a:solidFill>
+                  </a:tcPr>
+                </a:tc>
+              </a:tr>
+              <a:tr h="465512">
+                <a:tc>
+                  <a:txBody>
+                    <a:bodyPr wrap="square"/>
+                    <a:lstStyle/>
+                    <a:p>
+                      <a:r>
+                        <a:rPr sz="1400" b="1">
+                          <a:solidFill>
+                            <a:srgbClr val="1F3A5F"/>
+                          </a:solidFill>
+                          <a:latin typeface="Meiryo"/>
+                        </a:rPr>
+                        <a:t>クラッド</a:t>
+                      </a:r>
+                    </a:p>
+                  </a:txBody>
+                  <a:tcPr>
+                    <a:solidFill>
+                      <a:srgbClr val="FFFFFF"/>
+                    </a:solidFill>
+                  </a:tcPr>
+                </a:tc>
+                <a:tc>
+                  <a:txBody>
+                    <a:bodyPr wrap="square"/>
+                    <a:lstStyle/>
+                    <a:p>
+                      <a:r>
+                        <a:rPr sz="1400" b="0">
+                          <a:solidFill>
+                            <a:srgbClr val="444444"/>
+                          </a:solidFill>
+                          <a:latin typeface="Meiryo"/>
+                        </a:rPr>
+                        <a:t>光をはね返す外側の層（屈折率 低）</a:t>
+                      </a:r>
+                    </a:p>
+                  </a:txBody>
+                  <a:tcPr>
+                    <a:solidFill>
+                      <a:srgbClr val="FFFFFF"/>
+                    </a:solidFill>
+                  </a:tcPr>
+                </a:tc>
+              </a:tr>
+              <a:tr h="465512">
+                <a:tc>
+                  <a:txBody>
+                    <a:bodyPr wrap="square"/>
+                    <a:lstStyle/>
+                    <a:p>
+                      <a:r>
+                        <a:rPr sz="1400" b="1">
+                          <a:solidFill>
+                            <a:srgbClr val="1F3A5F"/>
+                          </a:solidFill>
+                          <a:latin typeface="Meiryo"/>
+                        </a:rPr>
+                        <a:t>被覆／ジャケット</a:t>
+                      </a:r>
+                    </a:p>
+                  </a:txBody>
+                  <a:tcPr>
+                    <a:solidFill>
+                      <a:srgbClr val="EDF3FA"/>
+                    </a:solidFill>
+                  </a:tcPr>
+                </a:tc>
+                <a:tc>
+                  <a:txBody>
+                    <a:bodyPr wrap="square"/>
+                    <a:lstStyle/>
+                    <a:p>
+                      <a:r>
+                        <a:rPr sz="1400" b="0">
+                          <a:solidFill>
+                            <a:srgbClr val="444444"/>
+                          </a:solidFill>
+                          <a:latin typeface="Meiryo"/>
+                        </a:rPr>
+                        <a:t>傷・水・曲げから守る外装</a:t>
+                      </a:r>
+                    </a:p>
+                  </a:txBody>
+                  <a:tcPr>
+                    <a:solidFill>
+                      <a:srgbClr val="EDF3FA"/>
+                    </a:solidFill>
+                  </a:tcPr>
+                </a:tc>
+              </a:tr>
+              <a:tr h="465512">
+                <a:tc>
+                  <a:txBody>
+                    <a:bodyPr wrap="square"/>
+                    <a:lstStyle/>
+                    <a:p>
+                      <a:r>
+                        <a:rPr sz="1400" b="1">
+                          <a:solidFill>
+                            <a:srgbClr val="1F3A5F"/>
+                          </a:solidFill>
+                          <a:latin typeface="Meiryo"/>
+                        </a:rPr>
+                        <a:t>全反射</a:t>
+                      </a:r>
+                    </a:p>
+                  </a:txBody>
+                  <a:tcPr>
+                    <a:solidFill>
+                      <a:srgbClr val="FFFFFF"/>
+                    </a:solidFill>
+                  </a:tcPr>
+                </a:tc>
+                <a:tc>
+                  <a:txBody>
+                    <a:bodyPr wrap="square"/>
+                    <a:lstStyle/>
+                    <a:p>
+                      <a:r>
+                        <a:rPr sz="1400" b="0">
+                          <a:solidFill>
+                            <a:srgbClr val="444444"/>
+                          </a:solidFill>
+                          <a:latin typeface="Meiryo"/>
+                        </a:rPr>
+                        <a:t>光が境界で100%はね返る現象。伝送の基本原理</a:t>
+                      </a:r>
+                    </a:p>
+                  </a:txBody>
+                  <a:tcPr>
+                    <a:solidFill>
+                      <a:srgbClr val="FFFFFF"/>
+                    </a:solidFill>
+                  </a:tcPr>
+                </a:tc>
+              </a:tr>
+              <a:tr h="465512">
+                <a:tc>
+                  <a:txBody>
+                    <a:bodyPr wrap="square"/>
+                    <a:lstStyle/>
+                    <a:p>
+                      <a:r>
+                        <a:rPr sz="1400" b="1">
+                          <a:solidFill>
+                            <a:srgbClr val="1F3A5F"/>
+                          </a:solidFill>
+                          <a:latin typeface="Meiryo"/>
+                        </a:rPr>
+                        <a:t>屈折率</a:t>
+                      </a:r>
+                    </a:p>
+                  </a:txBody>
+                  <a:tcPr>
+                    <a:solidFill>
+                      <a:srgbClr val="EDF3FA"/>
+                    </a:solidFill>
+                  </a:tcPr>
+                </a:tc>
+                <a:tc>
+                  <a:txBody>
+                    <a:bodyPr wrap="square"/>
+                    <a:lstStyle/>
+                    <a:p>
+                      <a:r>
+                        <a:rPr sz="1400" b="0">
+                          <a:solidFill>
+                            <a:srgbClr val="444444"/>
+                          </a:solidFill>
+                          <a:latin typeface="Meiryo"/>
+                        </a:rPr>
+                        <a:t>光の曲がりやすさ。コア＞クラッド</a:t>
+                      </a:r>
+                    </a:p>
+                  </a:txBody>
+                  <a:tcPr>
+                    <a:solidFill>
+                      <a:srgbClr val="EDF3FA"/>
+                    </a:solidFill>
+                  </a:tcPr>
+                </a:tc>
+              </a:tr>
+              <a:tr h="465512">
+                <a:tc>
+                  <a:txBody>
+                    <a:bodyPr wrap="square"/>
+                    <a:lstStyle/>
+                    <a:p>
+                      <a:r>
+                        <a:rPr sz="1400" b="1">
+                          <a:solidFill>
+                            <a:srgbClr val="1F3A5F"/>
+                          </a:solidFill>
+                          <a:latin typeface="Meiryo"/>
+                        </a:rPr>
+                        <a:t>シングルモード(SMF)</a:t>
+                      </a:r>
+                    </a:p>
+                  </a:txBody>
+                  <a:tcPr>
+                    <a:solidFill>
+                      <a:srgbClr val="FFFFFF"/>
+                    </a:solidFill>
+                  </a:tcPr>
+                </a:tc>
+                <a:tc>
+                  <a:txBody>
+                    <a:bodyPr wrap="square"/>
+                    <a:lstStyle/>
+                    <a:p>
+                      <a:r>
+                        <a:rPr sz="1400" b="0">
+                          <a:solidFill>
+                            <a:srgbClr val="444444"/>
+                          </a:solidFill>
+                          <a:latin typeface="Meiryo"/>
+                        </a:rPr>
+                        <a:t>細い芯。長距離・大容量向き</a:t>
+                      </a:r>
+                    </a:p>
+                  </a:txBody>
+                  <a:tcPr>
+                    <a:solidFill>
+                      <a:srgbClr val="FFFFFF"/>
+                    </a:solidFill>
+                  </a:tcPr>
+                </a:tc>
+              </a:tr>
+              <a:tr h="465512">
+                <a:tc>
+                  <a:txBody>
+                    <a:bodyPr wrap="square"/>
+                    <a:lstStyle/>
+                    <a:p>
+                      <a:r>
+                        <a:rPr sz="1400" b="1">
+                          <a:solidFill>
+                            <a:srgbClr val="1F3A5F"/>
+                          </a:solidFill>
+                          <a:latin typeface="Meiryo"/>
+                        </a:rPr>
+                        <a:t>マルチモード(MMF)</a:t>
+                      </a:r>
+                    </a:p>
+                  </a:txBody>
+                  <a:tcPr>
+                    <a:solidFill>
+                      <a:srgbClr val="EDF3FA"/>
+                    </a:solidFill>
+                  </a:tcPr>
+                </a:tc>
+                <a:tc>
+                  <a:txBody>
+                    <a:bodyPr wrap="square"/>
+                    <a:lstStyle/>
+                    <a:p>
+                      <a:r>
+                        <a:rPr sz="1400" b="0">
+                          <a:solidFill>
+                            <a:srgbClr val="444444"/>
+                          </a:solidFill>
+                          <a:latin typeface="Meiryo"/>
+                        </a:rPr>
+                        <a:t>太い芯。短距離・低コスト向き</a:t>
+                      </a:r>
+                    </a:p>
+                  </a:txBody>
+                  <a:tcPr>
+                    <a:solidFill>
+                      <a:srgbClr val="EDF3FA"/>
+                    </a:solidFill>
+                  </a:tcPr>
+                </a:tc>
+              </a:tr>
+              <a:tr h="465512">
+                <a:tc>
+                  <a:txBody>
+                    <a:bodyPr wrap="square"/>
+                    <a:lstStyle/>
+                    <a:p>
+                      <a:r>
+                        <a:rPr sz="1400" b="1">
+                          <a:solidFill>
+                            <a:srgbClr val="1F3A5F"/>
+                          </a:solidFill>
+                          <a:latin typeface="Meiryo"/>
+                        </a:rPr>
+                        <a:t>減衰</a:t>
+                      </a:r>
+                    </a:p>
+                  </a:txBody>
+                  <a:tcPr>
+                    <a:solidFill>
+                      <a:srgbClr val="FFFFFF"/>
+                    </a:solidFill>
+                  </a:tcPr>
+                </a:tc>
+                <a:tc>
+                  <a:txBody>
+                    <a:bodyPr wrap="square"/>
+                    <a:lstStyle/>
+                    <a:p>
+                      <a:r>
+                        <a:rPr sz="1400" b="0">
+                          <a:solidFill>
+                            <a:srgbClr val="444444"/>
+                          </a:solidFill>
+                          <a:latin typeface="Meiryo"/>
+                        </a:rPr>
+                        <a:t>信号が進むうちに弱まること</a:t>
+                      </a:r>
+                    </a:p>
+                  </a:txBody>
+                  <a:tcPr>
+                    <a:solidFill>
+                      <a:srgbClr val="FFFFFF"/>
+                    </a:solidFill>
+                  </a:tcPr>
+                </a:tc>
+              </a:tr>
+              <a:tr h="465512">
+                <a:tc>
+                  <a:txBody>
+                    <a:bodyPr wrap="square"/>
+                    <a:lstStyle/>
+                    <a:p>
+                      <a:r>
+                        <a:rPr sz="1400" b="1">
+                          <a:solidFill>
+                            <a:srgbClr val="1F3A5F"/>
+                          </a:solidFill>
+                          <a:latin typeface="Meiryo"/>
+                        </a:rPr>
+                        <a:t>波長</a:t>
+                      </a:r>
+                    </a:p>
+                  </a:txBody>
+                  <a:tcPr>
+                    <a:solidFill>
+                      <a:srgbClr val="EDF3FA"/>
+                    </a:solidFill>
+                  </a:tcPr>
+                </a:tc>
+                <a:tc>
+                  <a:txBody>
+                    <a:bodyPr wrap="square"/>
+                    <a:lstStyle/>
+                    <a:p>
+                      <a:r>
+                        <a:rPr sz="1400" b="0">
+                          <a:solidFill>
+                            <a:srgbClr val="444444"/>
+                          </a:solidFill>
+                          <a:latin typeface="Meiryo"/>
+                        </a:rPr>
+                        <a:t>光の「色」にあたる性質（nmで表す）</a:t>
+                      </a:r>
+                    </a:p>
+                  </a:txBody>
+                  <a:tcPr>
+                    <a:solidFill>
+                      <a:srgbClr val="EDF3FA"/>
+                    </a:solidFill>
+                  </a:tcPr>
+                </a:tc>
+              </a:tr>
+              <a:tr h="465520">
+                <a:tc>
+                  <a:txBody>
+                    <a:bodyPr wrap="square"/>
+                    <a:lstStyle/>
+                    <a:p>
+                      <a:r>
+                        <a:rPr sz="1400" b="1">
+                          <a:solidFill>
+                            <a:srgbClr val="1F3A5F"/>
+                          </a:solidFill>
+                          <a:latin typeface="Meiryo"/>
+                        </a:rPr>
+                        <a:t>WDM</a:t>
+                      </a:r>
+                    </a:p>
+                  </a:txBody>
+                  <a:tcPr>
+                    <a:solidFill>
+                      <a:srgbClr val="FFFFFF"/>
+                    </a:solidFill>
+                  </a:tcPr>
+                </a:tc>
+                <a:tc>
+                  <a:txBody>
+                    <a:bodyPr wrap="square"/>
+                    <a:lstStyle/>
+                    <a:p>
+                      <a:r>
+                        <a:rPr sz="1400" b="0">
+                          <a:solidFill>
+                            <a:srgbClr val="444444"/>
+                          </a:solidFill>
+                          <a:latin typeface="Meiryo"/>
+                        </a:rPr>
+                        <a:t>複数波長を1本に多重して容量を増やす技術</a:t>
+                      </a:r>
+                    </a:p>
+                  </a:txBody>
+                  <a:tcPr>
+                    <a:solidFill>
+                      <a:srgbClr val="FFFFFF"/>
+                    </a:solidFill>
+                  </a:tcPr>
+                </a:tc>
+              </a:tr>
+            </a:tbl>
+          </a:graphicData>
+        </a:graphic>
+      </p:graphicFrame>
+    </p:spTree>
+  </p:cSld>
+  <p:clrMapOvr>
+    <a:masterClrMapping/>
+  </p:clrMapOvr>
+</p:sld>
+</file>
+
+<file path=ppt/slides/slide22.xml><?xml version="1.0" encoding="utf-8"?>
+<p:sld xmlns:a="http://schemas.openxmlformats.org/drawingml/2006/main" xmlns:p="http://schemas.openxmlformats.org/presentationml/2006/main" xmlns:r="http://schemas.openxmlformats.org/officeDocument/2006/relationships">
+  <p:cSld>
+    <p:bg>
+      <p:bgPr>
+        <a:solidFill>
+          <a:srgbClr val="FFFFFF"/>
+        </a:solidFill>
+        <a:effectLst/>
+      </p:bgPr>
+    </p:bg>
+    <p:spTree>
+      <p:nvGrpSpPr>
+        <p:cNvPr id="1" name=""/>
+        <p:cNvGrpSpPr/>
+        <p:nvPr/>
+      </p:nvGrpSpPr>
+      <p:grpSpPr/>
+      <p:sp>
+        <p:nvSpPr>
+          <p:cNvPr id="2" name="Rectangle 1"/>
+          <p:cNvSpPr/>
+          <p:nvPr/>
+        </p:nvSpPr>
+        <p:spPr>
+          <a:xfrm>
+            <a:off x="0" y="0"/>
+            <a:ext cx="12191695" cy="960120"/>
+          </a:xfrm>
+          <a:prstGeom prst="rect">
+            <a:avLst/>
+          </a:prstGeom>
+          <a:solidFill>
+            <a:srgbClr val="1F3A5F"/>
+          </a:solidFill>
+          <a:ln>
+            <a:noFill/>
+          </a:ln>
+        </p:spPr>
+        <p:style>
+          <a:lnRef idx="1">
+            <a:schemeClr val="accent1"/>
+          </a:lnRef>
+          <a:fillRef idx="3">
+            <a:schemeClr val="accent1"/>
+          </a:fillRef>
+          <a:effectRef idx="2">
+            <a:schemeClr val="accent1"/>
+          </a:effectRef>
+          <a:fontRef idx="minor">
+            <a:schemeClr val="lt1"/>
+          </a:fontRef>
+        </p:style>
+        <p:txBody>
+          <a:bodyPr rtlCol="0" anchor="ctr" wrap="square" lIns="457200"/>
+          <a:lstStyle/>
+          <a:p>
+            <a:pPr algn="ctr"/>
+            <a:r>
+              <a:rPr sz="2600" b="1">
                 <a:solidFill>
-                  <a:srgbClr val="444444"/>
+                  <a:srgbClr val="FFFFFF"/>
                 </a:solidFill>
                 <a:latin typeface="Meiryo"/>
               </a:rPr>
-              <a:t>  – テープスロット型 vs 層より型ケーブル</a:t>
-            </a:r>
-          </a:p>
-          <a:p>
-            <a:pPr lvl="1">
-              <a:spcAft>
-                <a:spcPts val="600"/>
-              </a:spcAft>
-            </a:pPr>
-            <a:r>
-              <a:rPr sz="1800" b="0">
-                <a:solidFill>
-                  <a:srgbClr val="444444"/>
-                </a:solidFill>
-                <a:latin typeface="Meiryo"/>
-              </a:rPr>
-              <a:t>  – 単心／メガネ／FOコードの違い</a:t>
-            </a:r>
-          </a:p>
-          <a:p>
-            <a:pPr lvl="1">
-              <a:spcAft>
-                <a:spcPts val="600"/>
-              </a:spcAft>
-            </a:pPr>
-            <a:r>
-              <a:rPr sz="1800" b="0">
-                <a:solidFill>
-                  <a:srgbClr val="444444"/>
-                </a:solidFill>
-                <a:latin typeface="Meiryo"/>
-              </a:rPr>
-              <a:t>  – ケーブルとコードの違い</a:t>
-            </a:r>
-          </a:p>
-          <a:p>
-            <a:pPr lvl="1">
-              <a:spcAft>
-                <a:spcPts val="600"/>
-              </a:spcAft>
-            </a:pPr>
-            <a:r>
-              <a:rPr sz="1800" b="0">
-                <a:solidFill>
-                  <a:srgbClr val="444444"/>
-                </a:solidFill>
-                <a:latin typeface="Meiryo"/>
-              </a:rPr>
-              <a:t>  – 成端箱とクロージャの違い</a:t>
-            </a:r>
-          </a:p>
-        </p:txBody>
-      </p:sp>
+              <a:t>用語集 ②（機器・配線のことば）</a:t>
+            </a:r>
+          </a:p>
+        </p:txBody>
+      </p:sp>
+      <p:graphicFrame>
+        <p:nvGraphicFramePr>
+          <p:cNvPr id="3" name="Table 2"/>
+          <p:cNvGraphicFramePr>
+            <a:graphicFrameLocks noGrp="1"/>
+          </p:cNvGraphicFramePr>
+          <p:nvPr/>
+        </p:nvGraphicFramePr>
+        <p:xfrm>
+          <a:off x="548640" y="1234440"/>
+          <a:ext cx="11064239" cy="5120640"/>
+        </p:xfrm>
+        <a:graphic>
+          <a:graphicData uri="http://schemas.openxmlformats.org/drawingml/2006/table">
+            <a:tbl>
+              <a:tblPr firstRow="1" bandRow="1">
+                <a:tableStyleId>{5C22544A-7EE6-4342-B048-85BDC9FD1C3A}</a:tableStyleId>
+              </a:tblPr>
+              <a:tblGrid>
+                <a:gridCol w="3108960"/>
+                <a:gridCol w="7955279"/>
+              </a:tblGrid>
+              <a:tr h="465512">
+                <a:tc>
+                  <a:txBody>
+                    <a:bodyPr wrap="square"/>
+                    <a:lstStyle/>
+                    <a:p>
+                      <a:pPr algn="ctr"/>
+                      <a:r>
+                        <a:rPr sz="1400" b="1">
+                          <a:solidFill>
+                            <a:srgbClr val="FFFFFF"/>
+                          </a:solidFill>
+                          <a:latin typeface="Meiryo"/>
+                        </a:rPr>
+                        <a:t>用語</a:t>
+                      </a:r>
+                    </a:p>
+                  </a:txBody>
+                  <a:tcPr>
+                    <a:solidFill>
+                      <a:srgbClr val="1F3A5F"/>
+                    </a:solidFill>
+                  </a:tcPr>
+                </a:tc>
+                <a:tc>
+                  <a:txBody>
+                    <a:bodyPr wrap="square"/>
+                    <a:lstStyle/>
+                    <a:p>
+                      <a:pPr algn="ctr"/>
+                      <a:r>
+                        <a:rPr sz="1400" b="1">
+                          <a:solidFill>
+                            <a:srgbClr val="FFFFFF"/>
+                          </a:solidFill>
+                          <a:latin typeface="Meiryo"/>
+                        </a:rPr>
+                        <a:t>意味</a:t>
+                      </a:r>
+                    </a:p>
+                  </a:txBody>
+                  <a:tcPr>
+                    <a:solidFill>
+                      <a:srgbClr val="1F3A5F"/>
+                    </a:solidFill>
+                  </a:tcPr>
+                </a:tc>
+              </a:tr>
+              <a:tr h="465512">
+                <a:tc>
+                  <a:txBody>
+                    <a:bodyPr wrap="square"/>
+                    <a:lstStyle/>
+                    <a:p>
+                      <a:r>
+                        <a:rPr sz="1400" b="1">
+                          <a:solidFill>
+                            <a:srgbClr val="1F3A5F"/>
+                          </a:solidFill>
+                          <a:latin typeface="Meiryo"/>
+                        </a:rPr>
+                        <a:t>FTTH</a:t>
+                      </a:r>
+                    </a:p>
+                  </a:txBody>
+                  <a:tcPr>
+                    <a:solidFill>
+                      <a:srgbClr val="EDF3FA"/>
+                    </a:solidFill>
+                  </a:tcPr>
+                </a:tc>
+                <a:tc>
+                  <a:txBody>
+                    <a:bodyPr wrap="square"/>
+                    <a:lstStyle/>
+                    <a:p>
+                      <a:r>
+                        <a:rPr sz="1400" b="0">
+                          <a:solidFill>
+                            <a:srgbClr val="444444"/>
+                          </a:solidFill>
+                          <a:latin typeface="Meiryo"/>
+                        </a:rPr>
+                        <a:t>家庭まで光ファイバを引く方式</a:t>
+                      </a:r>
+                    </a:p>
+                  </a:txBody>
+                  <a:tcPr>
+                    <a:solidFill>
+                      <a:srgbClr val="EDF3FA"/>
+                    </a:solidFill>
+                  </a:tcPr>
+                </a:tc>
+              </a:tr>
+              <a:tr h="465512">
+                <a:tc>
+                  <a:txBody>
+                    <a:bodyPr wrap="square"/>
+                    <a:lstStyle/>
+                    <a:p>
+                      <a:r>
+                        <a:rPr sz="1400" b="1">
+                          <a:solidFill>
+                            <a:srgbClr val="1F3A5F"/>
+                          </a:solidFill>
+                          <a:latin typeface="Meiryo"/>
+                        </a:rPr>
+                        <a:t>ONU</a:t>
+                      </a:r>
+                    </a:p>
+                  </a:txBody>
+                  <a:tcPr>
+                    <a:solidFill>
+                      <a:srgbClr val="FFFFFF"/>
+                    </a:solidFill>
+                  </a:tcPr>
+                </a:tc>
+                <a:tc>
+                  <a:txBody>
+                    <a:bodyPr wrap="square"/>
+                    <a:lstStyle/>
+                    <a:p>
+                      <a:r>
+                        <a:rPr sz="1400" b="0">
+                          <a:solidFill>
+                            <a:srgbClr val="444444"/>
+                          </a:solidFill>
+                          <a:latin typeface="Meiryo"/>
+                        </a:rPr>
+                        <a:t>家庭で光⇄電気を変換する装置</a:t>
+                      </a:r>
+                    </a:p>
+                  </a:txBody>
+                  <a:tcPr>
+                    <a:solidFill>
+                      <a:srgbClr val="FFFFFF"/>
+                    </a:solidFill>
+                  </a:tcPr>
+                </a:tc>
+              </a:tr>
+              <a:tr h="465512">
+                <a:tc>
+                  <a:txBody>
+                    <a:bodyPr wrap="square"/>
+                    <a:lstStyle/>
+                    <a:p>
+                      <a:r>
+                        <a:rPr sz="1400" b="1">
+                          <a:solidFill>
+                            <a:srgbClr val="1F3A5F"/>
+                          </a:solidFill>
+                          <a:latin typeface="Meiryo"/>
+                        </a:rPr>
+                        <a:t>EDFA</a:t>
+                      </a:r>
+                    </a:p>
+                  </a:txBody>
+                  <a:tcPr>
+                    <a:solidFill>
+                      <a:srgbClr val="EDF3FA"/>
+                    </a:solidFill>
+                  </a:tcPr>
+                </a:tc>
+                <a:tc>
+                  <a:txBody>
+                    <a:bodyPr wrap="square"/>
+                    <a:lstStyle/>
+                    <a:p>
+                      <a:r>
+                        <a:rPr sz="1400" b="0">
+                          <a:solidFill>
+                            <a:srgbClr val="444444"/>
+                          </a:solidFill>
+                          <a:latin typeface="Meiryo"/>
+                        </a:rPr>
+                        <a:t>光を直接増幅する装置（光増幅器の一種）</a:t>
+                      </a:r>
+                    </a:p>
+                  </a:txBody>
+                  <a:tcPr>
+                    <a:solidFill>
+                      <a:srgbClr val="EDF3FA"/>
+                    </a:solidFill>
+                  </a:tcPr>
+                </a:tc>
+              </a:tr>
+              <a:tr h="465512">
+                <a:tc>
+                  <a:txBody>
+                    <a:bodyPr wrap="square"/>
+                    <a:lstStyle/>
+                    <a:p>
+                      <a:r>
+                        <a:rPr sz="1400" b="1">
+                          <a:solidFill>
+                            <a:srgbClr val="1F3A5F"/>
+                          </a:solidFill>
+                          <a:latin typeface="Meiryo"/>
+                        </a:rPr>
+                        <a:t>テンションメンバ</a:t>
+                      </a:r>
+                    </a:p>
+                  </a:txBody>
+                  <a:tcPr>
+                    <a:solidFill>
+                      <a:srgbClr val="FFFFFF"/>
+                    </a:solidFill>
+                  </a:tcPr>
+                </a:tc>
+                <a:tc>
+                  <a:txBody>
+                    <a:bodyPr wrap="square"/>
+                    <a:lstStyle/>
+                    <a:p>
+                      <a:r>
+                        <a:rPr sz="1400" b="0">
+                          <a:solidFill>
+                            <a:srgbClr val="444444"/>
+                          </a:solidFill>
+                          <a:latin typeface="Meiryo"/>
+                        </a:rPr>
+                        <a:t>ケーブルの抗張力体（鋼線/FRPなどの強度部材）</a:t>
+                      </a:r>
+                    </a:p>
+                  </a:txBody>
+                  <a:tcPr>
+                    <a:solidFill>
+                      <a:srgbClr val="FFFFFF"/>
+                    </a:solidFill>
+                  </a:tcPr>
+                </a:tc>
+              </a:tr>
+              <a:tr h="465512">
+                <a:tc>
+                  <a:txBody>
+                    <a:bodyPr wrap="square"/>
+                    <a:lstStyle/>
+                    <a:p>
+                      <a:r>
+                        <a:rPr sz="1400" b="1">
+                          <a:solidFill>
+                            <a:srgbClr val="1F3A5F"/>
+                          </a:solidFill>
+                          <a:latin typeface="Meiryo"/>
+                        </a:rPr>
+                        <a:t>テープ心線</a:t>
+                      </a:r>
+                    </a:p>
+                  </a:txBody>
+                  <a:tcPr>
+                    <a:solidFill>
+                      <a:srgbClr val="EDF3FA"/>
+                    </a:solidFill>
+                  </a:tcPr>
+                </a:tc>
+                <a:tc>
+                  <a:txBody>
+                    <a:bodyPr wrap="square"/>
+                    <a:lstStyle/>
+                    <a:p>
+                      <a:r>
+                        <a:rPr sz="1400" b="0">
+                          <a:solidFill>
+                            <a:srgbClr val="444444"/>
+                          </a:solidFill>
+                          <a:latin typeface="Meiryo"/>
+                        </a:rPr>
+                        <a:t>複数心を並べてテープ状にした心線</a:t>
+                      </a:r>
+                    </a:p>
+                  </a:txBody>
+                  <a:tcPr>
+                    <a:solidFill>
+                      <a:srgbClr val="EDF3FA"/>
+                    </a:solidFill>
+                  </a:tcPr>
+                </a:tc>
+              </a:tr>
+              <a:tr h="465512">
+                <a:tc>
+                  <a:txBody>
+                    <a:bodyPr wrap="square"/>
+                    <a:lstStyle/>
+                    <a:p>
+                      <a:r>
+                        <a:rPr sz="1400" b="1">
+                          <a:solidFill>
+                            <a:srgbClr val="1F3A5F"/>
+                          </a:solidFill>
+                          <a:latin typeface="Meiryo"/>
+                        </a:rPr>
+                        <a:t>ファンアウト(FO)</a:t>
+                      </a:r>
+                    </a:p>
+                  </a:txBody>
+                  <a:tcPr>
+                    <a:solidFill>
+                      <a:srgbClr val="FFFFFF"/>
+                    </a:solidFill>
+                  </a:tcPr>
+                </a:tc>
+                <a:tc>
+                  <a:txBody>
+                    <a:bodyPr wrap="square"/>
+                    <a:lstStyle/>
+                    <a:p>
+                      <a:r>
+                        <a:rPr sz="1400" b="0">
+                          <a:solidFill>
+                            <a:srgbClr val="444444"/>
+                          </a:solidFill>
+                          <a:latin typeface="Meiryo"/>
+                        </a:rPr>
+                        <a:t>テープ心線を1心ずつのコネクタに展開すること</a:t>
+                      </a:r>
+                    </a:p>
+                  </a:txBody>
+                  <a:tcPr>
+                    <a:solidFill>
+                      <a:srgbClr val="FFFFFF"/>
+                    </a:solidFill>
+                  </a:tcPr>
+                </a:tc>
+              </a:tr>
+              <a:tr h="465512">
+                <a:tc>
+                  <a:txBody>
+                    <a:bodyPr wrap="square"/>
+                    <a:lstStyle/>
+                    <a:p>
+                      <a:r>
+                        <a:rPr sz="1400" b="1">
+                          <a:solidFill>
+                            <a:srgbClr val="1F3A5F"/>
+                          </a:solidFill>
+                          <a:latin typeface="Meiryo"/>
+                        </a:rPr>
+                        <a:t>成端</a:t>
+                      </a:r>
+                    </a:p>
+                  </a:txBody>
+                  <a:tcPr>
+                    <a:solidFill>
+                      <a:srgbClr val="EDF3FA"/>
+                    </a:solidFill>
+                  </a:tcPr>
+                </a:tc>
+                <a:tc>
+                  <a:txBody>
+                    <a:bodyPr wrap="square"/>
+                    <a:lstStyle/>
+                    <a:p>
+                      <a:r>
+                        <a:rPr sz="1400" b="0">
+                          <a:solidFill>
+                            <a:srgbClr val="444444"/>
+                          </a:solidFill>
+                          <a:latin typeface="Meiryo"/>
+                        </a:rPr>
+                        <a:t>心線をコネクタ化して端末を仕上げること</a:t>
+                      </a:r>
+                    </a:p>
+                  </a:txBody>
+                  <a:tcPr>
+                    <a:solidFill>
+                      <a:srgbClr val="EDF3FA"/>
+                    </a:solidFill>
+                  </a:tcPr>
+                </a:tc>
+              </a:tr>
+              <a:tr h="465512">
+                <a:tc>
+                  <a:txBody>
+                    <a:bodyPr wrap="square"/>
+                    <a:lstStyle/>
+                    <a:p>
+                      <a:r>
+                        <a:rPr sz="1400" b="1">
+                          <a:solidFill>
+                            <a:srgbClr val="1F3A5F"/>
+                          </a:solidFill>
+                          <a:latin typeface="Meiryo"/>
+                        </a:rPr>
+                        <a:t>ピグテール</a:t>
+                      </a:r>
+                    </a:p>
+                  </a:txBody>
+                  <a:tcPr>
+                    <a:solidFill>
+                      <a:srgbClr val="FFFFFF"/>
+                    </a:solidFill>
+                  </a:tcPr>
+                </a:tc>
+                <a:tc>
+                  <a:txBody>
+                    <a:bodyPr wrap="square"/>
+                    <a:lstStyle/>
+                    <a:p>
+                      <a:r>
+                        <a:rPr sz="1400" b="0">
+                          <a:solidFill>
+                            <a:srgbClr val="444444"/>
+                          </a:solidFill>
+                          <a:latin typeface="Meiryo"/>
+                        </a:rPr>
+                        <a:t>片端にコネクタが付いた短い心線</a:t>
+                      </a:r>
+                    </a:p>
+                  </a:txBody>
+                  <a:tcPr>
+                    <a:solidFill>
+                      <a:srgbClr val="FFFFFF"/>
+                    </a:solidFill>
+                  </a:tcPr>
+                </a:tc>
+              </a:tr>
+              <a:tr h="465512">
+                <a:tc>
+                  <a:txBody>
+                    <a:bodyPr wrap="square"/>
+                    <a:lstStyle/>
+                    <a:p>
+                      <a:r>
+                        <a:rPr sz="1400" b="1">
+                          <a:solidFill>
+                            <a:srgbClr val="1F3A5F"/>
+                          </a:solidFill>
+                          <a:latin typeface="Meiryo"/>
+                        </a:rPr>
+                        <a:t>融着接続</a:t>
+                      </a:r>
+                    </a:p>
+                  </a:txBody>
+                  <a:tcPr>
+                    <a:solidFill>
+                      <a:srgbClr val="EDF3FA"/>
+                    </a:solidFill>
+                  </a:tcPr>
+                </a:tc>
+                <a:tc>
+                  <a:txBody>
+                    <a:bodyPr wrap="square"/>
+                    <a:lstStyle/>
+                    <a:p>
+                      <a:r>
+                        <a:rPr sz="1400" b="0">
+                          <a:solidFill>
+                            <a:srgbClr val="444444"/>
+                          </a:solidFill>
+                          <a:latin typeface="Meiryo"/>
+                        </a:rPr>
+                        <a:t>ファイバ同士を熱で溶かして接続する方法</a:t>
+                      </a:r>
+                    </a:p>
+                  </a:txBody>
+                  <a:tcPr>
+                    <a:solidFill>
+                      <a:srgbClr val="EDF3FA"/>
+                    </a:solidFill>
+                  </a:tcPr>
+                </a:tc>
+              </a:tr>
+              <a:tr h="465520">
+                <a:tc>
+                  <a:txBody>
+                    <a:bodyPr wrap="square"/>
+                    <a:lstStyle/>
+                    <a:p>
+                      <a:r>
+                        <a:rPr sz="1400" b="1">
+                          <a:solidFill>
+                            <a:srgbClr val="1F3A5F"/>
+                          </a:solidFill>
+                          <a:latin typeface="Meiryo"/>
+                        </a:rPr>
+                        <a:t>クロージャ</a:t>
+                      </a:r>
+                    </a:p>
+                  </a:txBody>
+                  <a:tcPr>
+                    <a:solidFill>
+                      <a:srgbClr val="FFFFFF"/>
+                    </a:solidFill>
+                  </a:tcPr>
+                </a:tc>
+                <a:tc>
+                  <a:txBody>
+                    <a:bodyPr wrap="square"/>
+                    <a:lstStyle/>
+                    <a:p>
+                      <a:r>
+                        <a:rPr sz="1400" b="0">
+                          <a:solidFill>
+                            <a:srgbClr val="444444"/>
+                          </a:solidFill>
+                          <a:latin typeface="Meiryo"/>
+                        </a:rPr>
+                        <a:t>ケーブル途中の接続・分岐点を保護する箱</a:t>
+                      </a:r>
+                    </a:p>
+                  </a:txBody>
+                  <a:tcPr>
+                    <a:solidFill>
+                      <a:srgbClr val="FFFFFF"/>
+                    </a:solidFill>
+                  </a:tcPr>
+                </a:tc>
+              </a:tr>
+            </a:tbl>
+          </a:graphicData>
+        </a:graphic>
+      </p:graphicFrame>
     </p:spTree>
   </p:cSld>
   <p:clrMapOvr>

--- a/presentations/optical-fiber-presentation.pptx
+++ b/presentations/optical-fiber-presentation.pptx
@@ -26,7 +26,6 @@
     <p:sldId id="274" r:id="rId25"/>
     <p:sldId id="275" r:id="rId26"/>
     <p:sldId id="276" r:id="rId27"/>
-    <p:sldId id="277" r:id="rId28"/>
   </p:sldIdLst>
   <p:sldSz cx="12191695" cy="6858000" type="screen4x3"/>
   <p:notesSz cx="6858000" cy="9144000"/>
@@ -5444,1420 +5443,449 @@
                 </a:solidFill>
                 <a:latin typeface="Meiryo"/>
               </a:rPr>
-              <a:t>ケーブルとコード（イメージ図）</a:t>
+              <a:t>成端箱とクロージャの違い</a:t>
             </a:r>
           </a:p>
         </p:txBody>
       </p:sp>
-      <p:sp>
-        <p:nvSpPr>
-          <p:cNvPr id="3" name="TextBox 2"/>
-          <p:cNvSpPr txBox="1"/>
+      <p:graphicFrame>
+        <p:nvGraphicFramePr>
+          <p:cNvPr id="3" name="Table 2"/>
+          <p:cNvGraphicFramePr>
+            <a:graphicFrameLocks noGrp="1"/>
+          </p:cNvGraphicFramePr>
           <p:nvPr/>
-        </p:nvSpPr>
-        <p:spPr>
-          <a:xfrm>
-            <a:off x="548640" y="1188720"/>
-            <a:ext cx="5303520" cy="365760"/>
-          </a:xfrm>
-          <a:prstGeom prst="rect">
-            <a:avLst/>
-          </a:prstGeom>
-          <a:noFill/>
-        </p:spPr>
-        <p:txBody>
-          <a:bodyPr wrap="square" tIns="0" bIns="0">
-            <a:spAutoFit/>
-          </a:bodyPr>
-          <a:lstStyle/>
-          <a:p>
-            <a:pPr algn="ctr"/>
-            <a:r>
-              <a:rPr sz="1700" b="1">
-                <a:solidFill>
-                  <a:srgbClr val="1F3A5F"/>
-                </a:solidFill>
-                <a:latin typeface="Meiryo"/>
-              </a:rPr>
-              <a:t>コード（細い・屋内・機器寄り）</a:t>
-            </a:r>
-          </a:p>
-        </p:txBody>
-      </p:sp>
-      <p:sp>
-        <p:nvSpPr>
-          <p:cNvPr id="4" name="Oval 3"/>
-          <p:cNvSpPr/>
-          <p:nvPr/>
-        </p:nvSpPr>
-        <p:spPr>
-          <a:xfrm>
-            <a:off x="2194560" y="1828800"/>
-            <a:ext cx="1828800" cy="1828800"/>
-          </a:xfrm>
-          <a:prstGeom prst="ellipse">
-            <a:avLst/>
-          </a:prstGeom>
-          <a:solidFill>
-            <a:srgbClr val="356AA8"/>
-          </a:solidFill>
-          <a:ln w="12700">
-            <a:solidFill>
-              <a:srgbClr val="1F3A5F"/>
-            </a:solidFill>
-          </a:ln>
-          <a:effectLst/>
-        </p:spPr>
-        <p:style>
-          <a:lnRef idx="1">
-            <a:schemeClr val="accent1"/>
-          </a:lnRef>
-          <a:fillRef idx="3">
-            <a:schemeClr val="accent1"/>
-          </a:fillRef>
-          <a:effectRef idx="2">
-            <a:schemeClr val="accent1"/>
-          </a:effectRef>
-          <a:fontRef idx="minor">
-            <a:schemeClr val="lt1"/>
-          </a:fontRef>
-        </p:style>
-        <p:txBody>
-          <a:bodyPr rtlCol="0" anchor="ctr"/>
-          <a:lstStyle/>
-          <a:p>
-            <a:pPr algn="ctr"/>
-          </a:p>
-        </p:txBody>
-      </p:sp>
-      <p:sp>
-        <p:nvSpPr>
-          <p:cNvPr id="5" name="Oval 4"/>
-          <p:cNvSpPr/>
-          <p:nvPr/>
-        </p:nvSpPr>
-        <p:spPr>
-          <a:xfrm>
-            <a:off x="2450591" y="2084832"/>
-            <a:ext cx="1316736" cy="1316736"/>
-          </a:xfrm>
-          <a:prstGeom prst="ellipse">
-            <a:avLst/>
-          </a:prstGeom>
-          <a:solidFill>
-            <a:srgbClr val="F2E2A8"/>
-          </a:solidFill>
-          <a:ln>
-            <a:noFill/>
-          </a:ln>
-          <a:effectLst/>
-        </p:spPr>
-        <p:style>
-          <a:lnRef idx="1">
-            <a:schemeClr val="accent1"/>
-          </a:lnRef>
-          <a:fillRef idx="3">
-            <a:schemeClr val="accent1"/>
-          </a:fillRef>
-          <a:effectRef idx="2">
-            <a:schemeClr val="accent1"/>
-          </a:effectRef>
-          <a:fontRef idx="minor">
-            <a:schemeClr val="lt1"/>
-          </a:fontRef>
-        </p:style>
-        <p:txBody>
-          <a:bodyPr rtlCol="0" anchor="ctr"/>
-          <a:lstStyle/>
-          <a:p>
-            <a:pPr algn="ctr"/>
-          </a:p>
-        </p:txBody>
-      </p:sp>
-      <p:sp>
-        <p:nvSpPr>
-          <p:cNvPr id="6" name="Oval 5"/>
-          <p:cNvSpPr/>
-          <p:nvPr/>
-        </p:nvSpPr>
-        <p:spPr>
-          <a:xfrm>
-            <a:off x="2852928" y="2487168"/>
-            <a:ext cx="512064" cy="512064"/>
-          </a:xfrm>
-          <a:prstGeom prst="ellipse">
-            <a:avLst/>
-          </a:prstGeom>
-          <a:solidFill>
-            <a:srgbClr val="FFD23C"/>
-          </a:solidFill>
-          <a:ln>
-            <a:solidFill>
-              <a:srgbClr val="D8B840"/>
-            </a:solidFill>
-          </a:ln>
-          <a:effectLst/>
-        </p:spPr>
-        <p:style>
-          <a:lnRef idx="1">
-            <a:schemeClr val="accent1"/>
-          </a:lnRef>
-          <a:fillRef idx="3">
-            <a:schemeClr val="accent1"/>
-          </a:fillRef>
-          <a:effectRef idx="2">
-            <a:schemeClr val="accent1"/>
-          </a:effectRef>
-          <a:fontRef idx="minor">
-            <a:schemeClr val="lt1"/>
-          </a:fontRef>
-        </p:style>
-        <p:txBody>
-          <a:bodyPr rtlCol="0" anchor="ctr"/>
-          <a:lstStyle/>
-          <a:p>
-            <a:pPr algn="ctr"/>
-          </a:p>
-        </p:txBody>
-      </p:sp>
-      <p:sp>
-        <p:nvSpPr>
-          <p:cNvPr id="7" name="Rectangle 6"/>
-          <p:cNvSpPr/>
-          <p:nvPr/>
-        </p:nvSpPr>
-        <p:spPr>
-          <a:xfrm>
-            <a:off x="1188720" y="4160520"/>
-            <a:ext cx="219456" cy="219456"/>
-          </a:xfrm>
-          <a:prstGeom prst="rect">
-            <a:avLst/>
-          </a:prstGeom>
-          <a:solidFill>
-            <a:srgbClr val="FFD23C"/>
-          </a:solidFill>
-          <a:ln w="6350">
-            <a:solidFill>
-              <a:srgbClr val="1F3A5F"/>
-            </a:solidFill>
-          </a:ln>
-          <a:effectLst/>
-        </p:spPr>
-        <p:style>
-          <a:lnRef idx="1">
-            <a:schemeClr val="accent1"/>
-          </a:lnRef>
-          <a:fillRef idx="3">
-            <a:schemeClr val="accent1"/>
-          </a:fillRef>
-          <a:effectRef idx="2">
-            <a:schemeClr val="accent1"/>
-          </a:effectRef>
-          <a:fontRef idx="minor">
-            <a:schemeClr val="lt1"/>
-          </a:fontRef>
-        </p:style>
-        <p:txBody>
-          <a:bodyPr rtlCol="0" anchor="ctr"/>
-          <a:lstStyle/>
-          <a:p>
-            <a:pPr algn="ctr"/>
-          </a:p>
-        </p:txBody>
-      </p:sp>
-      <p:sp>
-        <p:nvSpPr>
-          <p:cNvPr id="8" name="TextBox 7"/>
-          <p:cNvSpPr txBox="1"/>
-          <p:nvPr/>
-        </p:nvSpPr>
-        <p:spPr>
-          <a:xfrm>
-            <a:off x="1517904" y="4142232"/>
-            <a:ext cx="3840480" cy="274320"/>
-          </a:xfrm>
-          <a:prstGeom prst="rect">
-            <a:avLst/>
-          </a:prstGeom>
-          <a:noFill/>
-        </p:spPr>
-        <p:txBody>
-          <a:bodyPr wrap="square" tIns="0" bIns="0">
-            <a:spAutoFit/>
-          </a:bodyPr>
-          <a:lstStyle/>
-          <a:p>
-            <a:pPr algn="l"/>
-            <a:r>
-              <a:rPr sz="1200" b="0">
-                <a:solidFill>
-                  <a:srgbClr val="444444"/>
-                </a:solidFill>
-                <a:latin typeface="Meiryo"/>
-              </a:rPr>
-              <a:t>光ファイバ心線（1心）</a:t>
-            </a:r>
-          </a:p>
-        </p:txBody>
-      </p:sp>
-      <p:sp>
-        <p:nvSpPr>
-          <p:cNvPr id="9" name="Rectangle 8"/>
-          <p:cNvSpPr/>
-          <p:nvPr/>
-        </p:nvSpPr>
-        <p:spPr>
-          <a:xfrm>
-            <a:off x="1188720" y="4581144"/>
-            <a:ext cx="219456" cy="219456"/>
-          </a:xfrm>
-          <a:prstGeom prst="rect">
-            <a:avLst/>
-          </a:prstGeom>
-          <a:solidFill>
-            <a:srgbClr val="F2E2A8"/>
-          </a:solidFill>
-          <a:ln w="6350">
-            <a:solidFill>
-              <a:srgbClr val="1F3A5F"/>
-            </a:solidFill>
-          </a:ln>
-          <a:effectLst/>
-        </p:spPr>
-        <p:style>
-          <a:lnRef idx="1">
-            <a:schemeClr val="accent1"/>
-          </a:lnRef>
-          <a:fillRef idx="3">
-            <a:schemeClr val="accent1"/>
-          </a:fillRef>
-          <a:effectRef idx="2">
-            <a:schemeClr val="accent1"/>
-          </a:effectRef>
-          <a:fontRef idx="minor">
-            <a:schemeClr val="lt1"/>
-          </a:fontRef>
-        </p:style>
-        <p:txBody>
-          <a:bodyPr rtlCol="0" anchor="ctr"/>
-          <a:lstStyle/>
-          <a:p>
-            <a:pPr algn="ctr"/>
-          </a:p>
-        </p:txBody>
-      </p:sp>
-      <p:sp>
-        <p:nvSpPr>
-          <p:cNvPr id="10" name="TextBox 9"/>
-          <p:cNvSpPr txBox="1"/>
-          <p:nvPr/>
-        </p:nvSpPr>
-        <p:spPr>
-          <a:xfrm>
-            <a:off x="1517904" y="4562856"/>
-            <a:ext cx="3840480" cy="274320"/>
-          </a:xfrm>
-          <a:prstGeom prst="rect">
-            <a:avLst/>
-          </a:prstGeom>
-          <a:noFill/>
-        </p:spPr>
-        <p:txBody>
-          <a:bodyPr wrap="square" tIns="0" bIns="0">
-            <a:spAutoFit/>
-          </a:bodyPr>
-          <a:lstStyle/>
-          <a:p>
-            <a:pPr algn="l"/>
-            <a:r>
-              <a:rPr sz="1200" b="0">
-                <a:solidFill>
-                  <a:srgbClr val="444444"/>
-                </a:solidFill>
-                <a:latin typeface="Meiryo"/>
-              </a:rPr>
-              <a:t>アラミド繊維（抗張力）</a:t>
-            </a:r>
-          </a:p>
-        </p:txBody>
-      </p:sp>
-      <p:sp>
-        <p:nvSpPr>
-          <p:cNvPr id="11" name="Rectangle 10"/>
-          <p:cNvSpPr/>
-          <p:nvPr/>
-        </p:nvSpPr>
-        <p:spPr>
-          <a:xfrm>
-            <a:off x="1188720" y="5001768"/>
-            <a:ext cx="219456" cy="219456"/>
-          </a:xfrm>
-          <a:prstGeom prst="rect">
-            <a:avLst/>
-          </a:prstGeom>
-          <a:solidFill>
-            <a:srgbClr val="356AA8"/>
-          </a:solidFill>
-          <a:ln w="6350">
-            <a:solidFill>
-              <a:srgbClr val="1F3A5F"/>
-            </a:solidFill>
-          </a:ln>
-          <a:effectLst/>
-        </p:spPr>
-        <p:style>
-          <a:lnRef idx="1">
-            <a:schemeClr val="accent1"/>
-          </a:lnRef>
-          <a:fillRef idx="3">
-            <a:schemeClr val="accent1"/>
-          </a:fillRef>
-          <a:effectRef idx="2">
-            <a:schemeClr val="accent1"/>
-          </a:effectRef>
-          <a:fontRef idx="minor">
-            <a:schemeClr val="lt1"/>
-          </a:fontRef>
-        </p:style>
-        <p:txBody>
-          <a:bodyPr rtlCol="0" anchor="ctr"/>
-          <a:lstStyle/>
-          <a:p>
-            <a:pPr algn="ctr"/>
-          </a:p>
-        </p:txBody>
-      </p:sp>
-      <p:sp>
-        <p:nvSpPr>
-          <p:cNvPr id="12" name="TextBox 11"/>
-          <p:cNvSpPr txBox="1"/>
-          <p:nvPr/>
-        </p:nvSpPr>
-        <p:spPr>
-          <a:xfrm>
-            <a:off x="1517904" y="4983480"/>
-            <a:ext cx="3840480" cy="274320"/>
-          </a:xfrm>
-          <a:prstGeom prst="rect">
-            <a:avLst/>
-          </a:prstGeom>
-          <a:noFill/>
-        </p:spPr>
-        <p:txBody>
-          <a:bodyPr wrap="square" tIns="0" bIns="0">
-            <a:spAutoFit/>
-          </a:bodyPr>
-          <a:lstStyle/>
-          <a:p>
-            <a:pPr algn="l"/>
-            <a:r>
-              <a:rPr sz="1200" b="0">
-                <a:solidFill>
-                  <a:srgbClr val="444444"/>
-                </a:solidFill>
-                <a:latin typeface="Meiryo"/>
-              </a:rPr>
-              <a:t>外被（柔らかい）</a:t>
-            </a:r>
-          </a:p>
-        </p:txBody>
-      </p:sp>
-      <p:sp>
-        <p:nvSpPr>
-          <p:cNvPr id="13" name="TextBox 12"/>
-          <p:cNvSpPr txBox="1"/>
-          <p:nvPr/>
-        </p:nvSpPr>
-        <p:spPr>
-          <a:xfrm>
-            <a:off x="6309360" y="1188720"/>
-            <a:ext cx="5394960" cy="365760"/>
-          </a:xfrm>
-          <a:prstGeom prst="rect">
-            <a:avLst/>
-          </a:prstGeom>
-          <a:noFill/>
-        </p:spPr>
-        <p:txBody>
-          <a:bodyPr wrap="square" tIns="0" bIns="0">
-            <a:spAutoFit/>
-          </a:bodyPr>
-          <a:lstStyle/>
-          <a:p>
-            <a:pPr algn="ctr"/>
-            <a:r>
-              <a:rPr sz="1700" b="1">
-                <a:solidFill>
-                  <a:srgbClr val="1F3A5F"/>
-                </a:solidFill>
-                <a:latin typeface="Meiryo"/>
-              </a:rPr>
-              <a:t>ケーブル（太い・屋外・多心）</a:t>
-            </a:r>
-          </a:p>
-        </p:txBody>
-      </p:sp>
-      <p:sp>
-        <p:nvSpPr>
-          <p:cNvPr id="14" name="Oval 13"/>
-          <p:cNvSpPr/>
-          <p:nvPr/>
-        </p:nvSpPr>
-        <p:spPr>
-          <a:xfrm>
-            <a:off x="7772400" y="1600199"/>
-            <a:ext cx="2377440" cy="2377440"/>
-          </a:xfrm>
-          <a:prstGeom prst="ellipse">
-            <a:avLst/>
-          </a:prstGeom>
-          <a:solidFill>
-            <a:srgbClr val="223344"/>
-          </a:solidFill>
-          <a:ln w="12700">
-            <a:solidFill>
-              <a:srgbClr val="1F3A5F"/>
-            </a:solidFill>
-          </a:ln>
-          <a:effectLst/>
-        </p:spPr>
-        <p:style>
-          <a:lnRef idx="1">
-            <a:schemeClr val="accent1"/>
-          </a:lnRef>
-          <a:fillRef idx="3">
-            <a:schemeClr val="accent1"/>
-          </a:fillRef>
-          <a:effectRef idx="2">
-            <a:schemeClr val="accent1"/>
-          </a:effectRef>
-          <a:fontRef idx="minor">
-            <a:schemeClr val="lt1"/>
-          </a:fontRef>
-        </p:style>
-        <p:txBody>
-          <a:bodyPr rtlCol="0" anchor="ctr"/>
-          <a:lstStyle/>
-          <a:p>
-            <a:pPr algn="ctr"/>
-          </a:p>
-        </p:txBody>
-      </p:sp>
-      <p:sp>
-        <p:nvSpPr>
-          <p:cNvPr id="15" name="Oval 14"/>
-          <p:cNvSpPr/>
-          <p:nvPr/>
-        </p:nvSpPr>
-        <p:spPr>
-          <a:xfrm>
-            <a:off x="8010144" y="1837943"/>
-            <a:ext cx="1901952" cy="1901952"/>
-          </a:xfrm>
-          <a:prstGeom prst="ellipse">
-            <a:avLst/>
-          </a:prstGeom>
-          <a:solidFill>
-            <a:srgbClr val="CFE0F2"/>
-          </a:solidFill>
-          <a:ln>
-            <a:noFill/>
-          </a:ln>
-          <a:effectLst/>
-        </p:spPr>
-        <p:style>
-          <a:lnRef idx="1">
-            <a:schemeClr val="accent1"/>
-          </a:lnRef>
-          <a:fillRef idx="3">
-            <a:schemeClr val="accent1"/>
-          </a:fillRef>
-          <a:effectRef idx="2">
-            <a:schemeClr val="accent1"/>
-          </a:effectRef>
-          <a:fontRef idx="minor">
-            <a:schemeClr val="lt1"/>
-          </a:fontRef>
-        </p:style>
-        <p:txBody>
-          <a:bodyPr rtlCol="0" anchor="ctr"/>
-          <a:lstStyle/>
-          <a:p>
-            <a:pPr algn="ctr"/>
-          </a:p>
-        </p:txBody>
-      </p:sp>
-      <p:sp>
-        <p:nvSpPr>
-          <p:cNvPr id="16" name="Oval 15"/>
-          <p:cNvSpPr/>
-          <p:nvPr/>
-        </p:nvSpPr>
-        <p:spPr>
-          <a:xfrm>
-            <a:off x="8699601" y="2527401"/>
-            <a:ext cx="523036" cy="523036"/>
-          </a:xfrm>
-          <a:prstGeom prst="ellipse">
-            <a:avLst/>
-          </a:prstGeom>
-          <a:solidFill>
-            <a:srgbClr val="888F99"/>
-          </a:solidFill>
-          <a:ln>
-            <a:noFill/>
-          </a:ln>
-          <a:effectLst/>
-        </p:spPr>
-        <p:style>
-          <a:lnRef idx="1">
-            <a:schemeClr val="accent1"/>
-          </a:lnRef>
-          <a:fillRef idx="3">
-            <a:schemeClr val="accent1"/>
-          </a:fillRef>
-          <a:effectRef idx="2">
-            <a:schemeClr val="accent1"/>
-          </a:effectRef>
-          <a:fontRef idx="minor">
-            <a:schemeClr val="lt1"/>
-          </a:fontRef>
-        </p:style>
-        <p:txBody>
-          <a:bodyPr rtlCol="0" anchor="ctr"/>
-          <a:lstStyle/>
-          <a:p>
-            <a:pPr algn="ctr"/>
-          </a:p>
-        </p:txBody>
-      </p:sp>
-      <p:sp>
-        <p:nvSpPr>
-          <p:cNvPr id="17" name="Oval 16"/>
-          <p:cNvSpPr/>
-          <p:nvPr/>
-        </p:nvSpPr>
-        <p:spPr>
-          <a:xfrm>
-            <a:off x="8794699" y="1980590"/>
-            <a:ext cx="332841" cy="332841"/>
-          </a:xfrm>
-          <a:prstGeom prst="ellipse">
-            <a:avLst/>
-          </a:prstGeom>
-          <a:solidFill>
-            <a:srgbClr val="FFD23C"/>
-          </a:solidFill>
-          <a:ln w="6350">
-            <a:solidFill>
-              <a:srgbClr val="D8B840"/>
-            </a:solidFill>
-          </a:ln>
-          <a:effectLst/>
-        </p:spPr>
-        <p:style>
-          <a:lnRef idx="1">
-            <a:schemeClr val="accent1"/>
-          </a:lnRef>
-          <a:fillRef idx="3">
-            <a:schemeClr val="accent1"/>
-          </a:fillRef>
-          <a:effectRef idx="2">
-            <a:schemeClr val="accent1"/>
-          </a:effectRef>
-          <a:fontRef idx="minor">
-            <a:schemeClr val="lt1"/>
-          </a:fontRef>
-        </p:style>
-        <p:txBody>
-          <a:bodyPr rtlCol="0" anchor="ctr"/>
-          <a:lstStyle/>
-          <a:p>
-            <a:pPr algn="ctr"/>
-          </a:p>
-        </p:txBody>
-      </p:sp>
-      <p:sp>
-        <p:nvSpPr>
-          <p:cNvPr id="18" name="Oval 17"/>
-          <p:cNvSpPr/>
-          <p:nvPr/>
-        </p:nvSpPr>
-        <p:spPr>
-          <a:xfrm>
-            <a:off x="9350608" y="2301544"/>
-            <a:ext cx="332841" cy="332841"/>
-          </a:xfrm>
-          <a:prstGeom prst="ellipse">
-            <a:avLst/>
-          </a:prstGeom>
-          <a:solidFill>
-            <a:srgbClr val="FFD23C"/>
-          </a:solidFill>
-          <a:ln w="6350">
-            <a:solidFill>
-              <a:srgbClr val="D8B840"/>
-            </a:solidFill>
-          </a:ln>
-          <a:effectLst/>
-        </p:spPr>
-        <p:style>
-          <a:lnRef idx="1">
-            <a:schemeClr val="accent1"/>
-          </a:lnRef>
-          <a:fillRef idx="3">
-            <a:schemeClr val="accent1"/>
-          </a:fillRef>
-          <a:effectRef idx="2">
-            <a:schemeClr val="accent1"/>
-          </a:effectRef>
-          <a:fontRef idx="minor">
-            <a:schemeClr val="lt1"/>
-          </a:fontRef>
-        </p:style>
-        <p:txBody>
-          <a:bodyPr rtlCol="0" anchor="ctr"/>
-          <a:lstStyle/>
-          <a:p>
-            <a:pPr algn="ctr"/>
-          </a:p>
-        </p:txBody>
-      </p:sp>
-      <p:sp>
-        <p:nvSpPr>
-          <p:cNvPr id="19" name="Oval 18"/>
-          <p:cNvSpPr/>
-          <p:nvPr/>
-        </p:nvSpPr>
-        <p:spPr>
-          <a:xfrm>
-            <a:off x="9350608" y="2943453"/>
-            <a:ext cx="332841" cy="332841"/>
-          </a:xfrm>
-          <a:prstGeom prst="ellipse">
-            <a:avLst/>
-          </a:prstGeom>
-          <a:solidFill>
-            <a:srgbClr val="FFD23C"/>
-          </a:solidFill>
-          <a:ln w="6350">
-            <a:solidFill>
-              <a:srgbClr val="D8B840"/>
-            </a:solidFill>
-          </a:ln>
-          <a:effectLst/>
-        </p:spPr>
-        <p:style>
-          <a:lnRef idx="1">
-            <a:schemeClr val="accent1"/>
-          </a:lnRef>
-          <a:fillRef idx="3">
-            <a:schemeClr val="accent1"/>
-          </a:fillRef>
-          <a:effectRef idx="2">
-            <a:schemeClr val="accent1"/>
-          </a:effectRef>
-          <a:fontRef idx="minor">
-            <a:schemeClr val="lt1"/>
-          </a:fontRef>
-        </p:style>
-        <p:txBody>
-          <a:bodyPr rtlCol="0" anchor="ctr"/>
-          <a:lstStyle/>
-          <a:p>
-            <a:pPr algn="ctr"/>
-          </a:p>
-        </p:txBody>
-      </p:sp>
-      <p:sp>
-        <p:nvSpPr>
-          <p:cNvPr id="20" name="Oval 19"/>
-          <p:cNvSpPr/>
-          <p:nvPr/>
-        </p:nvSpPr>
-        <p:spPr>
-          <a:xfrm>
-            <a:off x="8794699" y="3264408"/>
-            <a:ext cx="332841" cy="332841"/>
-          </a:xfrm>
-          <a:prstGeom prst="ellipse">
-            <a:avLst/>
-          </a:prstGeom>
-          <a:solidFill>
-            <a:srgbClr val="FFD23C"/>
-          </a:solidFill>
-          <a:ln w="6350">
-            <a:solidFill>
-              <a:srgbClr val="D8B840"/>
-            </a:solidFill>
-          </a:ln>
-          <a:effectLst/>
-        </p:spPr>
-        <p:style>
-          <a:lnRef idx="1">
-            <a:schemeClr val="accent1"/>
-          </a:lnRef>
-          <a:fillRef idx="3">
-            <a:schemeClr val="accent1"/>
-          </a:fillRef>
-          <a:effectRef idx="2">
-            <a:schemeClr val="accent1"/>
-          </a:effectRef>
-          <a:fontRef idx="minor">
-            <a:schemeClr val="lt1"/>
-          </a:fontRef>
-        </p:style>
-        <p:txBody>
-          <a:bodyPr rtlCol="0" anchor="ctr"/>
-          <a:lstStyle/>
-          <a:p>
-            <a:pPr algn="ctr"/>
-          </a:p>
-        </p:txBody>
-      </p:sp>
-      <p:sp>
-        <p:nvSpPr>
-          <p:cNvPr id="21" name="Oval 20"/>
-          <p:cNvSpPr/>
-          <p:nvPr/>
-        </p:nvSpPr>
-        <p:spPr>
-          <a:xfrm>
-            <a:off x="8238789" y="2943453"/>
-            <a:ext cx="332841" cy="332841"/>
-          </a:xfrm>
-          <a:prstGeom prst="ellipse">
-            <a:avLst/>
-          </a:prstGeom>
-          <a:solidFill>
-            <a:srgbClr val="FFD23C"/>
-          </a:solidFill>
-          <a:ln w="6350">
-            <a:solidFill>
-              <a:srgbClr val="D8B840"/>
-            </a:solidFill>
-          </a:ln>
-          <a:effectLst/>
-        </p:spPr>
-        <p:style>
-          <a:lnRef idx="1">
-            <a:schemeClr val="accent1"/>
-          </a:lnRef>
-          <a:fillRef idx="3">
-            <a:schemeClr val="accent1"/>
-          </a:fillRef>
-          <a:effectRef idx="2">
-            <a:schemeClr val="accent1"/>
-          </a:effectRef>
-          <a:fontRef idx="minor">
-            <a:schemeClr val="lt1"/>
-          </a:fontRef>
-        </p:style>
-        <p:txBody>
-          <a:bodyPr rtlCol="0" anchor="ctr"/>
-          <a:lstStyle/>
-          <a:p>
-            <a:pPr algn="ctr"/>
-          </a:p>
-        </p:txBody>
-      </p:sp>
-      <p:sp>
-        <p:nvSpPr>
-          <p:cNvPr id="22" name="Oval 21"/>
-          <p:cNvSpPr/>
-          <p:nvPr/>
-        </p:nvSpPr>
-        <p:spPr>
-          <a:xfrm>
-            <a:off x="8238789" y="2301544"/>
-            <a:ext cx="332841" cy="332841"/>
-          </a:xfrm>
-          <a:prstGeom prst="ellipse">
-            <a:avLst/>
-          </a:prstGeom>
-          <a:solidFill>
-            <a:srgbClr val="FFD23C"/>
-          </a:solidFill>
-          <a:ln w="6350">
-            <a:solidFill>
-              <a:srgbClr val="D8B840"/>
-            </a:solidFill>
-          </a:ln>
-          <a:effectLst/>
-        </p:spPr>
-        <p:style>
-          <a:lnRef idx="1">
-            <a:schemeClr val="accent1"/>
-          </a:lnRef>
-          <a:fillRef idx="3">
-            <a:schemeClr val="accent1"/>
-          </a:fillRef>
-          <a:effectRef idx="2">
-            <a:schemeClr val="accent1"/>
-          </a:effectRef>
-          <a:fontRef idx="minor">
-            <a:schemeClr val="lt1"/>
-          </a:fontRef>
-        </p:style>
-        <p:txBody>
-          <a:bodyPr rtlCol="0" anchor="ctr"/>
-          <a:lstStyle/>
-          <a:p>
-            <a:pPr algn="ctr"/>
-          </a:p>
-        </p:txBody>
-      </p:sp>
-      <p:sp>
-        <p:nvSpPr>
-          <p:cNvPr id="23" name="Rectangle 22"/>
-          <p:cNvSpPr/>
-          <p:nvPr/>
-        </p:nvSpPr>
-        <p:spPr>
-          <a:xfrm>
-            <a:off x="6858000" y="4160520"/>
-            <a:ext cx="219456" cy="219456"/>
-          </a:xfrm>
-          <a:prstGeom prst="rect">
-            <a:avLst/>
-          </a:prstGeom>
-          <a:solidFill>
-            <a:srgbClr val="FFD23C"/>
-          </a:solidFill>
-          <a:ln w="6350">
-            <a:solidFill>
-              <a:srgbClr val="1F3A5F"/>
-            </a:solidFill>
-          </a:ln>
-          <a:effectLst/>
-        </p:spPr>
-        <p:style>
-          <a:lnRef idx="1">
-            <a:schemeClr val="accent1"/>
-          </a:lnRef>
-          <a:fillRef idx="3">
-            <a:schemeClr val="accent1"/>
-          </a:fillRef>
-          <a:effectRef idx="2">
-            <a:schemeClr val="accent1"/>
-          </a:effectRef>
-          <a:fontRef idx="minor">
-            <a:schemeClr val="lt1"/>
-          </a:fontRef>
-        </p:style>
-        <p:txBody>
-          <a:bodyPr rtlCol="0" anchor="ctr"/>
-          <a:lstStyle/>
-          <a:p>
-            <a:pPr algn="ctr"/>
-          </a:p>
-        </p:txBody>
-      </p:sp>
-      <p:sp>
-        <p:nvSpPr>
-          <p:cNvPr id="24" name="TextBox 23"/>
-          <p:cNvSpPr txBox="1"/>
-          <p:nvPr/>
-        </p:nvSpPr>
-        <p:spPr>
-          <a:xfrm>
-            <a:off x="7187184" y="4142232"/>
-            <a:ext cx="3840480" cy="274320"/>
-          </a:xfrm>
-          <a:prstGeom prst="rect">
-            <a:avLst/>
-          </a:prstGeom>
-          <a:noFill/>
-        </p:spPr>
-        <p:txBody>
-          <a:bodyPr wrap="square" tIns="0" bIns="0">
-            <a:spAutoFit/>
-          </a:bodyPr>
-          <a:lstStyle/>
-          <a:p>
-            <a:pPr algn="l"/>
-            <a:r>
-              <a:rPr sz="1200" b="0">
-                <a:solidFill>
-                  <a:srgbClr val="444444"/>
-                </a:solidFill>
-                <a:latin typeface="Meiryo"/>
-              </a:rPr>
-              <a:t>光ファイバ心線（多心）</a:t>
-            </a:r>
-          </a:p>
-        </p:txBody>
-      </p:sp>
-      <p:sp>
-        <p:nvSpPr>
-          <p:cNvPr id="25" name="Rectangle 24"/>
-          <p:cNvSpPr/>
-          <p:nvPr/>
-        </p:nvSpPr>
-        <p:spPr>
-          <a:xfrm>
-            <a:off x="6858000" y="4581144"/>
-            <a:ext cx="219456" cy="219456"/>
-          </a:xfrm>
-          <a:prstGeom prst="rect">
-            <a:avLst/>
-          </a:prstGeom>
-          <a:solidFill>
-            <a:srgbClr val="888F99"/>
-          </a:solidFill>
-          <a:ln w="6350">
-            <a:solidFill>
-              <a:srgbClr val="1F3A5F"/>
-            </a:solidFill>
-          </a:ln>
-          <a:effectLst/>
-        </p:spPr>
-        <p:style>
-          <a:lnRef idx="1">
-            <a:schemeClr val="accent1"/>
-          </a:lnRef>
-          <a:fillRef idx="3">
-            <a:schemeClr val="accent1"/>
-          </a:fillRef>
-          <a:effectRef idx="2">
-            <a:schemeClr val="accent1"/>
-          </a:effectRef>
-          <a:fontRef idx="minor">
-            <a:schemeClr val="lt1"/>
-          </a:fontRef>
-        </p:style>
-        <p:txBody>
-          <a:bodyPr rtlCol="0" anchor="ctr"/>
-          <a:lstStyle/>
-          <a:p>
-            <a:pPr algn="ctr"/>
-          </a:p>
-        </p:txBody>
-      </p:sp>
-      <p:sp>
-        <p:nvSpPr>
-          <p:cNvPr id="26" name="TextBox 25"/>
-          <p:cNvSpPr txBox="1"/>
-          <p:nvPr/>
-        </p:nvSpPr>
-        <p:spPr>
-          <a:xfrm>
-            <a:off x="7187184" y="4562856"/>
-            <a:ext cx="3840480" cy="274320"/>
-          </a:xfrm>
-          <a:prstGeom prst="rect">
-            <a:avLst/>
-          </a:prstGeom>
-          <a:noFill/>
-        </p:spPr>
-        <p:txBody>
-          <a:bodyPr wrap="square" tIns="0" bIns="0">
-            <a:spAutoFit/>
-          </a:bodyPr>
-          <a:lstStyle/>
-          <a:p>
-            <a:pPr algn="l"/>
-            <a:r>
-              <a:rPr sz="1200" b="0">
-                <a:solidFill>
-                  <a:srgbClr val="444444"/>
-                </a:solidFill>
-                <a:latin typeface="Meiryo"/>
-              </a:rPr>
-              <a:t>テンションメンバ（鋼線/FRP）</a:t>
-            </a:r>
-          </a:p>
-        </p:txBody>
-      </p:sp>
-      <p:sp>
-        <p:nvSpPr>
-          <p:cNvPr id="27" name="Rectangle 26"/>
-          <p:cNvSpPr/>
-          <p:nvPr/>
-        </p:nvSpPr>
-        <p:spPr>
-          <a:xfrm>
-            <a:off x="6858000" y="5001768"/>
-            <a:ext cx="219456" cy="219456"/>
-          </a:xfrm>
-          <a:prstGeom prst="rect">
-            <a:avLst/>
-          </a:prstGeom>
-          <a:solidFill>
-            <a:srgbClr val="223344"/>
-          </a:solidFill>
-          <a:ln w="6350">
-            <a:solidFill>
-              <a:srgbClr val="1F3A5F"/>
-            </a:solidFill>
-          </a:ln>
-          <a:effectLst/>
-        </p:spPr>
-        <p:style>
-          <a:lnRef idx="1">
-            <a:schemeClr val="accent1"/>
-          </a:lnRef>
-          <a:fillRef idx="3">
-            <a:schemeClr val="accent1"/>
-          </a:fillRef>
-          <a:effectRef idx="2">
-            <a:schemeClr val="accent1"/>
-          </a:effectRef>
-          <a:fontRef idx="minor">
-            <a:schemeClr val="lt1"/>
-          </a:fontRef>
-        </p:style>
-        <p:txBody>
-          <a:bodyPr rtlCol="0" anchor="ctr"/>
-          <a:lstStyle/>
-          <a:p>
-            <a:pPr algn="ctr"/>
-          </a:p>
-        </p:txBody>
-      </p:sp>
-      <p:sp>
-        <p:nvSpPr>
-          <p:cNvPr id="28" name="TextBox 27"/>
-          <p:cNvSpPr txBox="1"/>
-          <p:nvPr/>
-        </p:nvSpPr>
-        <p:spPr>
-          <a:xfrm>
-            <a:off x="7187184" y="4983480"/>
-            <a:ext cx="3840480" cy="274320"/>
-          </a:xfrm>
-          <a:prstGeom prst="rect">
-            <a:avLst/>
-          </a:prstGeom>
-          <a:noFill/>
-        </p:spPr>
-        <p:txBody>
-          <a:bodyPr wrap="square" tIns="0" bIns="0">
-            <a:spAutoFit/>
-          </a:bodyPr>
-          <a:lstStyle/>
-          <a:p>
-            <a:pPr algn="l"/>
-            <a:r>
-              <a:rPr sz="1200" b="0">
-                <a:solidFill>
-                  <a:srgbClr val="444444"/>
-                </a:solidFill>
-                <a:latin typeface="Meiryo"/>
-              </a:rPr>
-              <a:t>厚い外被（防水・耐候）</a:t>
-            </a:r>
-          </a:p>
-        </p:txBody>
-      </p:sp>
-      <p:sp>
-        <p:nvSpPr>
-          <p:cNvPr id="29" name="Rounded Rectangle 28"/>
-          <p:cNvSpPr/>
-          <p:nvPr/>
-        </p:nvSpPr>
-        <p:spPr>
-          <a:xfrm>
-            <a:off x="868680" y="5843016"/>
-            <a:ext cx="1737360" cy="566928"/>
-          </a:xfrm>
-          <a:prstGeom prst="roundRect">
-            <a:avLst/>
-          </a:prstGeom>
-          <a:solidFill>
-            <a:srgbClr val="1F3A5F"/>
-          </a:solidFill>
-          <a:ln w="12700">
-            <a:solidFill>
-              <a:srgbClr val="1F3A5F"/>
-            </a:solidFill>
-          </a:ln>
-          <a:effectLst/>
-        </p:spPr>
-        <p:style>
-          <a:lnRef idx="1">
-            <a:schemeClr val="accent1"/>
-          </a:lnRef>
-          <a:fillRef idx="3">
-            <a:schemeClr val="accent1"/>
-          </a:fillRef>
-          <a:effectRef idx="2">
-            <a:schemeClr val="accent1"/>
-          </a:effectRef>
-          <a:fontRef idx="minor">
-            <a:schemeClr val="lt1"/>
-          </a:fontRef>
-        </p:style>
-        <p:txBody>
-          <a:bodyPr rtlCol="0" anchor="ctr" wrap="square"/>
-          <a:lstStyle/>
-          <a:p>
-            <a:pPr algn="ctr"/>
-            <a:r>
-              <a:rPr sz="1200" b="1">
-                <a:solidFill>
-                  <a:srgbClr val="FFFFFF"/>
-                </a:solidFill>
-                <a:latin typeface="Meiryo"/>
-              </a:rPr>
-              <a:t>機器</a:t>
-            </a:r>
-          </a:p>
-        </p:txBody>
-      </p:sp>
-      <p:cxnSp>
-        <p:nvCxnSpPr>
-          <p:cNvPr id="30" name="Connector 29"/>
-          <p:cNvCxnSpPr/>
-          <p:nvPr/>
-        </p:nvCxnSpPr>
-        <p:spPr>
-          <a:xfrm>
-            <a:off x="2606040" y="6126480"/>
-            <a:ext cx="1325880" cy="0"/>
-          </a:xfrm>
-          <a:prstGeom prst="line">
-            <a:avLst/>
-          </a:prstGeom>
-          <a:ln w="19050">
-            <a:solidFill>
-              <a:srgbClr val="2E6DB4"/>
-            </a:solidFill>
-            <a:tailEnd type="triangle" w="med" len="med"/>
-          </a:ln>
-        </p:spPr>
-        <p:style>
-          <a:lnRef idx="2">
-            <a:schemeClr val="accent1"/>
-          </a:lnRef>
-          <a:fillRef idx="0">
-            <a:schemeClr val="accent1"/>
-          </a:fillRef>
-          <a:effectRef idx="1">
-            <a:schemeClr val="accent1"/>
-          </a:effectRef>
-          <a:fontRef idx="minor">
-            <a:schemeClr val="tx1"/>
-          </a:fontRef>
-        </p:style>
-      </p:cxnSp>
-      <p:sp>
-        <p:nvSpPr>
-          <p:cNvPr id="31" name="TextBox 30"/>
-          <p:cNvSpPr txBox="1"/>
-          <p:nvPr/>
-        </p:nvSpPr>
-        <p:spPr>
-          <a:xfrm>
-            <a:off x="2606040" y="5760720"/>
-            <a:ext cx="1325880" cy="274320"/>
-          </a:xfrm>
-          <a:prstGeom prst="rect">
-            <a:avLst/>
-          </a:prstGeom>
-          <a:noFill/>
-        </p:spPr>
-        <p:txBody>
-          <a:bodyPr wrap="square" tIns="0" bIns="0">
-            <a:spAutoFit/>
-          </a:bodyPr>
-          <a:lstStyle/>
-          <a:p>
-            <a:pPr algn="ctr"/>
-            <a:r>
-              <a:rPr sz="1100" b="0">
-                <a:solidFill>
-                  <a:srgbClr val="2E6DB4"/>
-                </a:solidFill>
-                <a:latin typeface="Meiryo"/>
-              </a:rPr>
-              <a:t>コード(細)</a:t>
-            </a:r>
-          </a:p>
-        </p:txBody>
-      </p:sp>
-      <p:sp>
-        <p:nvSpPr>
-          <p:cNvPr id="32" name="Rounded Rectangle 31"/>
-          <p:cNvSpPr/>
-          <p:nvPr/>
-        </p:nvSpPr>
-        <p:spPr>
-          <a:xfrm>
-            <a:off x="3931920" y="5843016"/>
-            <a:ext cx="1828800" cy="566928"/>
-          </a:xfrm>
-          <a:prstGeom prst="roundRect">
-            <a:avLst/>
-          </a:prstGeom>
-          <a:solidFill>
-            <a:srgbClr val="1F3A5F"/>
-          </a:solidFill>
-          <a:ln w="12700">
-            <a:solidFill>
-              <a:srgbClr val="1F3A5F"/>
-            </a:solidFill>
-          </a:ln>
-          <a:effectLst/>
-        </p:spPr>
-        <p:style>
-          <a:lnRef idx="1">
-            <a:schemeClr val="accent1"/>
-          </a:lnRef>
-          <a:fillRef idx="3">
-            <a:schemeClr val="accent1"/>
-          </a:fillRef>
-          <a:effectRef idx="2">
-            <a:schemeClr val="accent1"/>
-          </a:effectRef>
-          <a:fontRef idx="minor">
-            <a:schemeClr val="lt1"/>
-          </a:fontRef>
-        </p:style>
-        <p:txBody>
-          <a:bodyPr rtlCol="0" anchor="ctr" wrap="square"/>
-          <a:lstStyle/>
-          <a:p>
-            <a:pPr algn="ctr"/>
-            <a:r>
-              <a:rPr sz="1200" b="1">
-                <a:solidFill>
-                  <a:srgbClr val="FFFFFF"/>
-                </a:solidFill>
-                <a:latin typeface="Meiryo"/>
-              </a:rPr>
-              <a:t>成端箱</a:t>
-            </a:r>
-          </a:p>
-        </p:txBody>
-      </p:sp>
-      <p:cxnSp>
-        <p:nvCxnSpPr>
-          <p:cNvPr id="33" name="Connector 32"/>
-          <p:cNvCxnSpPr/>
-          <p:nvPr/>
-        </p:nvCxnSpPr>
-        <p:spPr>
-          <a:xfrm>
-            <a:off x="5760720" y="6126480"/>
-            <a:ext cx="2560320" cy="0"/>
-          </a:xfrm>
-          <a:prstGeom prst="line">
-            <a:avLst/>
-          </a:prstGeom>
-          <a:ln w="57150">
-            <a:solidFill>
-              <a:srgbClr val="1F3A5F"/>
-            </a:solidFill>
-            <a:tailEnd type="triangle" w="med" len="med"/>
-          </a:ln>
-        </p:spPr>
-        <p:style>
-          <a:lnRef idx="2">
-            <a:schemeClr val="accent1"/>
-          </a:lnRef>
-          <a:fillRef idx="0">
-            <a:schemeClr val="accent1"/>
-          </a:fillRef>
-          <a:effectRef idx="1">
-            <a:schemeClr val="accent1"/>
-          </a:effectRef>
-          <a:fontRef idx="minor">
-            <a:schemeClr val="tx1"/>
-          </a:fontRef>
-        </p:style>
-      </p:cxnSp>
-      <p:sp>
-        <p:nvSpPr>
-          <p:cNvPr id="34" name="TextBox 33"/>
-          <p:cNvSpPr txBox="1"/>
-          <p:nvPr/>
-        </p:nvSpPr>
-        <p:spPr>
-          <a:xfrm>
-            <a:off x="5760720" y="5760720"/>
-            <a:ext cx="2560320" cy="274320"/>
-          </a:xfrm>
-          <a:prstGeom prst="rect">
-            <a:avLst/>
-          </a:prstGeom>
-          <a:noFill/>
-        </p:spPr>
-        <p:txBody>
-          <a:bodyPr wrap="square" tIns="0" bIns="0">
-            <a:spAutoFit/>
-          </a:bodyPr>
-          <a:lstStyle/>
-          <a:p>
-            <a:pPr algn="ctr"/>
-            <a:r>
-              <a:rPr sz="1100" b="0">
-                <a:solidFill>
-                  <a:srgbClr val="1F3A5F"/>
-                </a:solidFill>
-                <a:latin typeface="Meiryo"/>
-              </a:rPr>
-              <a:t>ケーブル(太)</a:t>
-            </a:r>
-          </a:p>
-        </p:txBody>
-      </p:sp>
-      <p:sp>
-        <p:nvSpPr>
-          <p:cNvPr id="35" name="Rounded Rectangle 34"/>
-          <p:cNvSpPr/>
-          <p:nvPr/>
-        </p:nvSpPr>
-        <p:spPr>
-          <a:xfrm>
-            <a:off x="8321040" y="5843016"/>
-            <a:ext cx="2377440" cy="566928"/>
-          </a:xfrm>
-          <a:prstGeom prst="roundRect">
-            <a:avLst/>
-          </a:prstGeom>
-          <a:solidFill>
-            <a:srgbClr val="1F3A5F"/>
-          </a:solidFill>
-          <a:ln w="12700">
-            <a:solidFill>
-              <a:srgbClr val="1F3A5F"/>
-            </a:solidFill>
-          </a:ln>
-          <a:effectLst/>
-        </p:spPr>
-        <p:style>
-          <a:lnRef idx="1">
-            <a:schemeClr val="accent1"/>
-          </a:lnRef>
-          <a:fillRef idx="3">
-            <a:schemeClr val="accent1"/>
-          </a:fillRef>
-          <a:effectRef idx="2">
-            <a:schemeClr val="accent1"/>
-          </a:effectRef>
-          <a:fontRef idx="minor">
-            <a:schemeClr val="lt1"/>
-          </a:fontRef>
-        </p:style>
-        <p:txBody>
-          <a:bodyPr rtlCol="0" anchor="ctr" wrap="square"/>
-          <a:lstStyle/>
-          <a:p>
-            <a:pPr algn="ctr"/>
-            <a:r>
-              <a:rPr sz="1200" b="1">
-                <a:solidFill>
-                  <a:srgbClr val="FFFFFF"/>
-                </a:solidFill>
-                <a:latin typeface="Meiryo"/>
-              </a:rPr>
-              <a:t>屋外・電柱・地中</a:t>
-            </a:r>
-          </a:p>
-        </p:txBody>
-      </p:sp>
+        </p:nvGraphicFramePr>
+        <p:xfrm>
+          <a:off x="548640" y="1325880"/>
+          <a:ext cx="11064240" cy="4389120"/>
+        </p:xfrm>
+        <a:graphic>
+          <a:graphicData uri="http://schemas.openxmlformats.org/drawingml/2006/table">
+            <a:tbl>
+              <a:tblPr firstRow="1" bandRow="1">
+                <a:tableStyleId>{5C22544A-7EE6-4342-B048-85BDC9FD1C3A}</a:tableStyleId>
+              </a:tblPr>
+              <a:tblGrid>
+                <a:gridCol w="2103120"/>
+                <a:gridCol w="4480560"/>
+                <a:gridCol w="4480560"/>
+              </a:tblGrid>
+              <a:tr h="731520">
+                <a:tc>
+                  <a:txBody>
+                    <a:bodyPr wrap="square"/>
+                    <a:lstStyle/>
+                    <a:p>
+                      <a:pPr algn="ctr"/>
+                      <a:r>
+                        <a:rPr sz="1500" b="1">
+                          <a:solidFill>
+                            <a:srgbClr val="FFFFFF"/>
+                          </a:solidFill>
+                          <a:latin typeface="Meiryo"/>
+                        </a:rPr>
+                        <a:t>観点</a:t>
+                      </a:r>
+                    </a:p>
+                  </a:txBody>
+                  <a:tcPr>
+                    <a:solidFill>
+                      <a:srgbClr val="1F3A5F"/>
+                    </a:solidFill>
+                  </a:tcPr>
+                </a:tc>
+                <a:tc>
+                  <a:txBody>
+                    <a:bodyPr wrap="square"/>
+                    <a:lstStyle/>
+                    <a:p>
+                      <a:pPr algn="ctr"/>
+                      <a:r>
+                        <a:rPr sz="1500" b="1">
+                          <a:solidFill>
+                            <a:srgbClr val="FFFFFF"/>
+                          </a:solidFill>
+                          <a:latin typeface="Meiryo"/>
+                        </a:rPr>
+                        <a:t>成端箱</a:t>
+                      </a:r>
+                    </a:p>
+                  </a:txBody>
+                  <a:tcPr>
+                    <a:solidFill>
+                      <a:srgbClr val="1F3A5F"/>
+                    </a:solidFill>
+                  </a:tcPr>
+                </a:tc>
+                <a:tc>
+                  <a:txBody>
+                    <a:bodyPr wrap="square"/>
+                    <a:lstStyle/>
+                    <a:p>
+                      <a:pPr algn="ctr"/>
+                      <a:r>
+                        <a:rPr sz="1500" b="1">
+                          <a:solidFill>
+                            <a:srgbClr val="FFFFFF"/>
+                          </a:solidFill>
+                          <a:latin typeface="Meiryo"/>
+                        </a:rPr>
+                        <a:t>クロージャ</a:t>
+                      </a:r>
+                    </a:p>
+                  </a:txBody>
+                  <a:tcPr>
+                    <a:solidFill>
+                      <a:srgbClr val="1F3A5F"/>
+                    </a:solidFill>
+                  </a:tcPr>
+                </a:tc>
+              </a:tr>
+              <a:tr h="731520">
+                <a:tc>
+                  <a:txBody>
+                    <a:bodyPr wrap="square"/>
+                    <a:lstStyle/>
+                    <a:p>
+                      <a:r>
+                        <a:rPr sz="1500" b="1">
+                          <a:solidFill>
+                            <a:srgbClr val="1F3A5F"/>
+                          </a:solidFill>
+                          <a:latin typeface="Meiryo"/>
+                        </a:rPr>
+                        <a:t>位置</a:t>
+                      </a:r>
+                    </a:p>
+                  </a:txBody>
+                  <a:tcPr>
+                    <a:solidFill>
+                      <a:srgbClr val="EDF3FA"/>
+                    </a:solidFill>
+                  </a:tcPr>
+                </a:tc>
+                <a:tc>
+                  <a:txBody>
+                    <a:bodyPr wrap="square"/>
+                    <a:lstStyle/>
+                    <a:p>
+                      <a:r>
+                        <a:rPr sz="1500" b="0">
+                          <a:solidFill>
+                            <a:srgbClr val="444444"/>
+                          </a:solidFill>
+                          <a:latin typeface="Meiryo"/>
+                        </a:rPr>
+                        <a:t>ケーブルの端末</a:t>
+                      </a:r>
+                    </a:p>
+                  </a:txBody>
+                  <a:tcPr>
+                    <a:solidFill>
+                      <a:srgbClr val="EDF3FA"/>
+                    </a:solidFill>
+                  </a:tcPr>
+                </a:tc>
+                <a:tc>
+                  <a:txBody>
+                    <a:bodyPr wrap="square"/>
+                    <a:lstStyle/>
+                    <a:p>
+                      <a:r>
+                        <a:rPr sz="1500" b="0">
+                          <a:solidFill>
+                            <a:srgbClr val="444444"/>
+                          </a:solidFill>
+                          <a:latin typeface="Meiryo"/>
+                        </a:rPr>
+                        <a:t>ケーブルの途中</a:t>
+                      </a:r>
+                    </a:p>
+                  </a:txBody>
+                  <a:tcPr>
+                    <a:solidFill>
+                      <a:srgbClr val="EDF3FA"/>
+                    </a:solidFill>
+                  </a:tcPr>
+                </a:tc>
+              </a:tr>
+              <a:tr h="731520">
+                <a:tc>
+                  <a:txBody>
+                    <a:bodyPr wrap="square"/>
+                    <a:lstStyle/>
+                    <a:p>
+                      <a:r>
+                        <a:rPr sz="1500" b="1">
+                          <a:solidFill>
+                            <a:srgbClr val="1F3A5F"/>
+                          </a:solidFill>
+                          <a:latin typeface="Meiryo"/>
+                        </a:rPr>
+                        <a:t>主目的</a:t>
+                      </a:r>
+                    </a:p>
+                  </a:txBody>
+                  <a:tcPr>
+                    <a:solidFill>
+                      <a:srgbClr val="FFFFFF"/>
+                    </a:solidFill>
+                  </a:tcPr>
+                </a:tc>
+                <a:tc>
+                  <a:txBody>
+                    <a:bodyPr wrap="square"/>
+                    <a:lstStyle/>
+                    <a:p>
+                      <a:r>
+                        <a:rPr sz="1500" b="0">
+                          <a:solidFill>
+                            <a:srgbClr val="444444"/>
+                          </a:solidFill>
+                          <a:latin typeface="Meiryo"/>
+                        </a:rPr>
+                        <a:t>心線をコネクタ化(成端)して機器へ</a:t>
+                      </a:r>
+                    </a:p>
+                  </a:txBody>
+                  <a:tcPr>
+                    <a:solidFill>
+                      <a:srgbClr val="FFFFFF"/>
+                    </a:solidFill>
+                  </a:tcPr>
+                </a:tc>
+                <a:tc>
+                  <a:txBody>
+                    <a:bodyPr wrap="square"/>
+                    <a:lstStyle/>
+                    <a:p>
+                      <a:r>
+                        <a:rPr sz="1500" b="0">
+                          <a:solidFill>
+                            <a:srgbClr val="444444"/>
+                          </a:solidFill>
+                          <a:latin typeface="Meiryo"/>
+                        </a:rPr>
+                        <a:t>接続・分岐点を保護・収納</a:t>
+                      </a:r>
+                    </a:p>
+                  </a:txBody>
+                  <a:tcPr>
+                    <a:solidFill>
+                      <a:srgbClr val="FFFFFF"/>
+                    </a:solidFill>
+                  </a:tcPr>
+                </a:tc>
+              </a:tr>
+              <a:tr h="731520">
+                <a:tc>
+                  <a:txBody>
+                    <a:bodyPr wrap="square"/>
+                    <a:lstStyle/>
+                    <a:p>
+                      <a:r>
+                        <a:rPr sz="1500" b="1">
+                          <a:solidFill>
+                            <a:srgbClr val="1F3A5F"/>
+                          </a:solidFill>
+                          <a:latin typeface="Meiryo"/>
+                        </a:rPr>
+                        <a:t>設置場所</a:t>
+                      </a:r>
+                    </a:p>
+                  </a:txBody>
+                  <a:tcPr>
+                    <a:solidFill>
+                      <a:srgbClr val="EDF3FA"/>
+                    </a:solidFill>
+                  </a:tcPr>
+                </a:tc>
+                <a:tc>
+                  <a:txBody>
+                    <a:bodyPr wrap="square"/>
+                    <a:lstStyle/>
+                    <a:p>
+                      <a:r>
+                        <a:rPr sz="1500" b="0">
+                          <a:solidFill>
+                            <a:srgbClr val="444444"/>
+                          </a:solidFill>
+                          <a:latin typeface="Meiryo"/>
+                        </a:rPr>
+                        <a:t>屋内が中心</a:t>
+                      </a:r>
+                    </a:p>
+                  </a:txBody>
+                  <a:tcPr>
+                    <a:solidFill>
+                      <a:srgbClr val="EDF3FA"/>
+                    </a:solidFill>
+                  </a:tcPr>
+                </a:tc>
+                <a:tc>
+                  <a:txBody>
+                    <a:bodyPr wrap="square"/>
+                    <a:lstStyle/>
+                    <a:p>
+                      <a:r>
+                        <a:rPr sz="1500" b="0">
+                          <a:solidFill>
+                            <a:srgbClr val="444444"/>
+                          </a:solidFill>
+                          <a:latin typeface="Meiryo"/>
+                        </a:rPr>
+                        <a:t>屋外(架空・地中)が中心</a:t>
+                      </a:r>
+                    </a:p>
+                  </a:txBody>
+                  <a:tcPr>
+                    <a:solidFill>
+                      <a:srgbClr val="EDF3FA"/>
+                    </a:solidFill>
+                  </a:tcPr>
+                </a:tc>
+              </a:tr>
+              <a:tr h="731520">
+                <a:tc>
+                  <a:txBody>
+                    <a:bodyPr wrap="square"/>
+                    <a:lstStyle/>
+                    <a:p>
+                      <a:r>
+                        <a:rPr sz="1500" b="1">
+                          <a:solidFill>
+                            <a:srgbClr val="1F3A5F"/>
+                          </a:solidFill>
+                          <a:latin typeface="Meiryo"/>
+                        </a:rPr>
+                        <a:t>防水</a:t>
+                      </a:r>
+                    </a:p>
+                  </a:txBody>
+                  <a:tcPr>
+                    <a:solidFill>
+                      <a:srgbClr val="FFFFFF"/>
+                    </a:solidFill>
+                  </a:tcPr>
+                </a:tc>
+                <a:tc>
+                  <a:txBody>
+                    <a:bodyPr wrap="square"/>
+                    <a:lstStyle/>
+                    <a:p>
+                      <a:r>
+                        <a:rPr sz="1500" b="0">
+                          <a:solidFill>
+                            <a:srgbClr val="444444"/>
+                          </a:solidFill>
+                          <a:latin typeface="Meiryo"/>
+                        </a:rPr>
+                        <a:t>屋内前提(屋外型もあり)</a:t>
+                      </a:r>
+                    </a:p>
+                  </a:txBody>
+                  <a:tcPr>
+                    <a:solidFill>
+                      <a:srgbClr val="FFFFFF"/>
+                    </a:solidFill>
+                  </a:tcPr>
+                </a:tc>
+                <a:tc>
+                  <a:txBody>
+                    <a:bodyPr wrap="square"/>
+                    <a:lstStyle/>
+                    <a:p>
+                      <a:r>
+                        <a:rPr sz="1500" b="0">
+                          <a:solidFill>
+                            <a:srgbClr val="444444"/>
+                          </a:solidFill>
+                          <a:latin typeface="Meiryo"/>
+                        </a:rPr>
+                        <a:t>防水・防塵が前提</a:t>
+                      </a:r>
+                    </a:p>
+                  </a:txBody>
+                  <a:tcPr>
+                    <a:solidFill>
+                      <a:srgbClr val="FFFFFF"/>
+                    </a:solidFill>
+                  </a:tcPr>
+                </a:tc>
+              </a:tr>
+              <a:tr h="731520">
+                <a:tc>
+                  <a:txBody>
+                    <a:bodyPr wrap="square"/>
+                    <a:lstStyle/>
+                    <a:p>
+                      <a:r>
+                        <a:rPr sz="1500" b="1">
+                          <a:solidFill>
+                            <a:srgbClr val="1F3A5F"/>
+                          </a:solidFill>
+                          <a:latin typeface="Meiryo"/>
+                        </a:rPr>
+                        <a:t>イメージ</a:t>
+                      </a:r>
+                    </a:p>
+                  </a:txBody>
+                  <a:tcPr>
+                    <a:solidFill>
+                      <a:srgbClr val="EDF3FA"/>
+                    </a:solidFill>
+                  </a:tcPr>
+                </a:tc>
+                <a:tc>
+                  <a:txBody>
+                    <a:bodyPr wrap="square"/>
+                    <a:lstStyle/>
+                    <a:p>
+                      <a:r>
+                        <a:rPr sz="1500" b="0">
+                          <a:solidFill>
+                            <a:srgbClr val="444444"/>
+                          </a:solidFill>
+                          <a:latin typeface="Meiryo"/>
+                        </a:rPr>
+                        <a:t>配線盤/パッチパネル</a:t>
+                      </a:r>
+                    </a:p>
+                  </a:txBody>
+                  <a:tcPr>
+                    <a:solidFill>
+                      <a:srgbClr val="EDF3FA"/>
+                    </a:solidFill>
+                  </a:tcPr>
+                </a:tc>
+                <a:tc>
+                  <a:txBody>
+                    <a:bodyPr wrap="square"/>
+                    <a:lstStyle/>
+                    <a:p>
+                      <a:r>
+                        <a:rPr sz="1500" b="0">
+                          <a:solidFill>
+                            <a:srgbClr val="444444"/>
+                          </a:solidFill>
+                          <a:latin typeface="Meiryo"/>
+                        </a:rPr>
+                        <a:t>電線途中の保護ボックス</a:t>
+                      </a:r>
+                    </a:p>
+                  </a:txBody>
+                  <a:tcPr>
+                    <a:solidFill>
+                      <a:srgbClr val="EDF3FA"/>
+                    </a:solidFill>
+                  </a:tcPr>
+                </a:tc>
+              </a:tr>
+            </a:tbl>
+          </a:graphicData>
+        </a:graphic>
+      </p:graphicFrame>
     </p:spTree>
   </p:cSld>
   <p:clrMapOvr>
@@ -6931,7 +5959,7 @@
                 </a:solidFill>
                 <a:latin typeface="Meiryo"/>
               </a:rPr>
-              <a:t>成端箱とクロージャの違い</a:t>
+              <a:t>コネクタと規格（つなぎ口の種類）</a:t>
             </a:r>
           </a:p>
         </p:txBody>
@@ -6945,8 +5973,8 @@
           <p:nvPr/>
         </p:nvGraphicFramePr>
         <p:xfrm>
-          <a:off x="548640" y="1325880"/>
-          <a:ext cx="11064240" cy="4389120"/>
+          <a:off x="822960" y="1737360"/>
+          <a:ext cx="10515600" cy="3474720"/>
         </p:xfrm>
         <a:graphic>
           <a:graphicData uri="http://schemas.openxmlformats.org/drawingml/2006/table">
@@ -6955,11 +5983,11 @@
                 <a:tableStyleId>{5C22544A-7EE6-4342-B048-85BDC9FD1C3A}</a:tableStyleId>
               </a:tblPr>
               <a:tblGrid>
-                <a:gridCol w="2103120"/>
-                <a:gridCol w="4480560"/>
-                <a:gridCol w="4480560"/>
+                <a:gridCol w="1737360"/>
+                <a:gridCol w="5212080"/>
+                <a:gridCol w="3566160"/>
               </a:tblGrid>
-              <a:tr h="731520">
+              <a:tr h="694944">
                 <a:tc>
                   <a:txBody>
                     <a:bodyPr wrap="square"/>
@@ -6967,13 +5995,13 @@
                     <a:p>
                       <a:pPr algn="ctr"/>
                       <a:r>
-                        <a:rPr sz="1500" b="1">
+                        <a:rPr sz="1700" b="1">
                           <a:solidFill>
                             <a:srgbClr val="FFFFFF"/>
                           </a:solidFill>
                           <a:latin typeface="Meiryo"/>
                         </a:rPr>
-                        <a:t>観点</a:t>
+                        <a:t>コネクタ</a:t>
                       </a:r>
                     </a:p>
                   </a:txBody>
@@ -6990,13 +6018,13 @@
                     <a:p>
                       <a:pPr algn="ctr"/>
                       <a:r>
-                        <a:rPr sz="1500" b="1">
+                        <a:rPr sz="1700" b="1">
                           <a:solidFill>
                             <a:srgbClr val="FFFFFF"/>
                           </a:solidFill>
                           <a:latin typeface="Meiryo"/>
                         </a:rPr>
-                        <a:t>成端箱</a:t>
+                        <a:t>形・固定方法</a:t>
                       </a:r>
                     </a:p>
                   </a:txBody>
@@ -7013,13 +6041,13 @@
                     <a:p>
                       <a:pPr algn="ctr"/>
                       <a:r>
-                        <a:rPr sz="1500" b="1">
+                        <a:rPr sz="1700" b="1">
                           <a:solidFill>
                             <a:srgbClr val="FFFFFF"/>
                           </a:solidFill>
                           <a:latin typeface="Meiryo"/>
                         </a:rPr>
-                        <a:t>クロージャ</a:t>
+                        <a:t>よく見る場所</a:t>
                       </a:r>
                     </a:p>
                   </a:txBody>
@@ -7030,20 +6058,20 @@
                   </a:tcPr>
                 </a:tc>
               </a:tr>
-              <a:tr h="731520">
-                <a:tc>
-                  <a:txBody>
-                    <a:bodyPr wrap="square"/>
-                    <a:lstStyle/>
-                    <a:p>
-                      <a:r>
-                        <a:rPr sz="1500" b="1">
+              <a:tr h="694944">
+                <a:tc>
+                  <a:txBody>
+                    <a:bodyPr wrap="square"/>
+                    <a:lstStyle/>
+                    <a:p>
+                      <a:r>
+                        <a:rPr sz="1700" b="1">
                           <a:solidFill>
                             <a:srgbClr val="1F3A5F"/>
                           </a:solidFill>
                           <a:latin typeface="Meiryo"/>
                         </a:rPr>
-                        <a:t>位置</a:t>
+                        <a:t>SC</a:t>
                       </a:r>
                     </a:p>
                   </a:txBody>
@@ -7059,13 +6087,13 @@
                     <a:lstStyle/>
                     <a:p>
                       <a:r>
-                        <a:rPr sz="1500" b="0">
+                        <a:rPr sz="1700" b="0">
                           <a:solidFill>
                             <a:srgbClr val="444444"/>
                           </a:solidFill>
                           <a:latin typeface="Meiryo"/>
                         </a:rPr>
-                        <a:t>ケーブルの端末</a:t>
+                        <a:t>四角形・押して固定（プッシュプル）</a:t>
                       </a:r>
                     </a:p>
                   </a:txBody>
@@ -7081,13 +6109,13 @@
                     <a:lstStyle/>
                     <a:p>
                       <a:r>
-                        <a:rPr sz="1500" b="0">
+                        <a:rPr sz="1700" b="0">
                           <a:solidFill>
                             <a:srgbClr val="444444"/>
                           </a:solidFill>
                           <a:latin typeface="Meiryo"/>
                         </a:rPr>
-                        <a:t>ケーブルの途中</a:t>
+                        <a:t>家庭のONU・通信機器</a:t>
                       </a:r>
                     </a:p>
                   </a:txBody>
@@ -7098,20 +6126,20 @@
                   </a:tcPr>
                 </a:tc>
               </a:tr>
-              <a:tr h="731520">
-                <a:tc>
-                  <a:txBody>
-                    <a:bodyPr wrap="square"/>
-                    <a:lstStyle/>
-                    <a:p>
-                      <a:r>
-                        <a:rPr sz="1500" b="1">
+              <a:tr h="694944">
+                <a:tc>
+                  <a:txBody>
+                    <a:bodyPr wrap="square"/>
+                    <a:lstStyle/>
+                    <a:p>
+                      <a:r>
+                        <a:rPr sz="1700" b="1">
                           <a:solidFill>
                             <a:srgbClr val="1F3A5F"/>
                           </a:solidFill>
                           <a:latin typeface="Meiryo"/>
                         </a:rPr>
-                        <a:t>主目的</a:t>
+                        <a:t>LC</a:t>
                       </a:r>
                     </a:p>
                   </a:txBody>
@@ -7127,13 +6155,13 @@
                     <a:lstStyle/>
                     <a:p>
                       <a:r>
-                        <a:rPr sz="1500" b="0">
+                        <a:rPr sz="1700" b="0">
                           <a:solidFill>
                             <a:srgbClr val="444444"/>
                           </a:solidFill>
                           <a:latin typeface="Meiryo"/>
                         </a:rPr>
-                        <a:t>心線をコネクタ化(成端)して機器へ</a:t>
+                        <a:t>SCを小型化・ツメで固定</a:t>
                       </a:r>
                     </a:p>
                   </a:txBody>
@@ -7149,13 +6177,13 @@
                     <a:lstStyle/>
                     <a:p>
                       <a:r>
-                        <a:rPr sz="1500" b="0">
+                        <a:rPr sz="1700" b="0">
                           <a:solidFill>
                             <a:srgbClr val="444444"/>
                           </a:solidFill>
                           <a:latin typeface="Meiryo"/>
                         </a:rPr>
-                        <a:t>接続・分岐点を保護・収納</a:t>
+                        <a:t>データセンター・スイッチ</a:t>
                       </a:r>
                     </a:p>
                   </a:txBody>
@@ -7166,20 +6194,20 @@
                   </a:tcPr>
                 </a:tc>
               </a:tr>
-              <a:tr h="731520">
-                <a:tc>
-                  <a:txBody>
-                    <a:bodyPr wrap="square"/>
-                    <a:lstStyle/>
-                    <a:p>
-                      <a:r>
-                        <a:rPr sz="1500" b="1">
+              <a:tr h="694944">
+                <a:tc>
+                  <a:txBody>
+                    <a:bodyPr wrap="square"/>
+                    <a:lstStyle/>
+                    <a:p>
+                      <a:r>
+                        <a:rPr sz="1700" b="1">
                           <a:solidFill>
                             <a:srgbClr val="1F3A5F"/>
                           </a:solidFill>
                           <a:latin typeface="Meiryo"/>
                         </a:rPr>
-                        <a:t>設置場所</a:t>
+                        <a:t>ST</a:t>
                       </a:r>
                     </a:p>
                   </a:txBody>
@@ -7195,13 +6223,13 @@
                     <a:lstStyle/>
                     <a:p>
                       <a:r>
-                        <a:rPr sz="1500" b="0">
+                        <a:rPr sz="1700" b="0">
                           <a:solidFill>
                             <a:srgbClr val="444444"/>
                           </a:solidFill>
                           <a:latin typeface="Meiryo"/>
                         </a:rPr>
-                        <a:t>屋内が中心</a:t>
+                        <a:t>丸型・ひねって固定（バヨネット）</a:t>
                       </a:r>
                     </a:p>
                   </a:txBody>
@@ -7217,13 +6245,13 @@
                     <a:lstStyle/>
                     <a:p>
                       <a:r>
-                        <a:rPr sz="1500" b="0">
+                        <a:rPr sz="1700" b="0">
                           <a:solidFill>
                             <a:srgbClr val="444444"/>
                           </a:solidFill>
                           <a:latin typeface="Meiryo"/>
                         </a:rPr>
-                        <a:t>屋外(架空・地中)が中心</a:t>
+                        <a:t>古めの設備・LAN</a:t>
                       </a:r>
                     </a:p>
                   </a:txBody>
@@ -7234,20 +6262,20 @@
                   </a:tcPr>
                 </a:tc>
               </a:tr>
-              <a:tr h="731520">
-                <a:tc>
-                  <a:txBody>
-                    <a:bodyPr wrap="square"/>
-                    <a:lstStyle/>
-                    <a:p>
-                      <a:r>
-                        <a:rPr sz="1500" b="1">
+              <a:tr h="694944">
+                <a:tc>
+                  <a:txBody>
+                    <a:bodyPr wrap="square"/>
+                    <a:lstStyle/>
+                    <a:p>
+                      <a:r>
+                        <a:rPr sz="1700" b="1">
                           <a:solidFill>
                             <a:srgbClr val="1F3A5F"/>
                           </a:solidFill>
                           <a:latin typeface="Meiryo"/>
                         </a:rPr>
-                        <a:t>防水</a:t>
+                        <a:t>FC</a:t>
                       </a:r>
                     </a:p>
                   </a:txBody>
@@ -7263,13 +6291,13 @@
                     <a:lstStyle/>
                     <a:p>
                       <a:r>
-                        <a:rPr sz="1500" b="0">
+                        <a:rPr sz="1700" b="0">
                           <a:solidFill>
                             <a:srgbClr val="444444"/>
                           </a:solidFill>
                           <a:latin typeface="Meiryo"/>
                         </a:rPr>
-                        <a:t>屋内前提(屋外型もあり)</a:t>
+                        <a:t>丸型・ねじで締めて固定</a:t>
                       </a:r>
                     </a:p>
                   </a:txBody>
@@ -7285,87 +6313,19 @@
                     <a:lstStyle/>
                     <a:p>
                       <a:r>
-                        <a:rPr sz="1500" b="0">
+                        <a:rPr sz="1700" b="0">
                           <a:solidFill>
                             <a:srgbClr val="444444"/>
                           </a:solidFill>
                           <a:latin typeface="Meiryo"/>
                         </a:rPr>
-                        <a:t>防水・防塵が前提</a:t>
+                        <a:t>計測器・産業用</a:t>
                       </a:r>
                     </a:p>
                   </a:txBody>
                   <a:tcPr>
                     <a:solidFill>
                       <a:srgbClr val="FFFFFF"/>
-                    </a:solidFill>
-                  </a:tcPr>
-                </a:tc>
-              </a:tr>
-              <a:tr h="731520">
-                <a:tc>
-                  <a:txBody>
-                    <a:bodyPr wrap="square"/>
-                    <a:lstStyle/>
-                    <a:p>
-                      <a:r>
-                        <a:rPr sz="1500" b="1">
-                          <a:solidFill>
-                            <a:srgbClr val="1F3A5F"/>
-                          </a:solidFill>
-                          <a:latin typeface="Meiryo"/>
-                        </a:rPr>
-                        <a:t>イメージ</a:t>
-                      </a:r>
-                    </a:p>
-                  </a:txBody>
-                  <a:tcPr>
-                    <a:solidFill>
-                      <a:srgbClr val="EDF3FA"/>
-                    </a:solidFill>
-                  </a:tcPr>
-                </a:tc>
-                <a:tc>
-                  <a:txBody>
-                    <a:bodyPr wrap="square"/>
-                    <a:lstStyle/>
-                    <a:p>
-                      <a:r>
-                        <a:rPr sz="1500" b="0">
-                          <a:solidFill>
-                            <a:srgbClr val="444444"/>
-                          </a:solidFill>
-                          <a:latin typeface="Meiryo"/>
-                        </a:rPr>
-                        <a:t>配線盤/パッチパネル</a:t>
-                      </a:r>
-                    </a:p>
-                  </a:txBody>
-                  <a:tcPr>
-                    <a:solidFill>
-                      <a:srgbClr val="EDF3FA"/>
-                    </a:solidFill>
-                  </a:tcPr>
-                </a:tc>
-                <a:tc>
-                  <a:txBody>
-                    <a:bodyPr wrap="square"/>
-                    <a:lstStyle/>
-                    <a:p>
-                      <a:r>
-                        <a:rPr sz="1500" b="0">
-                          <a:solidFill>
-                            <a:srgbClr val="444444"/>
-                          </a:solidFill>
-                          <a:latin typeface="Meiryo"/>
-                        </a:rPr>
-                        <a:t>電線途中の保護ボックス</a:t>
-                      </a:r>
-                    </a:p>
-                  </a:txBody>
-                  <a:tcPr>
-                    <a:solidFill>
-                      <a:srgbClr val="EDF3FA"/>
                     </a:solidFill>
                   </a:tcPr>
                 </a:tc>
@@ -7447,1278 +6407,6 @@
                 </a:solidFill>
                 <a:latin typeface="Meiryo"/>
               </a:rPr>
-              <a:t>コネクタと規格（つなぎ口の種類）</a:t>
-            </a:r>
-          </a:p>
-        </p:txBody>
-      </p:sp>
-      <p:graphicFrame>
-        <p:nvGraphicFramePr>
-          <p:cNvPr id="3" name="Table 2"/>
-          <p:cNvGraphicFramePr>
-            <a:graphicFrameLocks noGrp="1"/>
-          </p:cNvGraphicFramePr>
-          <p:nvPr/>
-        </p:nvGraphicFramePr>
-        <p:xfrm>
-          <a:off x="548640" y="1280160"/>
-          <a:ext cx="11064240" cy="2286000"/>
-        </p:xfrm>
-        <a:graphic>
-          <a:graphicData uri="http://schemas.openxmlformats.org/drawingml/2006/table">
-            <a:tbl>
-              <a:tblPr firstRow="1" bandRow="1">
-                <a:tableStyleId>{5C22544A-7EE6-4342-B048-85BDC9FD1C3A}</a:tableStyleId>
-              </a:tblPr>
-              <a:tblGrid>
-                <a:gridCol w="1645920"/>
-                <a:gridCol w="5577840"/>
-                <a:gridCol w="3840480"/>
-              </a:tblGrid>
-              <a:tr h="457200">
-                <a:tc>
-                  <a:txBody>
-                    <a:bodyPr wrap="square"/>
-                    <a:lstStyle/>
-                    <a:p>
-                      <a:pPr algn="ctr"/>
-                      <a:r>
-                        <a:rPr sz="1500" b="1">
-                          <a:solidFill>
-                            <a:srgbClr val="FFFFFF"/>
-                          </a:solidFill>
-                          <a:latin typeface="Meiryo"/>
-                        </a:rPr>
-                        <a:t>コネクタ</a:t>
-                      </a:r>
-                    </a:p>
-                  </a:txBody>
-                  <a:tcPr>
-                    <a:solidFill>
-                      <a:srgbClr val="1F3A5F"/>
-                    </a:solidFill>
-                  </a:tcPr>
-                </a:tc>
-                <a:tc>
-                  <a:txBody>
-                    <a:bodyPr wrap="square"/>
-                    <a:lstStyle/>
-                    <a:p>
-                      <a:pPr algn="ctr"/>
-                      <a:r>
-                        <a:rPr sz="1500" b="1">
-                          <a:solidFill>
-                            <a:srgbClr val="FFFFFF"/>
-                          </a:solidFill>
-                          <a:latin typeface="Meiryo"/>
-                        </a:rPr>
-                        <a:t>形・固定方法</a:t>
-                      </a:r>
-                    </a:p>
-                  </a:txBody>
-                  <a:tcPr>
-                    <a:solidFill>
-                      <a:srgbClr val="1F3A5F"/>
-                    </a:solidFill>
-                  </a:tcPr>
-                </a:tc>
-                <a:tc>
-                  <a:txBody>
-                    <a:bodyPr wrap="square"/>
-                    <a:lstStyle/>
-                    <a:p>
-                      <a:pPr algn="ctr"/>
-                      <a:r>
-                        <a:rPr sz="1500" b="1">
-                          <a:solidFill>
-                            <a:srgbClr val="FFFFFF"/>
-                          </a:solidFill>
-                          <a:latin typeface="Meiryo"/>
-                        </a:rPr>
-                        <a:t>よく見る場所</a:t>
-                      </a:r>
-                    </a:p>
-                  </a:txBody>
-                  <a:tcPr>
-                    <a:solidFill>
-                      <a:srgbClr val="1F3A5F"/>
-                    </a:solidFill>
-                  </a:tcPr>
-                </a:tc>
-              </a:tr>
-              <a:tr h="457200">
-                <a:tc>
-                  <a:txBody>
-                    <a:bodyPr wrap="square"/>
-                    <a:lstStyle/>
-                    <a:p>
-                      <a:r>
-                        <a:rPr sz="1500" b="1">
-                          <a:solidFill>
-                            <a:srgbClr val="1F3A5F"/>
-                          </a:solidFill>
-                          <a:latin typeface="Meiryo"/>
-                        </a:rPr>
-                        <a:t>SC</a:t>
-                      </a:r>
-                    </a:p>
-                  </a:txBody>
-                  <a:tcPr>
-                    <a:solidFill>
-                      <a:srgbClr val="EDF3FA"/>
-                    </a:solidFill>
-                  </a:tcPr>
-                </a:tc>
-                <a:tc>
-                  <a:txBody>
-                    <a:bodyPr wrap="square"/>
-                    <a:lstStyle/>
-                    <a:p>
-                      <a:r>
-                        <a:rPr sz="1500" b="0">
-                          <a:solidFill>
-                            <a:srgbClr val="444444"/>
-                          </a:solidFill>
-                          <a:latin typeface="Meiryo"/>
-                        </a:rPr>
-                        <a:t>四角形・押して固定（プッシュプル）</a:t>
-                      </a:r>
-                    </a:p>
-                  </a:txBody>
-                  <a:tcPr>
-                    <a:solidFill>
-                      <a:srgbClr val="EDF3FA"/>
-                    </a:solidFill>
-                  </a:tcPr>
-                </a:tc>
-                <a:tc>
-                  <a:txBody>
-                    <a:bodyPr wrap="square"/>
-                    <a:lstStyle/>
-                    <a:p>
-                      <a:r>
-                        <a:rPr sz="1500" b="0">
-                          <a:solidFill>
-                            <a:srgbClr val="444444"/>
-                          </a:solidFill>
-                          <a:latin typeface="Meiryo"/>
-                        </a:rPr>
-                        <a:t>家庭のONU・通信機器</a:t>
-                      </a:r>
-                    </a:p>
-                  </a:txBody>
-                  <a:tcPr>
-                    <a:solidFill>
-                      <a:srgbClr val="EDF3FA"/>
-                    </a:solidFill>
-                  </a:tcPr>
-                </a:tc>
-              </a:tr>
-              <a:tr h="457200">
-                <a:tc>
-                  <a:txBody>
-                    <a:bodyPr wrap="square"/>
-                    <a:lstStyle/>
-                    <a:p>
-                      <a:r>
-                        <a:rPr sz="1500" b="1">
-                          <a:solidFill>
-                            <a:srgbClr val="1F3A5F"/>
-                          </a:solidFill>
-                          <a:latin typeface="Meiryo"/>
-                        </a:rPr>
-                        <a:t>LC</a:t>
-                      </a:r>
-                    </a:p>
-                  </a:txBody>
-                  <a:tcPr>
-                    <a:solidFill>
-                      <a:srgbClr val="FFFFFF"/>
-                    </a:solidFill>
-                  </a:tcPr>
-                </a:tc>
-                <a:tc>
-                  <a:txBody>
-                    <a:bodyPr wrap="square"/>
-                    <a:lstStyle/>
-                    <a:p>
-                      <a:r>
-                        <a:rPr sz="1500" b="0">
-                          <a:solidFill>
-                            <a:srgbClr val="444444"/>
-                          </a:solidFill>
-                          <a:latin typeface="Meiryo"/>
-                        </a:rPr>
-                        <a:t>SCを小型化・ツメで固定</a:t>
-                      </a:r>
-                    </a:p>
-                  </a:txBody>
-                  <a:tcPr>
-                    <a:solidFill>
-                      <a:srgbClr val="FFFFFF"/>
-                    </a:solidFill>
-                  </a:tcPr>
-                </a:tc>
-                <a:tc>
-                  <a:txBody>
-                    <a:bodyPr wrap="square"/>
-                    <a:lstStyle/>
-                    <a:p>
-                      <a:r>
-                        <a:rPr sz="1500" b="0">
-                          <a:solidFill>
-                            <a:srgbClr val="444444"/>
-                          </a:solidFill>
-                          <a:latin typeface="Meiryo"/>
-                        </a:rPr>
-                        <a:t>データセンター・スイッチ</a:t>
-                      </a:r>
-                    </a:p>
-                  </a:txBody>
-                  <a:tcPr>
-                    <a:solidFill>
-                      <a:srgbClr val="FFFFFF"/>
-                    </a:solidFill>
-                  </a:tcPr>
-                </a:tc>
-              </a:tr>
-              <a:tr h="457200">
-                <a:tc>
-                  <a:txBody>
-                    <a:bodyPr wrap="square"/>
-                    <a:lstStyle/>
-                    <a:p>
-                      <a:r>
-                        <a:rPr sz="1500" b="1">
-                          <a:solidFill>
-                            <a:srgbClr val="1F3A5F"/>
-                          </a:solidFill>
-                          <a:latin typeface="Meiryo"/>
-                        </a:rPr>
-                        <a:t>ST</a:t>
-                      </a:r>
-                    </a:p>
-                  </a:txBody>
-                  <a:tcPr>
-                    <a:solidFill>
-                      <a:srgbClr val="EDF3FA"/>
-                    </a:solidFill>
-                  </a:tcPr>
-                </a:tc>
-                <a:tc>
-                  <a:txBody>
-                    <a:bodyPr wrap="square"/>
-                    <a:lstStyle/>
-                    <a:p>
-                      <a:r>
-                        <a:rPr sz="1500" b="0">
-                          <a:solidFill>
-                            <a:srgbClr val="444444"/>
-                          </a:solidFill>
-                          <a:latin typeface="Meiryo"/>
-                        </a:rPr>
-                        <a:t>丸型・ひねって固定（バヨネット）</a:t>
-                      </a:r>
-                    </a:p>
-                  </a:txBody>
-                  <a:tcPr>
-                    <a:solidFill>
-                      <a:srgbClr val="EDF3FA"/>
-                    </a:solidFill>
-                  </a:tcPr>
-                </a:tc>
-                <a:tc>
-                  <a:txBody>
-                    <a:bodyPr wrap="square"/>
-                    <a:lstStyle/>
-                    <a:p>
-                      <a:r>
-                        <a:rPr sz="1500" b="0">
-                          <a:solidFill>
-                            <a:srgbClr val="444444"/>
-                          </a:solidFill>
-                          <a:latin typeface="Meiryo"/>
-                        </a:rPr>
-                        <a:t>古めの設備・LAN</a:t>
-                      </a:r>
-                    </a:p>
-                  </a:txBody>
-                  <a:tcPr>
-                    <a:solidFill>
-                      <a:srgbClr val="EDF3FA"/>
-                    </a:solidFill>
-                  </a:tcPr>
-                </a:tc>
-              </a:tr>
-              <a:tr h="457200">
-                <a:tc>
-                  <a:txBody>
-                    <a:bodyPr wrap="square"/>
-                    <a:lstStyle/>
-                    <a:p>
-                      <a:r>
-                        <a:rPr sz="1500" b="1">
-                          <a:solidFill>
-                            <a:srgbClr val="1F3A5F"/>
-                          </a:solidFill>
-                          <a:latin typeface="Meiryo"/>
-                        </a:rPr>
-                        <a:t>FC</a:t>
-                      </a:r>
-                    </a:p>
-                  </a:txBody>
-                  <a:tcPr>
-                    <a:solidFill>
-                      <a:srgbClr val="FFFFFF"/>
-                    </a:solidFill>
-                  </a:tcPr>
-                </a:tc>
-                <a:tc>
-                  <a:txBody>
-                    <a:bodyPr wrap="square"/>
-                    <a:lstStyle/>
-                    <a:p>
-                      <a:r>
-                        <a:rPr sz="1500" b="0">
-                          <a:solidFill>
-                            <a:srgbClr val="444444"/>
-                          </a:solidFill>
-                          <a:latin typeface="Meiryo"/>
-                        </a:rPr>
-                        <a:t>丸型・ねじで締めて固定</a:t>
-                      </a:r>
-                    </a:p>
-                  </a:txBody>
-                  <a:tcPr>
-                    <a:solidFill>
-                      <a:srgbClr val="FFFFFF"/>
-                    </a:solidFill>
-                  </a:tcPr>
-                </a:tc>
-                <a:tc>
-                  <a:txBody>
-                    <a:bodyPr wrap="square"/>
-                    <a:lstStyle/>
-                    <a:p>
-                      <a:r>
-                        <a:rPr sz="1500" b="0">
-                          <a:solidFill>
-                            <a:srgbClr val="444444"/>
-                          </a:solidFill>
-                          <a:latin typeface="Meiryo"/>
-                        </a:rPr>
-                        <a:t>計測器・産業用</a:t>
-                      </a:r>
-                    </a:p>
-                  </a:txBody>
-                  <a:tcPr>
-                    <a:solidFill>
-                      <a:srgbClr val="FFFFFF"/>
-                    </a:solidFill>
-                  </a:tcPr>
-                </a:tc>
-              </a:tr>
-            </a:tbl>
-          </a:graphicData>
-        </a:graphic>
-      </p:graphicFrame>
-      <p:sp>
-        <p:nvSpPr>
-          <p:cNvPr id="4" name="Rounded Rectangle 3"/>
-          <p:cNvSpPr/>
-          <p:nvPr/>
-        </p:nvSpPr>
-        <p:spPr>
-          <a:xfrm>
-            <a:off x="937259" y="4206240"/>
-            <a:ext cx="2331720" cy="1828800"/>
-          </a:xfrm>
-          <a:prstGeom prst="roundRect">
-            <a:avLst/>
-          </a:prstGeom>
-          <a:solidFill>
-            <a:srgbClr val="EDF3FA"/>
-          </a:solidFill>
-          <a:ln w="12700">
-            <a:solidFill>
-              <a:srgbClr val="2E6DB4"/>
-            </a:solidFill>
-          </a:ln>
-          <a:effectLst/>
-        </p:spPr>
-        <p:style>
-          <a:lnRef idx="1">
-            <a:schemeClr val="accent1"/>
-          </a:lnRef>
-          <a:fillRef idx="3">
-            <a:schemeClr val="accent1"/>
-          </a:fillRef>
-          <a:effectRef idx="2">
-            <a:schemeClr val="accent1"/>
-          </a:effectRef>
-          <a:fontRef idx="minor">
-            <a:schemeClr val="lt1"/>
-          </a:fontRef>
-        </p:style>
-        <p:txBody>
-          <a:bodyPr rtlCol="0" anchor="ctr"/>
-          <a:lstStyle/>
-          <a:p>
-            <a:pPr algn="ctr"/>
-          </a:p>
-        </p:txBody>
-      </p:sp>
-      <p:sp>
-        <p:nvSpPr>
-          <p:cNvPr id="5" name="TextBox 4"/>
-          <p:cNvSpPr txBox="1"/>
-          <p:nvPr/>
-        </p:nvSpPr>
-        <p:spPr>
-          <a:xfrm>
-            <a:off x="937259" y="4279392"/>
-            <a:ext cx="2331720" cy="365760"/>
-          </a:xfrm>
-          <a:prstGeom prst="rect">
-            <a:avLst/>
-          </a:prstGeom>
-          <a:noFill/>
-        </p:spPr>
-        <p:txBody>
-          <a:bodyPr wrap="square" tIns="0" bIns="0">
-            <a:spAutoFit/>
-          </a:bodyPr>
-          <a:lstStyle/>
-          <a:p>
-            <a:pPr algn="ctr"/>
-            <a:r>
-              <a:rPr sz="1800" b="1">
-                <a:solidFill>
-                  <a:srgbClr val="1F3A5F"/>
-                </a:solidFill>
-                <a:latin typeface="Meiryo"/>
-              </a:rPr>
-              <a:t>SC</a:t>
-            </a:r>
-          </a:p>
-        </p:txBody>
-      </p:sp>
-      <p:sp>
-        <p:nvSpPr>
-          <p:cNvPr id="6" name="Rectangle 5"/>
-          <p:cNvSpPr/>
-          <p:nvPr/>
-        </p:nvSpPr>
-        <p:spPr>
-          <a:xfrm>
-            <a:off x="1783079" y="4782312"/>
-            <a:ext cx="640080" cy="640080"/>
-          </a:xfrm>
-          <a:prstGeom prst="rect">
-            <a:avLst/>
-          </a:prstGeom>
-          <a:solidFill>
-            <a:srgbClr val="1F3A5F"/>
-          </a:solidFill>
-          <a:ln>
-            <a:solidFill>
-              <a:srgbClr val="1F3A5F"/>
-            </a:solidFill>
-          </a:ln>
-          <a:effectLst/>
-        </p:spPr>
-        <p:style>
-          <a:lnRef idx="1">
-            <a:schemeClr val="accent1"/>
-          </a:lnRef>
-          <a:fillRef idx="3">
-            <a:schemeClr val="accent1"/>
-          </a:fillRef>
-          <a:effectRef idx="2">
-            <a:schemeClr val="accent1"/>
-          </a:effectRef>
-          <a:fontRef idx="minor">
-            <a:schemeClr val="lt1"/>
-          </a:fontRef>
-        </p:style>
-        <p:txBody>
-          <a:bodyPr rtlCol="0" anchor="ctr"/>
-          <a:lstStyle/>
-          <a:p>
-            <a:pPr algn="ctr"/>
-          </a:p>
-        </p:txBody>
-      </p:sp>
-      <p:sp>
-        <p:nvSpPr>
-          <p:cNvPr id="7" name="Oval 6"/>
-          <p:cNvSpPr/>
-          <p:nvPr/>
-        </p:nvSpPr>
-        <p:spPr>
-          <a:xfrm>
-            <a:off x="2029967" y="5029200"/>
-            <a:ext cx="146304" cy="146304"/>
-          </a:xfrm>
-          <a:prstGeom prst="ellipse">
-            <a:avLst/>
-          </a:prstGeom>
-          <a:solidFill>
-            <a:srgbClr val="FFFFFF"/>
-          </a:solidFill>
-          <a:ln>
-            <a:noFill/>
-          </a:ln>
-          <a:effectLst/>
-        </p:spPr>
-        <p:style>
-          <a:lnRef idx="1">
-            <a:schemeClr val="accent1"/>
-          </a:lnRef>
-          <a:fillRef idx="3">
-            <a:schemeClr val="accent1"/>
-          </a:fillRef>
-          <a:effectRef idx="2">
-            <a:schemeClr val="accent1"/>
-          </a:effectRef>
-          <a:fontRef idx="minor">
-            <a:schemeClr val="lt1"/>
-          </a:fontRef>
-        </p:style>
-        <p:txBody>
-          <a:bodyPr rtlCol="0" anchor="ctr"/>
-          <a:lstStyle/>
-          <a:p>
-            <a:pPr algn="ctr"/>
-          </a:p>
-        </p:txBody>
-      </p:sp>
-      <p:sp>
-        <p:nvSpPr>
-          <p:cNvPr id="8" name="TextBox 7"/>
-          <p:cNvSpPr txBox="1"/>
-          <p:nvPr/>
-        </p:nvSpPr>
-        <p:spPr>
-          <a:xfrm>
-            <a:off x="1028700" y="5650992"/>
-            <a:ext cx="2148839" cy="320040"/>
-          </a:xfrm>
-          <a:prstGeom prst="rect">
-            <a:avLst/>
-          </a:prstGeom>
-          <a:noFill/>
-        </p:spPr>
-        <p:txBody>
-          <a:bodyPr wrap="square" tIns="0" bIns="0">
-            <a:spAutoFit/>
-          </a:bodyPr>
-          <a:lstStyle/>
-          <a:p>
-            <a:pPr algn="ctr"/>
-            <a:r>
-              <a:rPr sz="1200" b="0">
-                <a:solidFill>
-                  <a:srgbClr val="444444"/>
-                </a:solidFill>
-                <a:latin typeface="Meiryo"/>
-              </a:rPr>
-              <a:t>角型・押す</a:t>
-            </a:r>
-          </a:p>
-        </p:txBody>
-      </p:sp>
-      <p:sp>
-        <p:nvSpPr>
-          <p:cNvPr id="9" name="Rounded Rectangle 8"/>
-          <p:cNvSpPr/>
-          <p:nvPr/>
-        </p:nvSpPr>
-        <p:spPr>
-          <a:xfrm>
-            <a:off x="3680460" y="4206240"/>
-            <a:ext cx="2331720" cy="1828800"/>
-          </a:xfrm>
-          <a:prstGeom prst="roundRect">
-            <a:avLst/>
-          </a:prstGeom>
-          <a:solidFill>
-            <a:srgbClr val="EDF3FA"/>
-          </a:solidFill>
-          <a:ln w="12700">
-            <a:solidFill>
-              <a:srgbClr val="2E6DB4"/>
-            </a:solidFill>
-          </a:ln>
-          <a:effectLst/>
-        </p:spPr>
-        <p:style>
-          <a:lnRef idx="1">
-            <a:schemeClr val="accent1"/>
-          </a:lnRef>
-          <a:fillRef idx="3">
-            <a:schemeClr val="accent1"/>
-          </a:fillRef>
-          <a:effectRef idx="2">
-            <a:schemeClr val="accent1"/>
-          </a:effectRef>
-          <a:fontRef idx="minor">
-            <a:schemeClr val="lt1"/>
-          </a:fontRef>
-        </p:style>
-        <p:txBody>
-          <a:bodyPr rtlCol="0" anchor="ctr"/>
-          <a:lstStyle/>
-          <a:p>
-            <a:pPr algn="ctr"/>
-          </a:p>
-        </p:txBody>
-      </p:sp>
-      <p:sp>
-        <p:nvSpPr>
-          <p:cNvPr id="10" name="TextBox 9"/>
-          <p:cNvSpPr txBox="1"/>
-          <p:nvPr/>
-        </p:nvSpPr>
-        <p:spPr>
-          <a:xfrm>
-            <a:off x="3680460" y="4279392"/>
-            <a:ext cx="2331720" cy="365760"/>
-          </a:xfrm>
-          <a:prstGeom prst="rect">
-            <a:avLst/>
-          </a:prstGeom>
-          <a:noFill/>
-        </p:spPr>
-        <p:txBody>
-          <a:bodyPr wrap="square" tIns="0" bIns="0">
-            <a:spAutoFit/>
-          </a:bodyPr>
-          <a:lstStyle/>
-          <a:p>
-            <a:pPr algn="ctr"/>
-            <a:r>
-              <a:rPr sz="1800" b="1">
-                <a:solidFill>
-                  <a:srgbClr val="1F3A5F"/>
-                </a:solidFill>
-                <a:latin typeface="Meiryo"/>
-              </a:rPr>
-              <a:t>LC</a:t>
-            </a:r>
-          </a:p>
-        </p:txBody>
-      </p:sp>
-      <p:sp>
-        <p:nvSpPr>
-          <p:cNvPr id="11" name="Rectangle 10"/>
-          <p:cNvSpPr/>
-          <p:nvPr/>
-        </p:nvSpPr>
-        <p:spPr>
-          <a:xfrm>
-            <a:off x="4626864" y="4882896"/>
-            <a:ext cx="438912" cy="438912"/>
-          </a:xfrm>
-          <a:prstGeom prst="rect">
-            <a:avLst/>
-          </a:prstGeom>
-          <a:solidFill>
-            <a:srgbClr val="1F3A5F"/>
-          </a:solidFill>
-          <a:ln>
-            <a:solidFill>
-              <a:srgbClr val="1F3A5F"/>
-            </a:solidFill>
-          </a:ln>
-          <a:effectLst/>
-        </p:spPr>
-        <p:style>
-          <a:lnRef idx="1">
-            <a:schemeClr val="accent1"/>
-          </a:lnRef>
-          <a:fillRef idx="3">
-            <a:schemeClr val="accent1"/>
-          </a:fillRef>
-          <a:effectRef idx="2">
-            <a:schemeClr val="accent1"/>
-          </a:effectRef>
-          <a:fontRef idx="minor">
-            <a:schemeClr val="lt1"/>
-          </a:fontRef>
-        </p:style>
-        <p:txBody>
-          <a:bodyPr rtlCol="0" anchor="ctr"/>
-          <a:lstStyle/>
-          <a:p>
-            <a:pPr algn="ctr"/>
-          </a:p>
-        </p:txBody>
-      </p:sp>
-      <p:sp>
-        <p:nvSpPr>
-          <p:cNvPr id="12" name="Oval 11"/>
-          <p:cNvSpPr/>
-          <p:nvPr/>
-        </p:nvSpPr>
-        <p:spPr>
-          <a:xfrm>
-            <a:off x="4773168" y="5029200"/>
-            <a:ext cx="146304" cy="146304"/>
-          </a:xfrm>
-          <a:prstGeom prst="ellipse">
-            <a:avLst/>
-          </a:prstGeom>
-          <a:solidFill>
-            <a:srgbClr val="FFFFFF"/>
-          </a:solidFill>
-          <a:ln>
-            <a:noFill/>
-          </a:ln>
-          <a:effectLst/>
-        </p:spPr>
-        <p:style>
-          <a:lnRef idx="1">
-            <a:schemeClr val="accent1"/>
-          </a:lnRef>
-          <a:fillRef idx="3">
-            <a:schemeClr val="accent1"/>
-          </a:fillRef>
-          <a:effectRef idx="2">
-            <a:schemeClr val="accent1"/>
-          </a:effectRef>
-          <a:fontRef idx="minor">
-            <a:schemeClr val="lt1"/>
-          </a:fontRef>
-        </p:style>
-        <p:txBody>
-          <a:bodyPr rtlCol="0" anchor="ctr"/>
-          <a:lstStyle/>
-          <a:p>
-            <a:pPr algn="ctr"/>
-          </a:p>
-        </p:txBody>
-      </p:sp>
-      <p:sp>
-        <p:nvSpPr>
-          <p:cNvPr id="13" name="TextBox 12"/>
-          <p:cNvSpPr txBox="1"/>
-          <p:nvPr/>
-        </p:nvSpPr>
-        <p:spPr>
-          <a:xfrm>
-            <a:off x="3771900" y="5650992"/>
-            <a:ext cx="2148839" cy="320040"/>
-          </a:xfrm>
-          <a:prstGeom prst="rect">
-            <a:avLst/>
-          </a:prstGeom>
-          <a:noFill/>
-        </p:spPr>
-        <p:txBody>
-          <a:bodyPr wrap="square" tIns="0" bIns="0">
-            <a:spAutoFit/>
-          </a:bodyPr>
-          <a:lstStyle/>
-          <a:p>
-            <a:pPr algn="ctr"/>
-            <a:r>
-              <a:rPr sz="1200" b="0">
-                <a:solidFill>
-                  <a:srgbClr val="444444"/>
-                </a:solidFill>
-                <a:latin typeface="Meiryo"/>
-              </a:rPr>
-              <a:t>小型・ツメ</a:t>
-            </a:r>
-          </a:p>
-        </p:txBody>
-      </p:sp>
-      <p:sp>
-        <p:nvSpPr>
-          <p:cNvPr id="14" name="Rounded Rectangle 13"/>
-          <p:cNvSpPr/>
-          <p:nvPr/>
-        </p:nvSpPr>
-        <p:spPr>
-          <a:xfrm>
-            <a:off x="6423660" y="4206240"/>
-            <a:ext cx="2331720" cy="1828800"/>
-          </a:xfrm>
-          <a:prstGeom prst="roundRect">
-            <a:avLst/>
-          </a:prstGeom>
-          <a:solidFill>
-            <a:srgbClr val="EDF3FA"/>
-          </a:solidFill>
-          <a:ln w="12700">
-            <a:solidFill>
-              <a:srgbClr val="2E6DB4"/>
-            </a:solidFill>
-          </a:ln>
-          <a:effectLst/>
-        </p:spPr>
-        <p:style>
-          <a:lnRef idx="1">
-            <a:schemeClr val="accent1"/>
-          </a:lnRef>
-          <a:fillRef idx="3">
-            <a:schemeClr val="accent1"/>
-          </a:fillRef>
-          <a:effectRef idx="2">
-            <a:schemeClr val="accent1"/>
-          </a:effectRef>
-          <a:fontRef idx="minor">
-            <a:schemeClr val="lt1"/>
-          </a:fontRef>
-        </p:style>
-        <p:txBody>
-          <a:bodyPr rtlCol="0" anchor="ctr"/>
-          <a:lstStyle/>
-          <a:p>
-            <a:pPr algn="ctr"/>
-          </a:p>
-        </p:txBody>
-      </p:sp>
-      <p:sp>
-        <p:nvSpPr>
-          <p:cNvPr id="15" name="TextBox 14"/>
-          <p:cNvSpPr txBox="1"/>
-          <p:nvPr/>
-        </p:nvSpPr>
-        <p:spPr>
-          <a:xfrm>
-            <a:off x="6423660" y="4279392"/>
-            <a:ext cx="2331720" cy="365760"/>
-          </a:xfrm>
-          <a:prstGeom prst="rect">
-            <a:avLst/>
-          </a:prstGeom>
-          <a:noFill/>
-        </p:spPr>
-        <p:txBody>
-          <a:bodyPr wrap="square" tIns="0" bIns="0">
-            <a:spAutoFit/>
-          </a:bodyPr>
-          <a:lstStyle/>
-          <a:p>
-            <a:pPr algn="ctr"/>
-            <a:r>
-              <a:rPr sz="1800" b="1">
-                <a:solidFill>
-                  <a:srgbClr val="1F3A5F"/>
-                </a:solidFill>
-                <a:latin typeface="Meiryo"/>
-              </a:rPr>
-              <a:t>ST</a:t>
-            </a:r>
-          </a:p>
-        </p:txBody>
-      </p:sp>
-      <p:sp>
-        <p:nvSpPr>
-          <p:cNvPr id="16" name="Oval 15"/>
-          <p:cNvSpPr/>
-          <p:nvPr/>
-        </p:nvSpPr>
-        <p:spPr>
-          <a:xfrm>
-            <a:off x="7269480" y="4782312"/>
-            <a:ext cx="640080" cy="640080"/>
-          </a:xfrm>
-          <a:prstGeom prst="ellipse">
-            <a:avLst/>
-          </a:prstGeom>
-          <a:solidFill>
-            <a:srgbClr val="1F3A5F"/>
-          </a:solidFill>
-          <a:ln>
-            <a:solidFill>
-              <a:srgbClr val="1F3A5F"/>
-            </a:solidFill>
-          </a:ln>
-          <a:effectLst/>
-        </p:spPr>
-        <p:style>
-          <a:lnRef idx="1">
-            <a:schemeClr val="accent1"/>
-          </a:lnRef>
-          <a:fillRef idx="3">
-            <a:schemeClr val="accent1"/>
-          </a:fillRef>
-          <a:effectRef idx="2">
-            <a:schemeClr val="accent1"/>
-          </a:effectRef>
-          <a:fontRef idx="minor">
-            <a:schemeClr val="lt1"/>
-          </a:fontRef>
-        </p:style>
-        <p:txBody>
-          <a:bodyPr rtlCol="0" anchor="ctr"/>
-          <a:lstStyle/>
-          <a:p>
-            <a:pPr algn="ctr"/>
-          </a:p>
-        </p:txBody>
-      </p:sp>
-      <p:sp>
-        <p:nvSpPr>
-          <p:cNvPr id="17" name="Oval 16"/>
-          <p:cNvSpPr/>
-          <p:nvPr/>
-        </p:nvSpPr>
-        <p:spPr>
-          <a:xfrm>
-            <a:off x="7516368" y="5029200"/>
-            <a:ext cx="146304" cy="146304"/>
-          </a:xfrm>
-          <a:prstGeom prst="ellipse">
-            <a:avLst/>
-          </a:prstGeom>
-          <a:solidFill>
-            <a:srgbClr val="FFFFFF"/>
-          </a:solidFill>
-          <a:ln>
-            <a:noFill/>
-          </a:ln>
-          <a:effectLst/>
-        </p:spPr>
-        <p:style>
-          <a:lnRef idx="1">
-            <a:schemeClr val="accent1"/>
-          </a:lnRef>
-          <a:fillRef idx="3">
-            <a:schemeClr val="accent1"/>
-          </a:fillRef>
-          <a:effectRef idx="2">
-            <a:schemeClr val="accent1"/>
-          </a:effectRef>
-          <a:fontRef idx="minor">
-            <a:schemeClr val="lt1"/>
-          </a:fontRef>
-        </p:style>
-        <p:txBody>
-          <a:bodyPr rtlCol="0" anchor="ctr"/>
-          <a:lstStyle/>
-          <a:p>
-            <a:pPr algn="ctr"/>
-          </a:p>
-        </p:txBody>
-      </p:sp>
-      <p:sp>
-        <p:nvSpPr>
-          <p:cNvPr id="18" name="TextBox 17"/>
-          <p:cNvSpPr txBox="1"/>
-          <p:nvPr/>
-        </p:nvSpPr>
-        <p:spPr>
-          <a:xfrm>
-            <a:off x="6515100" y="5650992"/>
-            <a:ext cx="2148839" cy="320040"/>
-          </a:xfrm>
-          <a:prstGeom prst="rect">
-            <a:avLst/>
-          </a:prstGeom>
-          <a:noFill/>
-        </p:spPr>
-        <p:txBody>
-          <a:bodyPr wrap="square" tIns="0" bIns="0">
-            <a:spAutoFit/>
-          </a:bodyPr>
-          <a:lstStyle/>
-          <a:p>
-            <a:pPr algn="ctr"/>
-            <a:r>
-              <a:rPr sz="1200" b="0">
-                <a:solidFill>
-                  <a:srgbClr val="444444"/>
-                </a:solidFill>
-                <a:latin typeface="Meiryo"/>
-              </a:rPr>
-              <a:t>丸型・ひねる</a:t>
-            </a:r>
-          </a:p>
-        </p:txBody>
-      </p:sp>
-      <p:sp>
-        <p:nvSpPr>
-          <p:cNvPr id="19" name="Rounded Rectangle 18"/>
-          <p:cNvSpPr/>
-          <p:nvPr/>
-        </p:nvSpPr>
-        <p:spPr>
-          <a:xfrm>
-            <a:off x="9166860" y="4206240"/>
-            <a:ext cx="2331720" cy="1828800"/>
-          </a:xfrm>
-          <a:prstGeom prst="roundRect">
-            <a:avLst/>
-          </a:prstGeom>
-          <a:solidFill>
-            <a:srgbClr val="EDF3FA"/>
-          </a:solidFill>
-          <a:ln w="12700">
-            <a:solidFill>
-              <a:srgbClr val="2E6DB4"/>
-            </a:solidFill>
-          </a:ln>
-          <a:effectLst/>
-        </p:spPr>
-        <p:style>
-          <a:lnRef idx="1">
-            <a:schemeClr val="accent1"/>
-          </a:lnRef>
-          <a:fillRef idx="3">
-            <a:schemeClr val="accent1"/>
-          </a:fillRef>
-          <a:effectRef idx="2">
-            <a:schemeClr val="accent1"/>
-          </a:effectRef>
-          <a:fontRef idx="minor">
-            <a:schemeClr val="lt1"/>
-          </a:fontRef>
-        </p:style>
-        <p:txBody>
-          <a:bodyPr rtlCol="0" anchor="ctr"/>
-          <a:lstStyle/>
-          <a:p>
-            <a:pPr algn="ctr"/>
-          </a:p>
-        </p:txBody>
-      </p:sp>
-      <p:sp>
-        <p:nvSpPr>
-          <p:cNvPr id="20" name="TextBox 19"/>
-          <p:cNvSpPr txBox="1"/>
-          <p:nvPr/>
-        </p:nvSpPr>
-        <p:spPr>
-          <a:xfrm>
-            <a:off x="9166860" y="4279392"/>
-            <a:ext cx="2331720" cy="365760"/>
-          </a:xfrm>
-          <a:prstGeom prst="rect">
-            <a:avLst/>
-          </a:prstGeom>
-          <a:noFill/>
-        </p:spPr>
-        <p:txBody>
-          <a:bodyPr wrap="square" tIns="0" bIns="0">
-            <a:spAutoFit/>
-          </a:bodyPr>
-          <a:lstStyle/>
-          <a:p>
-            <a:pPr algn="ctr"/>
-            <a:r>
-              <a:rPr sz="1800" b="1">
-                <a:solidFill>
-                  <a:srgbClr val="1F3A5F"/>
-                </a:solidFill>
-                <a:latin typeface="Meiryo"/>
-              </a:rPr>
-              <a:t>FC</a:t>
-            </a:r>
-          </a:p>
-        </p:txBody>
-      </p:sp>
-      <p:sp>
-        <p:nvSpPr>
-          <p:cNvPr id="21" name="Hexagon 20"/>
-          <p:cNvSpPr/>
-          <p:nvPr/>
-        </p:nvSpPr>
-        <p:spPr>
-          <a:xfrm>
-            <a:off x="9966960" y="4773168"/>
-            <a:ext cx="731520" cy="658368"/>
-          </a:xfrm>
-          <a:prstGeom prst="hexagon">
-            <a:avLst/>
-          </a:prstGeom>
-          <a:solidFill>
-            <a:srgbClr val="1F3A5F"/>
-          </a:solidFill>
-          <a:ln>
-            <a:solidFill>
-              <a:srgbClr val="1F3A5F"/>
-            </a:solidFill>
-          </a:ln>
-          <a:effectLst/>
-        </p:spPr>
-        <p:style>
-          <a:lnRef idx="1">
-            <a:schemeClr val="accent1"/>
-          </a:lnRef>
-          <a:fillRef idx="3">
-            <a:schemeClr val="accent1"/>
-          </a:fillRef>
-          <a:effectRef idx="2">
-            <a:schemeClr val="accent1"/>
-          </a:effectRef>
-          <a:fontRef idx="minor">
-            <a:schemeClr val="lt1"/>
-          </a:fontRef>
-        </p:style>
-        <p:txBody>
-          <a:bodyPr rtlCol="0" anchor="ctr"/>
-          <a:lstStyle/>
-          <a:p>
-            <a:pPr algn="ctr"/>
-          </a:p>
-        </p:txBody>
-      </p:sp>
-      <p:sp>
-        <p:nvSpPr>
-          <p:cNvPr id="22" name="Oval 21"/>
-          <p:cNvSpPr/>
-          <p:nvPr/>
-        </p:nvSpPr>
-        <p:spPr>
-          <a:xfrm>
-            <a:off x="10259568" y="5029200"/>
-            <a:ext cx="146304" cy="146304"/>
-          </a:xfrm>
-          <a:prstGeom prst="ellipse">
-            <a:avLst/>
-          </a:prstGeom>
-          <a:solidFill>
-            <a:srgbClr val="FFFFFF"/>
-          </a:solidFill>
-          <a:ln>
-            <a:noFill/>
-          </a:ln>
-          <a:effectLst/>
-        </p:spPr>
-        <p:style>
-          <a:lnRef idx="1">
-            <a:schemeClr val="accent1"/>
-          </a:lnRef>
-          <a:fillRef idx="3">
-            <a:schemeClr val="accent1"/>
-          </a:fillRef>
-          <a:effectRef idx="2">
-            <a:schemeClr val="accent1"/>
-          </a:effectRef>
-          <a:fontRef idx="minor">
-            <a:schemeClr val="lt1"/>
-          </a:fontRef>
-        </p:style>
-        <p:txBody>
-          <a:bodyPr rtlCol="0" anchor="ctr"/>
-          <a:lstStyle/>
-          <a:p>
-            <a:pPr algn="ctr"/>
-          </a:p>
-        </p:txBody>
-      </p:sp>
-      <p:sp>
-        <p:nvSpPr>
-          <p:cNvPr id="23" name="TextBox 22"/>
-          <p:cNvSpPr txBox="1"/>
-          <p:nvPr/>
-        </p:nvSpPr>
-        <p:spPr>
-          <a:xfrm>
-            <a:off x="9258300" y="5650992"/>
-            <a:ext cx="2148839" cy="320040"/>
-          </a:xfrm>
-          <a:prstGeom prst="rect">
-            <a:avLst/>
-          </a:prstGeom>
-          <a:noFill/>
-        </p:spPr>
-        <p:txBody>
-          <a:bodyPr wrap="square" tIns="0" bIns="0">
-            <a:spAutoFit/>
-          </a:bodyPr>
-          <a:lstStyle/>
-          <a:p>
-            <a:pPr algn="ctr"/>
-            <a:r>
-              <a:rPr sz="1200" b="0">
-                <a:solidFill>
-                  <a:srgbClr val="444444"/>
-                </a:solidFill>
-                <a:latin typeface="Meiryo"/>
-              </a:rPr>
-              <a:t>丸型・ねじ</a:t>
-            </a:r>
-          </a:p>
-        </p:txBody>
-      </p:sp>
-    </p:spTree>
-  </p:cSld>
-  <p:clrMapOvr>
-    <a:masterClrMapping/>
-  </p:clrMapOvr>
-</p:sld>
-</file>
-
-<file path=ppt/slides/slide19.xml><?xml version="1.0" encoding="utf-8"?>
-<p:sld xmlns:a="http://schemas.openxmlformats.org/drawingml/2006/main" xmlns:p="http://schemas.openxmlformats.org/presentationml/2006/main" xmlns:r="http://schemas.openxmlformats.org/officeDocument/2006/relationships">
-  <p:cSld>
-    <p:bg>
-      <p:bgPr>
-        <a:solidFill>
-          <a:srgbClr val="FFFFFF"/>
-        </a:solidFill>
-        <a:effectLst/>
-      </p:bgPr>
-    </p:bg>
-    <p:spTree>
-      <p:nvGrpSpPr>
-        <p:cNvPr id="1" name=""/>
-        <p:cNvGrpSpPr/>
-        <p:nvPr/>
-      </p:nvGrpSpPr>
-      <p:grpSpPr/>
-      <p:sp>
-        <p:nvSpPr>
-          <p:cNvPr id="2" name="Rectangle 1"/>
-          <p:cNvSpPr/>
-          <p:nvPr/>
-        </p:nvSpPr>
-        <p:spPr>
-          <a:xfrm>
-            <a:off x="0" y="0"/>
-            <a:ext cx="12191695" cy="960120"/>
-          </a:xfrm>
-          <a:prstGeom prst="rect">
-            <a:avLst/>
-          </a:prstGeom>
-          <a:solidFill>
-            <a:srgbClr val="1F3A5F"/>
-          </a:solidFill>
-          <a:ln>
-            <a:noFill/>
-          </a:ln>
-        </p:spPr>
-        <p:style>
-          <a:lnRef idx="1">
-            <a:schemeClr val="accent1"/>
-          </a:lnRef>
-          <a:fillRef idx="3">
-            <a:schemeClr val="accent1"/>
-          </a:fillRef>
-          <a:effectRef idx="2">
-            <a:schemeClr val="accent1"/>
-          </a:effectRef>
-          <a:fontRef idx="minor">
-            <a:schemeClr val="lt1"/>
-          </a:fontRef>
-        </p:style>
-        <p:txBody>
-          <a:bodyPr rtlCol="0" anchor="ctr" wrap="square" lIns="457200"/>
-          <a:lstStyle/>
-          <a:p>
-            <a:pPr algn="ctr"/>
-            <a:r>
-              <a:rPr sz="2600" b="1">
-                <a:solidFill>
-                  <a:srgbClr val="FFFFFF"/>
-                </a:solidFill>
-                <a:latin typeface="Meiryo"/>
-              </a:rPr>
               <a:t>まとめ</a:t>
             </a:r>
           </a:p>
@@ -8839,6 +6527,77 @@
                 <a:latin typeface="Meiryo"/>
               </a:rPr>
               <a:t>• 成端箱=端末でコネクタ化／クロージャ=途中を防水保護</a:t>
+            </a:r>
+          </a:p>
+        </p:txBody>
+      </p:sp>
+    </p:spTree>
+  </p:cSld>
+  <p:clrMapOvr>
+    <a:masterClrMapping/>
+  </p:clrMapOvr>
+</p:sld>
+</file>
+
+<file path=ppt/slides/slide19.xml><?xml version="1.0" encoding="utf-8"?>
+<p:sld xmlns:a="http://schemas.openxmlformats.org/drawingml/2006/main" xmlns:p="http://schemas.openxmlformats.org/presentationml/2006/main" xmlns:r="http://schemas.openxmlformats.org/officeDocument/2006/relationships">
+  <p:cSld>
+    <p:bg>
+      <p:bgPr>
+        <a:solidFill>
+          <a:srgbClr val="2E6DB4"/>
+        </a:solidFill>
+        <a:effectLst/>
+      </p:bgPr>
+    </p:bg>
+    <p:spTree>
+      <p:nvGrpSpPr>
+        <p:cNvPr id="1" name=""/>
+        <p:cNvGrpSpPr/>
+        <p:nvPr/>
+      </p:nvGrpSpPr>
+      <p:grpSpPr/>
+      <p:sp>
+        <p:nvSpPr>
+          <p:cNvPr id="2" name="TextBox 1"/>
+          <p:cNvSpPr txBox="1"/>
+          <p:nvPr/>
+        </p:nvSpPr>
+        <p:spPr>
+          <a:xfrm>
+            <a:off x="822960" y="2651760"/>
+            <a:ext cx="10515600" cy="1645920"/>
+          </a:xfrm>
+          <a:prstGeom prst="rect">
+            <a:avLst/>
+          </a:prstGeom>
+          <a:noFill/>
+        </p:spPr>
+        <p:txBody>
+          <a:bodyPr wrap="square">
+            <a:spAutoFit/>
+          </a:bodyPr>
+          <a:lstStyle/>
+          <a:p>
+            <a:r>
+              <a:rPr sz="2400" b="1">
+                <a:solidFill>
+                  <a:srgbClr val="CFE0F2"/>
+                </a:solidFill>
+                <a:latin typeface="Meiryo"/>
+              </a:rPr>
+              <a:t>付録</a:t>
+            </a:r>
+          </a:p>
+          <a:p>
+            <a:r>
+              <a:rPr sz="4000" b="1">
+                <a:solidFill>
+                  <a:srgbClr val="FFFFFF"/>
+                </a:solidFill>
+                <a:latin typeface="Meiryo"/>
+              </a:rPr>
+              <a:t>用語集</a:t>
             </a:r>
           </a:p>
         </p:txBody>
@@ -9083,7 +6842,7 @@
                 </a:solidFill>
                 <a:latin typeface="Meiryo"/>
               </a:rPr>
-              <a:t>  – ケーブルとコードの違い（図解あり）</a:t>
+              <a:t>  – ケーブルとコードの違い</a:t>
             </a:r>
           </a:p>
           <a:p>
@@ -9099,7 +6858,7 @@
                 </a:solidFill>
                 <a:latin typeface="Meiryo"/>
               </a:rPr>
-              <a:t>  – 成端箱とクロージャ／コネクタと規格（図解あり）</a:t>
+              <a:t>  – 成端箱とクロージャ／コネクタと規格</a:t>
             </a:r>
           </a:p>
           <a:p>
@@ -9129,77 +6888,6 @@
 </file>
 
 <file path=ppt/slides/slide20.xml><?xml version="1.0" encoding="utf-8"?>
-<p:sld xmlns:a="http://schemas.openxmlformats.org/drawingml/2006/main" xmlns:p="http://schemas.openxmlformats.org/presentationml/2006/main" xmlns:r="http://schemas.openxmlformats.org/officeDocument/2006/relationships">
-  <p:cSld>
-    <p:bg>
-      <p:bgPr>
-        <a:solidFill>
-          <a:srgbClr val="2E6DB4"/>
-        </a:solidFill>
-        <a:effectLst/>
-      </p:bgPr>
-    </p:bg>
-    <p:spTree>
-      <p:nvGrpSpPr>
-        <p:cNvPr id="1" name=""/>
-        <p:cNvGrpSpPr/>
-        <p:nvPr/>
-      </p:nvGrpSpPr>
-      <p:grpSpPr/>
-      <p:sp>
-        <p:nvSpPr>
-          <p:cNvPr id="2" name="TextBox 1"/>
-          <p:cNvSpPr txBox="1"/>
-          <p:nvPr/>
-        </p:nvSpPr>
-        <p:spPr>
-          <a:xfrm>
-            <a:off x="822960" y="2651760"/>
-            <a:ext cx="10515600" cy="1645920"/>
-          </a:xfrm>
-          <a:prstGeom prst="rect">
-            <a:avLst/>
-          </a:prstGeom>
-          <a:noFill/>
-        </p:spPr>
-        <p:txBody>
-          <a:bodyPr wrap="square">
-            <a:spAutoFit/>
-          </a:bodyPr>
-          <a:lstStyle/>
-          <a:p>
-            <a:r>
-              <a:rPr sz="2400" b="1">
-                <a:solidFill>
-                  <a:srgbClr val="CFE0F2"/>
-                </a:solidFill>
-                <a:latin typeface="Meiryo"/>
-              </a:rPr>
-              <a:t>付録</a:t>
-            </a:r>
-          </a:p>
-          <a:p>
-            <a:r>
-              <a:rPr sz="4000" b="1">
-                <a:solidFill>
-                  <a:srgbClr val="FFFFFF"/>
-                </a:solidFill>
-                <a:latin typeface="Meiryo"/>
-              </a:rPr>
-              <a:t>用語集</a:t>
-            </a:r>
-          </a:p>
-        </p:txBody>
-      </p:sp>
-    </p:spTree>
-  </p:cSld>
-  <p:clrMapOvr>
-    <a:masterClrMapping/>
-  </p:clrMapOvr>
-</p:sld>
-</file>
-
-<file path=ppt/slides/slide21.xml><?xml version="1.0" encoding="utf-8"?>
 <p:sld xmlns:a="http://schemas.openxmlformats.org/drawingml/2006/main" xmlns:p="http://schemas.openxmlformats.org/presentationml/2006/main" xmlns:r="http://schemas.openxmlformats.org/officeDocument/2006/relationships">
   <p:cSld>
     <p:bg>
@@ -9811,7 +7499,7 @@
 </p:sld>
 </file>
 
-<file path=ppt/slides/slide22.xml><?xml version="1.0" encoding="utf-8"?>
+<file path=ppt/slides/slide21.xml><?xml version="1.0" encoding="utf-8"?>
 <p:sld xmlns:a="http://schemas.openxmlformats.org/drawingml/2006/main" xmlns:p="http://schemas.openxmlformats.org/presentationml/2006/main" xmlns:r="http://schemas.openxmlformats.org/officeDocument/2006/relationships">
   <p:cSld>
     <p:bg>
